--- a/classes/slides/011_course_info.pptx
+++ b/classes/slides/011_course_info.pptx
@@ -5,25 +5,24 @@
     <p:sldMasterId id="2147483713" r:id="rId1"/>
   </p:sldMasterIdLst>
   <p:notesMasterIdLst>
-    <p:notesMasterId r:id="rId18"/>
+    <p:notesMasterId r:id="rId17"/>
   </p:notesMasterIdLst>
   <p:sldIdLst>
     <p:sldId id="256" r:id="rId2"/>
     <p:sldId id="257" r:id="rId3"/>
     <p:sldId id="264" r:id="rId4"/>
-    <p:sldId id="280" r:id="rId5"/>
-    <p:sldId id="261" r:id="rId6"/>
-    <p:sldId id="259" r:id="rId7"/>
-    <p:sldId id="271" r:id="rId8"/>
-    <p:sldId id="272" r:id="rId9"/>
-    <p:sldId id="260" r:id="rId10"/>
-    <p:sldId id="273" r:id="rId11"/>
-    <p:sldId id="274" r:id="rId12"/>
-    <p:sldId id="275" r:id="rId13"/>
-    <p:sldId id="276" r:id="rId14"/>
-    <p:sldId id="266" r:id="rId15"/>
-    <p:sldId id="277" r:id="rId16"/>
-    <p:sldId id="278" r:id="rId17"/>
+    <p:sldId id="261" r:id="rId5"/>
+    <p:sldId id="259" r:id="rId6"/>
+    <p:sldId id="271" r:id="rId7"/>
+    <p:sldId id="272" r:id="rId8"/>
+    <p:sldId id="260" r:id="rId9"/>
+    <p:sldId id="273" r:id="rId10"/>
+    <p:sldId id="274" r:id="rId11"/>
+    <p:sldId id="275" r:id="rId12"/>
+    <p:sldId id="276" r:id="rId13"/>
+    <p:sldId id="266" r:id="rId14"/>
+    <p:sldId id="277" r:id="rId15"/>
+    <p:sldId id="278" r:id="rId16"/>
   </p:sldIdLst>
   <p:sldSz cx="12192000" cy="6858000"/>
   <p:notesSz cx="6858000" cy="9144000"/>
@@ -130,20 +129,12 @@
 </p:presentation>
 </file>
 
-<file path=ppt/revisionInfo.xml><?xml version="1.0" encoding="utf-8"?>
-<p1510:revInfo xmlns:a="http://schemas.openxmlformats.org/drawingml/2006/main" xmlns:r="http://schemas.openxmlformats.org/officeDocument/2006/relationships" xmlns:p1510="http://schemas.microsoft.com/office/powerpoint/2015/10/main">
-  <p1510:revLst>
-    <p1510:client id="{B9B0CC25-958C-4F98-9E07-7668337D3071}" v="4" dt="2026-07-31T12:41:21.797"/>
-  </p1510:revLst>
-</p1510:revInfo>
-</file>
-
 <file path=ppt/changesInfos/changesInfo1.xml><?xml version="1.0" encoding="utf-8"?>
 <pc:chgInfo xmlns:a="http://schemas.openxmlformats.org/drawingml/2006/main" xmlns:r="http://schemas.openxmlformats.org/officeDocument/2006/relationships" xmlns:ac="http://schemas.microsoft.com/office/drawing/2013/main/command" xmlns:pc="http://schemas.microsoft.com/office/powerpoint/2013/main/command">
   <pc:docChgLst>
     <pc:chgData name="Frederik Rask Dalby" userId="12c7c68b-47c4-4858-a883-dbd84be7356f" providerId="ADAL" clId="{E9883B15-7D20-4C63-9A3F-08E95C9A44CC}"/>
     <pc:docChg chg="custSel addSld delSld modSld">
-      <pc:chgData name="Frederik Rask Dalby" userId="12c7c68b-47c4-4858-a883-dbd84be7356f" providerId="ADAL" clId="{E9883B15-7D20-4C63-9A3F-08E95C9A44CC}" dt="2026-07-31T12:45:00.752" v="414" actId="47"/>
+      <pc:chgData name="Frederik Rask Dalby" userId="12c7c68b-47c4-4858-a883-dbd84be7356f" providerId="ADAL" clId="{E9883B15-7D20-4C63-9A3F-08E95C9A44CC}" dt="2026-08-03T12:10:55.913" v="415" actId="47"/>
       <pc:docMkLst>
         <pc:docMk/>
       </pc:docMkLst>
@@ -208,43 +199,6 @@
             <ac:picMk id="7" creationId="{45EF9AE5-F7A4-067A-1C5D-676845EC33FA}"/>
           </ac:picMkLst>
         </pc:picChg>
-        <pc:picChg chg="del">
-          <ac:chgData name="Frederik Rask Dalby" userId="12c7c68b-47c4-4858-a883-dbd84be7356f" providerId="ADAL" clId="{E9883B15-7D20-4C63-9A3F-08E95C9A44CC}" dt="2026-07-31T12:34:59.965" v="32" actId="478"/>
-          <ac:picMkLst>
-            <pc:docMk/>
-            <pc:sldMk cId="3458156416" sldId="257"/>
-            <ac:picMk id="8" creationId="{1D43080A-A3D9-952A-E319-D93B8270E964}"/>
-          </ac:picMkLst>
-        </pc:picChg>
-        <pc:picChg chg="del">
-          <ac:chgData name="Frederik Rask Dalby" userId="12c7c68b-47c4-4858-a883-dbd84be7356f" providerId="ADAL" clId="{E9883B15-7D20-4C63-9A3F-08E95C9A44CC}" dt="2026-07-31T12:35:01.068" v="33" actId="478"/>
-          <ac:picMkLst>
-            <pc:docMk/>
-            <pc:sldMk cId="3458156416" sldId="257"/>
-            <ac:picMk id="9" creationId="{B243DF3E-CF30-AF9D-B853-24739FA82B3C}"/>
-          </ac:picMkLst>
-        </pc:picChg>
-      </pc:sldChg>
-      <pc:sldChg chg="del">
-        <pc:chgData name="Frederik Rask Dalby" userId="12c7c68b-47c4-4858-a883-dbd84be7356f" providerId="ADAL" clId="{E9883B15-7D20-4C63-9A3F-08E95C9A44CC}" dt="2026-07-31T12:39:59.816" v="309" actId="47"/>
-        <pc:sldMkLst>
-          <pc:docMk/>
-          <pc:sldMk cId="2201718331" sldId="258"/>
-        </pc:sldMkLst>
-      </pc:sldChg>
-      <pc:sldChg chg="del">
-        <pc:chgData name="Frederik Rask Dalby" userId="12c7c68b-47c4-4858-a883-dbd84be7356f" providerId="ADAL" clId="{E9883B15-7D20-4C63-9A3F-08E95C9A44CC}" dt="2026-07-31T12:34:50.263" v="29" actId="47"/>
-        <pc:sldMkLst>
-          <pc:docMk/>
-          <pc:sldMk cId="784248908" sldId="262"/>
-        </pc:sldMkLst>
-      </pc:sldChg>
-      <pc:sldChg chg="del">
-        <pc:chgData name="Frederik Rask Dalby" userId="12c7c68b-47c4-4858-a883-dbd84be7356f" providerId="ADAL" clId="{E9883B15-7D20-4C63-9A3F-08E95C9A44CC}" dt="2026-07-31T12:34:49.086" v="28" actId="47"/>
-        <pc:sldMkLst>
-          <pc:docMk/>
-          <pc:sldMk cId="3615043685" sldId="263"/>
-        </pc:sldMkLst>
       </pc:sldChg>
       <pc:sldChg chg="addSp delSp modSp mod">
         <pc:chgData name="Frederik Rask Dalby" userId="12c7c68b-47c4-4858-a883-dbd84be7356f" providerId="ADAL" clId="{E9883B15-7D20-4C63-9A3F-08E95C9A44CC}" dt="2026-07-31T12:41:33.797" v="377" actId="404"/>
@@ -268,14 +222,6 @@
             <ac:spMk id="6" creationId="{BDB8A921-BC4E-B6DC-391D-58146F5EE50D}"/>
           </ac:spMkLst>
         </pc:spChg>
-        <pc:spChg chg="del">
-          <ac:chgData name="Frederik Rask Dalby" userId="12c7c68b-47c4-4858-a883-dbd84be7356f" providerId="ADAL" clId="{E9883B15-7D20-4C63-9A3F-08E95C9A44CC}" dt="2026-07-31T12:36:50.271" v="183" actId="478"/>
-          <ac:spMkLst>
-            <pc:docMk/>
-            <pc:sldMk cId="1405357401" sldId="264"/>
-            <ac:spMk id="9" creationId="{A73DCC1A-279B-362B-F827-70B8B9AC0E7B}"/>
-          </ac:spMkLst>
-        </pc:spChg>
         <pc:spChg chg="add mod">
           <ac:chgData name="Frederik Rask Dalby" userId="12c7c68b-47c4-4858-a883-dbd84be7356f" providerId="ADAL" clId="{E9883B15-7D20-4C63-9A3F-08E95C9A44CC}" dt="2026-07-31T12:39:28.246" v="306" actId="1076"/>
           <ac:spMkLst>
@@ -292,14 +238,6 @@
             <ac:spMk id="11" creationId="{95D25E09-FE66-1B55-0C56-7E86E5D0C109}"/>
           </ac:spMkLst>
         </pc:spChg>
-        <pc:picChg chg="del">
-          <ac:chgData name="Frederik Rask Dalby" userId="12c7c68b-47c4-4858-a883-dbd84be7356f" providerId="ADAL" clId="{E9883B15-7D20-4C63-9A3F-08E95C9A44CC}" dt="2026-07-31T12:36:48.395" v="182" actId="478"/>
-          <ac:picMkLst>
-            <pc:docMk/>
-            <pc:sldMk cId="1405357401" sldId="264"/>
-            <ac:picMk id="4" creationId="{845E7D0C-5B88-6AC0-5985-27E6516613F7}"/>
-          </ac:picMkLst>
-        </pc:picChg>
         <pc:picChg chg="add mod">
           <ac:chgData name="Frederik Rask Dalby" userId="12c7c68b-47c4-4858-a883-dbd84be7356f" providerId="ADAL" clId="{E9883B15-7D20-4C63-9A3F-08E95C9A44CC}" dt="2026-07-31T12:38:40.684" v="265" actId="1076"/>
           <ac:picMkLst>
@@ -316,42 +254,6 @@
             <ac:cxnSpMk id="8" creationId="{333FB2C6-5893-8016-FEB3-89901D89580A}"/>
           </ac:cxnSpMkLst>
         </pc:cxnChg>
-      </pc:sldChg>
-      <pc:sldChg chg="del">
-        <pc:chgData name="Frederik Rask Dalby" userId="12c7c68b-47c4-4858-a883-dbd84be7356f" providerId="ADAL" clId="{E9883B15-7D20-4C63-9A3F-08E95C9A44CC}" dt="2026-07-31T12:40:06.847" v="311" actId="47"/>
-        <pc:sldMkLst>
-          <pc:docMk/>
-          <pc:sldMk cId="1525229937" sldId="265"/>
-        </pc:sldMkLst>
-      </pc:sldChg>
-      <pc:sldChg chg="del">
-        <pc:chgData name="Frederik Rask Dalby" userId="12c7c68b-47c4-4858-a883-dbd84be7356f" providerId="ADAL" clId="{E9883B15-7D20-4C63-9A3F-08E95C9A44CC}" dt="2026-07-31T12:40:01.946" v="310" actId="47"/>
-        <pc:sldMkLst>
-          <pc:docMk/>
-          <pc:sldMk cId="123013834" sldId="267"/>
-        </pc:sldMkLst>
-      </pc:sldChg>
-      <pc:sldChg chg="delSp del mod">
-        <pc:chgData name="Frederik Rask Dalby" userId="12c7c68b-47c4-4858-a883-dbd84be7356f" providerId="ADAL" clId="{E9883B15-7D20-4C63-9A3F-08E95C9A44CC}" dt="2026-07-31T12:39:49.621" v="308" actId="47"/>
-        <pc:sldMkLst>
-          <pc:docMk/>
-          <pc:sldMk cId="1928513" sldId="268"/>
-        </pc:sldMkLst>
-        <pc:picChg chg="del">
-          <ac:chgData name="Frederik Rask Dalby" userId="12c7c68b-47c4-4858-a883-dbd84be7356f" providerId="ADAL" clId="{E9883B15-7D20-4C63-9A3F-08E95C9A44CC}" dt="2026-07-31T12:38:36.420" v="262" actId="478"/>
-          <ac:picMkLst>
-            <pc:docMk/>
-            <pc:sldMk cId="1928513" sldId="268"/>
-            <ac:picMk id="5" creationId="{F5CC8150-9E8B-DAD5-11DE-E42CE57523B0}"/>
-          </ac:picMkLst>
-        </pc:picChg>
-      </pc:sldChg>
-      <pc:sldChg chg="del">
-        <pc:chgData name="Frederik Rask Dalby" userId="12c7c68b-47c4-4858-a883-dbd84be7356f" providerId="ADAL" clId="{E9883B15-7D20-4C63-9A3F-08E95C9A44CC}" dt="2026-07-31T12:39:44.446" v="307" actId="47"/>
-        <pc:sldMkLst>
-          <pc:docMk/>
-          <pc:sldMk cId="1003611677" sldId="269"/>
-        </pc:sldMkLst>
       </pc:sldChg>
       <pc:sldChg chg="modSp mod">
         <pc:chgData name="Frederik Rask Dalby" userId="12c7c68b-47c4-4858-a883-dbd84be7356f" providerId="ADAL" clId="{E9883B15-7D20-4C63-9A3F-08E95C9A44CC}" dt="2026-07-31T12:44:09.811" v="408" actId="20577"/>
@@ -376,75 +278,12 @@
           </ac:spMkLst>
         </pc:spChg>
       </pc:sldChg>
-      <pc:sldChg chg="addSp delSp modSp del mod">
-        <pc:chgData name="Frederik Rask Dalby" userId="12c7c68b-47c4-4858-a883-dbd84be7356f" providerId="ADAL" clId="{E9883B15-7D20-4C63-9A3F-08E95C9A44CC}" dt="2026-07-31T12:45:00.752" v="414" actId="47"/>
-        <pc:sldMkLst>
-          <pc:docMk/>
-          <pc:sldMk cId="4056835882" sldId="279"/>
-        </pc:sldMkLst>
-        <pc:spChg chg="del">
-          <ac:chgData name="Frederik Rask Dalby" userId="12c7c68b-47c4-4858-a883-dbd84be7356f" providerId="ADAL" clId="{E9883B15-7D20-4C63-9A3F-08E95C9A44CC}" dt="2026-07-31T12:44:55.628" v="410" actId="478"/>
-          <ac:spMkLst>
-            <pc:docMk/>
-            <pc:sldMk cId="4056835882" sldId="279"/>
-            <ac:spMk id="2" creationId="{20B27D12-2233-84B9-A52A-73443835C662}"/>
-          </ac:spMkLst>
-        </pc:spChg>
-        <pc:spChg chg="add del mod">
-          <ac:chgData name="Frederik Rask Dalby" userId="12c7c68b-47c4-4858-a883-dbd84be7356f" providerId="ADAL" clId="{E9883B15-7D20-4C63-9A3F-08E95C9A44CC}" dt="2026-07-31T12:44:59.460" v="413" actId="478"/>
-          <ac:spMkLst>
-            <pc:docMk/>
-            <pc:sldMk cId="4056835882" sldId="279"/>
-            <ac:spMk id="4" creationId="{42E94CB8-9650-AFA7-7E7E-75FBADDEDC0E}"/>
-          </ac:spMkLst>
-        </pc:spChg>
-        <pc:spChg chg="del">
-          <ac:chgData name="Frederik Rask Dalby" userId="12c7c68b-47c4-4858-a883-dbd84be7356f" providerId="ADAL" clId="{E9883B15-7D20-4C63-9A3F-08E95C9A44CC}" dt="2026-07-31T12:44:54.086" v="409" actId="478"/>
-          <ac:spMkLst>
-            <pc:docMk/>
-            <pc:sldMk cId="4056835882" sldId="279"/>
-            <ac:spMk id="6" creationId="{542826E1-236A-37EE-B8DC-CD0E07F3A690}"/>
-          </ac:spMkLst>
-        </pc:spChg>
-        <pc:spChg chg="del">
-          <ac:chgData name="Frederik Rask Dalby" userId="12c7c68b-47c4-4858-a883-dbd84be7356f" providerId="ADAL" clId="{E9883B15-7D20-4C63-9A3F-08E95C9A44CC}" dt="2026-07-31T12:44:56.884" v="411" actId="478"/>
-          <ac:spMkLst>
-            <pc:docMk/>
-            <pc:sldMk cId="4056835882" sldId="279"/>
-            <ac:spMk id="10" creationId="{228AC0D0-BADC-13BA-D4F5-229DB3E865B8}"/>
-          </ac:spMkLst>
-        </pc:spChg>
-        <pc:picChg chg="del">
-          <ac:chgData name="Frederik Rask Dalby" userId="12c7c68b-47c4-4858-a883-dbd84be7356f" providerId="ADAL" clId="{E9883B15-7D20-4C63-9A3F-08E95C9A44CC}" dt="2026-07-31T12:44:58" v="412" actId="478"/>
-          <ac:picMkLst>
-            <pc:docMk/>
-            <pc:sldMk cId="4056835882" sldId="279"/>
-            <ac:picMk id="9" creationId="{3A955BE5-1B3E-F917-3C12-EB93326B8933}"/>
-          </ac:picMkLst>
-        </pc:picChg>
-      </pc:sldChg>
-      <pc:sldChg chg="delSp modSp new mod">
-        <pc:chgData name="Frederik Rask Dalby" userId="12c7c68b-47c4-4858-a883-dbd84be7356f" providerId="ADAL" clId="{E9883B15-7D20-4C63-9A3F-08E95C9A44CC}" dt="2026-07-31T12:41:48.685" v="378" actId="1076"/>
+      <pc:sldChg chg="delSp modSp new del mod">
+        <pc:chgData name="Frederik Rask Dalby" userId="12c7c68b-47c4-4858-a883-dbd84be7356f" providerId="ADAL" clId="{E9883B15-7D20-4C63-9A3F-08E95C9A44CC}" dt="2026-08-03T12:10:55.913" v="415" actId="47"/>
         <pc:sldMkLst>
           <pc:docMk/>
           <pc:sldMk cId="1629653014" sldId="280"/>
         </pc:sldMkLst>
-        <pc:spChg chg="del">
-          <ac:chgData name="Frederik Rask Dalby" userId="12c7c68b-47c4-4858-a883-dbd84be7356f" providerId="ADAL" clId="{E9883B15-7D20-4C63-9A3F-08E95C9A44CC}" dt="2026-07-31T12:40:19.559" v="313" actId="478"/>
-          <ac:spMkLst>
-            <pc:docMk/>
-            <pc:sldMk cId="1629653014" sldId="280"/>
-            <ac:spMk id="2" creationId="{243DD439-7139-32DB-F2DE-A6BFAD49BADD}"/>
-          </ac:spMkLst>
-        </pc:spChg>
-        <pc:spChg chg="mod">
-          <ac:chgData name="Frederik Rask Dalby" userId="12c7c68b-47c4-4858-a883-dbd84be7356f" providerId="ADAL" clId="{E9883B15-7D20-4C63-9A3F-08E95C9A44CC}" dt="2026-07-31T12:41:48.685" v="378" actId="1076"/>
-          <ac:spMkLst>
-            <pc:docMk/>
-            <pc:sldMk cId="1629653014" sldId="280"/>
-            <ac:spMk id="3" creationId="{6488C343-A849-35D8-E832-6839F3742948}"/>
-          </ac:spMkLst>
-        </pc:spChg>
       </pc:sldChg>
     </pc:docChg>
   </pc:docChgLst>
@@ -10376,7 +10215,7 @@
           <a:p>
             <a:fld id="{A3975A98-2193-44D4-92A8-C11FB2910AFD}" type="datetimeFigureOut">
               <a:rPr lang="da-DK" smtClean="0"/>
-              <a:t>31-07-2026</a:t>
+              <a:t>03-08-2026</a:t>
             </a:fld>
             <a:endParaRPr lang="da-DK"/>
           </a:p>
@@ -10737,7 +10576,7 @@
           <a:p>
             <a:fld id="{DA2AE552-07CC-474C-8716-76544D5C76F7}" type="slidenum">
               <a:rPr lang="da-DK" smtClean="0"/>
-              <a:t>15</a:t>
+              <a:t>14</a:t>
             </a:fld>
             <a:endParaRPr lang="da-DK"/>
           </a:p>
@@ -10905,7 +10744,7 @@
           <a:p>
             <a:fld id="{A1E45834-53BD-4C8F-B791-CD5378F4150E}" type="datetimeFigureOut">
               <a:rPr lang="en-US" smtClean="0"/>
-              <a:t>7/31/2026</a:t>
+              <a:t>8/3/2026</a:t>
             </a:fld>
             <a:endParaRPr lang="en-US"/>
           </a:p>
@@ -11105,7 +10944,7 @@
           <a:p>
             <a:fld id="{A1E45834-53BD-4C8F-B791-CD5378F4150E}" type="datetimeFigureOut">
               <a:rPr lang="en-US" smtClean="0"/>
-              <a:t>7/31/2026</a:t>
+              <a:t>8/3/2026</a:t>
             </a:fld>
             <a:endParaRPr lang="en-US"/>
           </a:p>
@@ -11315,7 +11154,7 @@
           <a:p>
             <a:fld id="{A1E45834-53BD-4C8F-B791-CD5378F4150E}" type="datetimeFigureOut">
               <a:rPr lang="en-US" smtClean="0"/>
-              <a:t>7/31/2026</a:t>
+              <a:t>8/3/2026</a:t>
             </a:fld>
             <a:endParaRPr lang="en-US"/>
           </a:p>
@@ -11515,7 +11354,7 @@
           <a:p>
             <a:fld id="{A1E45834-53BD-4C8F-B791-CD5378F4150E}" type="datetimeFigureOut">
               <a:rPr lang="en-US" smtClean="0"/>
-              <a:t>7/31/2026</a:t>
+              <a:t>8/3/2026</a:t>
             </a:fld>
             <a:endParaRPr lang="en-US"/>
           </a:p>
@@ -11791,7 +11630,7 @@
           <a:p>
             <a:fld id="{A1E45834-53BD-4C8F-B791-CD5378F4150E}" type="datetimeFigureOut">
               <a:rPr lang="en-US" smtClean="0"/>
-              <a:t>7/31/2026</a:t>
+              <a:t>8/3/2026</a:t>
             </a:fld>
             <a:endParaRPr lang="en-US"/>
           </a:p>
@@ -12059,7 +11898,7 @@
           <a:p>
             <a:fld id="{A1E45834-53BD-4C8F-B791-CD5378F4150E}" type="datetimeFigureOut">
               <a:rPr lang="en-US" smtClean="0"/>
-              <a:t>7/31/2026</a:t>
+              <a:t>8/3/2026</a:t>
             </a:fld>
             <a:endParaRPr lang="en-US"/>
           </a:p>
@@ -12474,7 +12313,7 @@
           <a:p>
             <a:fld id="{A1E45834-53BD-4C8F-B791-CD5378F4150E}" type="datetimeFigureOut">
               <a:rPr lang="en-US" smtClean="0"/>
-              <a:t>7/31/2026</a:t>
+              <a:t>8/3/2026</a:t>
             </a:fld>
             <a:endParaRPr lang="en-US"/>
           </a:p>
@@ -12616,7 +12455,7 @@
           <a:p>
             <a:fld id="{A1E45834-53BD-4C8F-B791-CD5378F4150E}" type="datetimeFigureOut">
               <a:rPr lang="en-US" smtClean="0"/>
-              <a:t>7/31/2026</a:t>
+              <a:t>8/3/2026</a:t>
             </a:fld>
             <a:endParaRPr lang="en-US"/>
           </a:p>
@@ -12729,7 +12568,7 @@
           <a:p>
             <a:fld id="{A1E45834-53BD-4C8F-B791-CD5378F4150E}" type="datetimeFigureOut">
               <a:rPr lang="en-US" smtClean="0"/>
-              <a:t>7/31/2026</a:t>
+              <a:t>8/3/2026</a:t>
             </a:fld>
             <a:endParaRPr lang="en-US"/>
           </a:p>
@@ -13042,7 +12881,7 @@
           <a:p>
             <a:fld id="{A1E45834-53BD-4C8F-B791-CD5378F4150E}" type="datetimeFigureOut">
               <a:rPr lang="en-US" smtClean="0"/>
-              <a:t>7/31/2026</a:t>
+              <a:t>8/3/2026</a:t>
             </a:fld>
             <a:endParaRPr lang="en-US"/>
           </a:p>
@@ -13331,7 +13170,7 @@
           <a:p>
             <a:fld id="{A1E45834-53BD-4C8F-B791-CD5378F4150E}" type="datetimeFigureOut">
               <a:rPr lang="en-US" smtClean="0"/>
-              <a:t>7/31/2026</a:t>
+              <a:t>8/3/2026</a:t>
             </a:fld>
             <a:endParaRPr lang="en-US"/>
           </a:p>
@@ -13574,7 +13413,7 @@
           <a:p>
             <a:fld id="{A1E45834-53BD-4C8F-B791-CD5378F4150E}" type="datetimeFigureOut">
               <a:rPr lang="en-US" smtClean="0"/>
-              <a:t>7/31/2026</a:t>
+              <a:t>8/3/2026</a:t>
             </a:fld>
             <a:endParaRPr lang="en-US"/>
           </a:p>
@@ -14166,2505 +14005,6 @@
           <p:cNvPr id="4" name="Picture 3">
             <a:extLst>
               <a:ext uri="{FF2B5EF4-FFF2-40B4-BE49-F238E27FC236}">
-                <a16:creationId xmlns:a16="http://schemas.microsoft.com/office/drawing/2014/main" id="{F0DFC5B7-7F7E-ED82-90EB-44D45FBA7236}"/>
-              </a:ext>
-            </a:extLst>
-          </p:cNvPr>
-          <p:cNvPicPr>
-            <a:picLocks noChangeAspect="1"/>
-          </p:cNvPicPr>
-          <p:nvPr/>
-        </p:nvPicPr>
-        <p:blipFill>
-          <a:blip r:embed="rId2"/>
-          <a:stretch>
-            <a:fillRect/>
-          </a:stretch>
-        </p:blipFill>
-        <p:spPr>
-          <a:xfrm>
-            <a:off x="7496400" y="258924"/>
-            <a:ext cx="4494236" cy="5107087"/>
-          </a:xfrm>
-          <a:prstGeom prst="rect">
-            <a:avLst/>
-          </a:prstGeom>
-        </p:spPr>
-      </p:pic>
-      <p:pic>
-        <p:nvPicPr>
-          <p:cNvPr id="6" name="Picture 5">
-            <a:extLst>
-              <a:ext uri="{FF2B5EF4-FFF2-40B4-BE49-F238E27FC236}">
-                <a16:creationId xmlns:a16="http://schemas.microsoft.com/office/drawing/2014/main" id="{A497910F-BA09-2B01-9D32-EDC2EA4965FA}"/>
-              </a:ext>
-            </a:extLst>
-          </p:cNvPr>
-          <p:cNvPicPr>
-            <a:picLocks noChangeAspect="1"/>
-          </p:cNvPicPr>
-          <p:nvPr/>
-        </p:nvPicPr>
-        <p:blipFill>
-          <a:blip r:embed="rId3"/>
-          <a:stretch>
-            <a:fillRect/>
-          </a:stretch>
-        </p:blipFill>
-        <p:spPr>
-          <a:xfrm>
-            <a:off x="520365" y="5051550"/>
-            <a:ext cx="4915586" cy="895475"/>
-          </a:xfrm>
-          <a:prstGeom prst="rect">
-            <a:avLst/>
-          </a:prstGeom>
-        </p:spPr>
-      </p:pic>
-      <p:pic>
-        <p:nvPicPr>
-          <p:cNvPr id="8" name="Picture 7">
-            <a:extLst>
-              <a:ext uri="{FF2B5EF4-FFF2-40B4-BE49-F238E27FC236}">
-                <a16:creationId xmlns:a16="http://schemas.microsoft.com/office/drawing/2014/main" id="{A0ED089D-58D6-57D9-6AB0-569BD94063E9}"/>
-              </a:ext>
-            </a:extLst>
-          </p:cNvPr>
-          <p:cNvPicPr>
-            <a:picLocks noChangeAspect="1"/>
-          </p:cNvPicPr>
-          <p:nvPr/>
-        </p:nvPicPr>
-        <p:blipFill>
-          <a:blip r:embed="rId4"/>
-          <a:stretch>
-            <a:fillRect/>
-          </a:stretch>
-        </p:blipFill>
-        <p:spPr>
-          <a:xfrm>
-            <a:off x="520365" y="3751843"/>
-            <a:ext cx="4486901" cy="838317"/>
-          </a:xfrm>
-          <a:prstGeom prst="rect">
-            <a:avLst/>
-          </a:prstGeom>
-        </p:spPr>
-      </p:pic>
-      <p:sp>
-        <p:nvSpPr>
-          <p:cNvPr id="9" name="TextBox 8">
-            <a:extLst>
-              <a:ext uri="{FF2B5EF4-FFF2-40B4-BE49-F238E27FC236}">
-                <a16:creationId xmlns:a16="http://schemas.microsoft.com/office/drawing/2014/main" id="{8876F00A-046C-DEB8-8825-FDD126F659E8}"/>
-              </a:ext>
-            </a:extLst>
-          </p:cNvPr>
-          <p:cNvSpPr txBox="1"/>
-          <p:nvPr/>
-        </p:nvSpPr>
-        <p:spPr>
-          <a:xfrm>
-            <a:off x="790015" y="3290453"/>
-            <a:ext cx="1568058" cy="369332"/>
-          </a:xfrm>
-          <a:prstGeom prst="rect">
-            <a:avLst/>
-          </a:prstGeom>
-          <a:noFill/>
-        </p:spPr>
-        <p:txBody>
-          <a:bodyPr wrap="none" rtlCol="0">
-            <a:spAutoFit/>
-          </a:bodyPr>
-          <a:lstStyle/>
-          <a:p>
-            <a:r>
-              <a:rPr lang="da-DK" dirty="0"/>
-              <a:t>Mass balance</a:t>
-            </a:r>
-          </a:p>
-        </p:txBody>
-      </p:sp>
-      <p:sp>
-        <p:nvSpPr>
-          <p:cNvPr id="10" name="TextBox 9">
-            <a:extLst>
-              <a:ext uri="{FF2B5EF4-FFF2-40B4-BE49-F238E27FC236}">
-                <a16:creationId xmlns:a16="http://schemas.microsoft.com/office/drawing/2014/main" id="{551144A2-C8FC-8173-7C9E-7A3E313C0ACF}"/>
-              </a:ext>
-            </a:extLst>
-          </p:cNvPr>
-          <p:cNvSpPr txBox="1"/>
-          <p:nvPr/>
-        </p:nvSpPr>
-        <p:spPr>
-          <a:xfrm>
-            <a:off x="790015" y="4636189"/>
-            <a:ext cx="1752211" cy="369332"/>
-          </a:xfrm>
-          <a:prstGeom prst="rect">
-            <a:avLst/>
-          </a:prstGeom>
-          <a:noFill/>
-        </p:spPr>
-        <p:txBody>
-          <a:bodyPr wrap="none" rtlCol="0">
-            <a:spAutoFit/>
-          </a:bodyPr>
-          <a:lstStyle/>
-          <a:p>
-            <a:r>
-              <a:rPr lang="da-DK" dirty="0"/>
-              <a:t>Energy balance</a:t>
-            </a:r>
-          </a:p>
-        </p:txBody>
-      </p:sp>
-      <mc:AlternateContent xmlns:mc="http://schemas.openxmlformats.org/markup-compatibility/2006" xmlns:p14="http://schemas.microsoft.com/office/powerpoint/2010/main">
-        <mc:Choice Requires="p14">
-          <p:contentPart p14:bwMode="auto" r:id="rId5">
-            <p14:nvContentPartPr>
-              <p14:cNvPr id="35" name="Ink 34">
-                <a:extLst>
-                  <a:ext uri="{FF2B5EF4-FFF2-40B4-BE49-F238E27FC236}">
-                    <a16:creationId xmlns:a16="http://schemas.microsoft.com/office/drawing/2014/main" id="{52172770-10DA-DF04-456D-873FC6C39C57}"/>
-                  </a:ext>
-                </a:extLst>
-              </p14:cNvPr>
-              <p14:cNvContentPartPr/>
-              <p14:nvPr/>
-            </p14:nvContentPartPr>
-            <p14:xfrm>
-              <a:off x="958050" y="816912"/>
-              <a:ext cx="707040" cy="1672560"/>
-            </p14:xfrm>
-          </p:contentPart>
-        </mc:Choice>
-        <mc:Fallback xmlns="">
-          <p:pic>
-            <p:nvPicPr>
-              <p:cNvPr id="35" name="Ink 34">
-                <a:extLst>
-                  <a:ext uri="{FF2B5EF4-FFF2-40B4-BE49-F238E27FC236}">
-                    <a16:creationId xmlns:a16="http://schemas.microsoft.com/office/drawing/2014/main" id="{52172770-10DA-DF04-456D-873FC6C39C57}"/>
-                  </a:ext>
-                </a:extLst>
-              </p:cNvPr>
-              <p:cNvPicPr/>
-              <p:nvPr/>
-            </p:nvPicPr>
-            <p:blipFill>
-              <a:blip r:embed="rId6"/>
-              <a:stretch>
-                <a:fillRect/>
-              </a:stretch>
-            </p:blipFill>
-            <p:spPr>
-              <a:xfrm>
-                <a:off x="949050" y="808272"/>
-                <a:ext cx="724680" cy="1690200"/>
-              </a:xfrm>
-              <a:prstGeom prst="rect">
-                <a:avLst/>
-              </a:prstGeom>
-            </p:spPr>
-          </p:pic>
-        </mc:Fallback>
-      </mc:AlternateContent>
-      <mc:AlternateContent xmlns:mc="http://schemas.openxmlformats.org/markup-compatibility/2006" xmlns:p14="http://schemas.microsoft.com/office/powerpoint/2010/main">
-        <mc:Choice Requires="p14">
-          <p:contentPart p14:bwMode="auto" r:id="rId7">
-            <p14:nvContentPartPr>
-              <p14:cNvPr id="36" name="Ink 35">
-                <a:extLst>
-                  <a:ext uri="{FF2B5EF4-FFF2-40B4-BE49-F238E27FC236}">
-                    <a16:creationId xmlns:a16="http://schemas.microsoft.com/office/drawing/2014/main" id="{9768AC6E-4C25-0779-18CD-39C30B9812EA}"/>
-                  </a:ext>
-                </a:extLst>
-              </p14:cNvPr>
-              <p14:cNvContentPartPr/>
-              <p14:nvPr/>
-            </p14:nvContentPartPr>
-            <p14:xfrm>
-              <a:off x="1784970" y="728352"/>
-              <a:ext cx="665640" cy="1783800"/>
-            </p14:xfrm>
-          </p:contentPart>
-        </mc:Choice>
-        <mc:Fallback xmlns="">
-          <p:pic>
-            <p:nvPicPr>
-              <p:cNvPr id="36" name="Ink 35">
-                <a:extLst>
-                  <a:ext uri="{FF2B5EF4-FFF2-40B4-BE49-F238E27FC236}">
-                    <a16:creationId xmlns:a16="http://schemas.microsoft.com/office/drawing/2014/main" id="{9768AC6E-4C25-0779-18CD-39C30B9812EA}"/>
-                  </a:ext>
-                </a:extLst>
-              </p:cNvPr>
-              <p:cNvPicPr/>
-              <p:nvPr/>
-            </p:nvPicPr>
-            <p:blipFill>
-              <a:blip r:embed="rId8"/>
-              <a:stretch>
-                <a:fillRect/>
-              </a:stretch>
-            </p:blipFill>
-            <p:spPr>
-              <a:xfrm>
-                <a:off x="1775970" y="719352"/>
-                <a:ext cx="683280" cy="1801440"/>
-              </a:xfrm>
-              <a:prstGeom prst="rect">
-                <a:avLst/>
-              </a:prstGeom>
-            </p:spPr>
-          </p:pic>
-        </mc:Fallback>
-      </mc:AlternateContent>
-      <mc:AlternateContent xmlns:mc="http://schemas.openxmlformats.org/markup-compatibility/2006" xmlns:p14="http://schemas.microsoft.com/office/powerpoint/2010/main">
-        <mc:Choice Requires="p14">
-          <p:contentPart p14:bwMode="auto" r:id="rId9">
-            <p14:nvContentPartPr>
-              <p14:cNvPr id="37" name="Ink 36">
-                <a:extLst>
-                  <a:ext uri="{FF2B5EF4-FFF2-40B4-BE49-F238E27FC236}">
-                    <a16:creationId xmlns:a16="http://schemas.microsoft.com/office/drawing/2014/main" id="{3621F9E4-9914-A637-518C-4114635164F4}"/>
-                  </a:ext>
-                </a:extLst>
-              </p14:cNvPr>
-              <p14:cNvContentPartPr/>
-              <p14:nvPr/>
-            </p14:nvContentPartPr>
-            <p14:xfrm>
-              <a:off x="1242090" y="467352"/>
-              <a:ext cx="811080" cy="954720"/>
-            </p14:xfrm>
-          </p:contentPart>
-        </mc:Choice>
-        <mc:Fallback xmlns="">
-          <p:pic>
-            <p:nvPicPr>
-              <p:cNvPr id="37" name="Ink 36">
-                <a:extLst>
-                  <a:ext uri="{FF2B5EF4-FFF2-40B4-BE49-F238E27FC236}">
-                    <a16:creationId xmlns:a16="http://schemas.microsoft.com/office/drawing/2014/main" id="{3621F9E4-9914-A637-518C-4114635164F4}"/>
-                  </a:ext>
-                </a:extLst>
-              </p:cNvPr>
-              <p:cNvPicPr/>
-              <p:nvPr/>
-            </p:nvPicPr>
-            <p:blipFill>
-              <a:blip r:embed="rId10"/>
-              <a:stretch>
-                <a:fillRect/>
-              </a:stretch>
-            </p:blipFill>
-            <p:spPr>
-              <a:xfrm>
-                <a:off x="1233090" y="458352"/>
-                <a:ext cx="828720" cy="972360"/>
-              </a:xfrm>
-              <a:prstGeom prst="rect">
-                <a:avLst/>
-              </a:prstGeom>
-            </p:spPr>
-          </p:pic>
-        </mc:Fallback>
-      </mc:AlternateContent>
-      <mc:AlternateContent xmlns:mc="http://schemas.openxmlformats.org/markup-compatibility/2006" xmlns:p14="http://schemas.microsoft.com/office/powerpoint/2010/main">
-        <mc:Choice Requires="p14">
-          <p:contentPart p14:bwMode="auto" r:id="rId11">
-            <p14:nvContentPartPr>
-              <p14:cNvPr id="38" name="Ink 37">
-                <a:extLst>
-                  <a:ext uri="{FF2B5EF4-FFF2-40B4-BE49-F238E27FC236}">
-                    <a16:creationId xmlns:a16="http://schemas.microsoft.com/office/drawing/2014/main" id="{A79F51BA-3326-A507-12C4-192D4C271309}"/>
-                  </a:ext>
-                </a:extLst>
-              </p14:cNvPr>
-              <p14:cNvContentPartPr/>
-              <p14:nvPr/>
-            </p14:nvContentPartPr>
-            <p14:xfrm>
-              <a:off x="1944090" y="1315872"/>
-              <a:ext cx="254520" cy="191160"/>
-            </p14:xfrm>
-          </p:contentPart>
-        </mc:Choice>
-        <mc:Fallback xmlns="">
-          <p:pic>
-            <p:nvPicPr>
-              <p:cNvPr id="38" name="Ink 37">
-                <a:extLst>
-                  <a:ext uri="{FF2B5EF4-FFF2-40B4-BE49-F238E27FC236}">
-                    <a16:creationId xmlns:a16="http://schemas.microsoft.com/office/drawing/2014/main" id="{A79F51BA-3326-A507-12C4-192D4C271309}"/>
-                  </a:ext>
-                </a:extLst>
-              </p:cNvPr>
-              <p:cNvPicPr/>
-              <p:nvPr/>
-            </p:nvPicPr>
-            <p:blipFill>
-              <a:blip r:embed="rId12"/>
-              <a:stretch>
-                <a:fillRect/>
-              </a:stretch>
-            </p:blipFill>
-            <p:spPr>
-              <a:xfrm>
-                <a:off x="1935450" y="1307232"/>
-                <a:ext cx="272160" cy="208800"/>
-              </a:xfrm>
-              <a:prstGeom prst="rect">
-                <a:avLst/>
-              </a:prstGeom>
-            </p:spPr>
-          </p:pic>
-        </mc:Fallback>
-      </mc:AlternateContent>
-      <mc:AlternateContent xmlns:mc="http://schemas.openxmlformats.org/markup-compatibility/2006" xmlns:p14="http://schemas.microsoft.com/office/powerpoint/2010/main">
-        <mc:Choice Requires="p14">
-          <p:contentPart p14:bwMode="auto" r:id="rId13">
-            <p14:nvContentPartPr>
-              <p14:cNvPr id="39" name="Ink 38">
-                <a:extLst>
-                  <a:ext uri="{FF2B5EF4-FFF2-40B4-BE49-F238E27FC236}">
-                    <a16:creationId xmlns:a16="http://schemas.microsoft.com/office/drawing/2014/main" id="{82F66382-2FF2-97A9-9C46-1FA7B4187E75}"/>
-                  </a:ext>
-                </a:extLst>
-              </p14:cNvPr>
-              <p14:cNvContentPartPr/>
-              <p14:nvPr/>
-            </p14:nvContentPartPr>
-            <p14:xfrm>
-              <a:off x="1020330" y="1086192"/>
-              <a:ext cx="1368000" cy="47880"/>
-            </p14:xfrm>
-          </p:contentPart>
-        </mc:Choice>
-        <mc:Fallback xmlns="">
-          <p:pic>
-            <p:nvPicPr>
-              <p:cNvPr id="39" name="Ink 38">
-                <a:extLst>
-                  <a:ext uri="{FF2B5EF4-FFF2-40B4-BE49-F238E27FC236}">
-                    <a16:creationId xmlns:a16="http://schemas.microsoft.com/office/drawing/2014/main" id="{82F66382-2FF2-97A9-9C46-1FA7B4187E75}"/>
-                  </a:ext>
-                </a:extLst>
-              </p:cNvPr>
-              <p:cNvPicPr/>
-              <p:nvPr/>
-            </p:nvPicPr>
-            <p:blipFill>
-              <a:blip r:embed="rId14"/>
-              <a:stretch>
-                <a:fillRect/>
-              </a:stretch>
-            </p:blipFill>
-            <p:spPr>
-              <a:xfrm>
-                <a:off x="1011330" y="1077552"/>
-                <a:ext cx="1385640" cy="65520"/>
-              </a:xfrm>
-              <a:prstGeom prst="rect">
-                <a:avLst/>
-              </a:prstGeom>
-            </p:spPr>
-          </p:pic>
-        </mc:Fallback>
-      </mc:AlternateContent>
-      <mc:AlternateContent xmlns:mc="http://schemas.openxmlformats.org/markup-compatibility/2006" xmlns:p14="http://schemas.microsoft.com/office/powerpoint/2010/main">
-        <mc:Choice Requires="p14">
-          <p:contentPart p14:bwMode="auto" r:id="rId15">
-            <p14:nvContentPartPr>
-              <p14:cNvPr id="40" name="Ink 39">
-                <a:extLst>
-                  <a:ext uri="{FF2B5EF4-FFF2-40B4-BE49-F238E27FC236}">
-                    <a16:creationId xmlns:a16="http://schemas.microsoft.com/office/drawing/2014/main" id="{A57A1A15-D466-0BFB-1BF6-1A067D9BC3C4}"/>
-                  </a:ext>
-                </a:extLst>
-              </p14:cNvPr>
-              <p14:cNvContentPartPr/>
-              <p14:nvPr/>
-            </p14:nvContentPartPr>
-            <p14:xfrm>
-              <a:off x="856530" y="833112"/>
-              <a:ext cx="702360" cy="1603080"/>
-            </p14:xfrm>
-          </p:contentPart>
-        </mc:Choice>
-        <mc:Fallback xmlns="">
-          <p:pic>
-            <p:nvPicPr>
-              <p:cNvPr id="40" name="Ink 39">
-                <a:extLst>
-                  <a:ext uri="{FF2B5EF4-FFF2-40B4-BE49-F238E27FC236}">
-                    <a16:creationId xmlns:a16="http://schemas.microsoft.com/office/drawing/2014/main" id="{A57A1A15-D466-0BFB-1BF6-1A067D9BC3C4}"/>
-                  </a:ext>
-                </a:extLst>
-              </p:cNvPr>
-              <p:cNvPicPr/>
-              <p:nvPr/>
-            </p:nvPicPr>
-            <p:blipFill>
-              <a:blip r:embed="rId16"/>
-              <a:stretch>
-                <a:fillRect/>
-              </a:stretch>
-            </p:blipFill>
-            <p:spPr>
-              <a:xfrm>
-                <a:off x="847890" y="824472"/>
-                <a:ext cx="720000" cy="1620720"/>
-              </a:xfrm>
-              <a:prstGeom prst="rect">
-                <a:avLst/>
-              </a:prstGeom>
-            </p:spPr>
-          </p:pic>
-        </mc:Fallback>
-      </mc:AlternateContent>
-      <mc:AlternateContent xmlns:mc="http://schemas.openxmlformats.org/markup-compatibility/2006" xmlns:p14="http://schemas.microsoft.com/office/powerpoint/2010/main">
-        <mc:Choice Requires="p14">
-          <p:contentPart p14:bwMode="auto" r:id="rId17">
-            <p14:nvContentPartPr>
-              <p14:cNvPr id="41" name="Ink 40">
-                <a:extLst>
-                  <a:ext uri="{FF2B5EF4-FFF2-40B4-BE49-F238E27FC236}">
-                    <a16:creationId xmlns:a16="http://schemas.microsoft.com/office/drawing/2014/main" id="{12A85F30-3651-CB89-8DB3-182B0BC77FB0}"/>
-                  </a:ext>
-                </a:extLst>
-              </p14:cNvPr>
-              <p14:cNvContentPartPr/>
-              <p14:nvPr/>
-            </p14:nvContentPartPr>
-            <p14:xfrm>
-              <a:off x="1868850" y="751392"/>
-              <a:ext cx="701640" cy="1689840"/>
-            </p14:xfrm>
-          </p:contentPart>
-        </mc:Choice>
-        <mc:Fallback xmlns="">
-          <p:pic>
-            <p:nvPicPr>
-              <p:cNvPr id="41" name="Ink 40">
-                <a:extLst>
-                  <a:ext uri="{FF2B5EF4-FFF2-40B4-BE49-F238E27FC236}">
-                    <a16:creationId xmlns:a16="http://schemas.microsoft.com/office/drawing/2014/main" id="{12A85F30-3651-CB89-8DB3-182B0BC77FB0}"/>
-                  </a:ext>
-                </a:extLst>
-              </p:cNvPr>
-              <p:cNvPicPr/>
-              <p:nvPr/>
-            </p:nvPicPr>
-            <p:blipFill>
-              <a:blip r:embed="rId18"/>
-              <a:stretch>
-                <a:fillRect/>
-              </a:stretch>
-            </p:blipFill>
-            <p:spPr>
-              <a:xfrm>
-                <a:off x="1859850" y="742752"/>
-                <a:ext cx="719280" cy="1707480"/>
-              </a:xfrm>
-              <a:prstGeom prst="rect">
-                <a:avLst/>
-              </a:prstGeom>
-            </p:spPr>
-          </p:pic>
-        </mc:Fallback>
-      </mc:AlternateContent>
-      <p:grpSp>
-        <p:nvGrpSpPr>
-          <p:cNvPr id="42" name="Group 41">
-            <a:extLst>
-              <a:ext uri="{FF2B5EF4-FFF2-40B4-BE49-F238E27FC236}">
-                <a16:creationId xmlns:a16="http://schemas.microsoft.com/office/drawing/2014/main" id="{3BAD35DF-E2E4-7A82-9271-085DB12E1786}"/>
-              </a:ext>
-            </a:extLst>
-          </p:cNvPr>
-          <p:cNvGrpSpPr/>
-          <p:nvPr/>
-        </p:nvGrpSpPr>
-        <p:grpSpPr>
-          <a:xfrm>
-            <a:off x="1549170" y="2476152"/>
-            <a:ext cx="402120" cy="359640"/>
-            <a:chOff x="3171528" y="4221216"/>
-            <a:chExt cx="402120" cy="359640"/>
-          </a:xfrm>
-        </p:grpSpPr>
-        <mc:AlternateContent xmlns:mc="http://schemas.openxmlformats.org/markup-compatibility/2006" xmlns:p14="http://schemas.microsoft.com/office/powerpoint/2010/main">
-          <mc:Choice Requires="p14">
-            <p:contentPart p14:bwMode="auto" r:id="rId19">
-              <p14:nvContentPartPr>
-                <p14:cNvPr id="43" name="Ink 42">
-                  <a:extLst>
-                    <a:ext uri="{FF2B5EF4-FFF2-40B4-BE49-F238E27FC236}">
-                      <a16:creationId xmlns:a16="http://schemas.microsoft.com/office/drawing/2014/main" id="{CEB6013F-78C1-0BB1-86C5-BB874AEF706A}"/>
-                    </a:ext>
-                  </a:extLst>
-                </p14:cNvPr>
-                <p14:cNvContentPartPr/>
-                <p14:nvPr/>
-              </p14:nvContentPartPr>
-              <p14:xfrm>
-                <a:off x="3171528" y="4221216"/>
-                <a:ext cx="402120" cy="253800"/>
-              </p14:xfrm>
-            </p:contentPart>
-          </mc:Choice>
-          <mc:Fallback xmlns="">
-            <p:pic>
-              <p:nvPicPr>
-                <p:cNvPr id="43" name="Ink 42">
-                  <a:extLst>
-                    <a:ext uri="{FF2B5EF4-FFF2-40B4-BE49-F238E27FC236}">
-                      <a16:creationId xmlns:a16="http://schemas.microsoft.com/office/drawing/2014/main" id="{CEB6013F-78C1-0BB1-86C5-BB874AEF706A}"/>
-                    </a:ext>
-                  </a:extLst>
-                </p:cNvPr>
-                <p:cNvPicPr/>
-                <p:nvPr/>
-              </p:nvPicPr>
-              <p:blipFill>
-                <a:blip r:embed="rId20"/>
-                <a:stretch>
-                  <a:fillRect/>
-                </a:stretch>
-              </p:blipFill>
-              <p:spPr>
-                <a:xfrm>
-                  <a:off x="3162888" y="4212576"/>
-                  <a:ext cx="419760" cy="271440"/>
-                </a:xfrm>
-                <a:prstGeom prst="rect">
-                  <a:avLst/>
-                </a:prstGeom>
-              </p:spPr>
-            </p:pic>
-          </mc:Fallback>
-        </mc:AlternateContent>
-        <mc:AlternateContent xmlns:mc="http://schemas.openxmlformats.org/markup-compatibility/2006" xmlns:p14="http://schemas.microsoft.com/office/powerpoint/2010/main">
-          <mc:Choice Requires="p14">
-            <p:contentPart p14:bwMode="auto" r:id="rId21">
-              <p14:nvContentPartPr>
-                <p14:cNvPr id="44" name="Ink 43">
-                  <a:extLst>
-                    <a:ext uri="{FF2B5EF4-FFF2-40B4-BE49-F238E27FC236}">
-                      <a16:creationId xmlns:a16="http://schemas.microsoft.com/office/drawing/2014/main" id="{F1DE1007-63D2-C03D-8AB9-BF4DF3E8468E}"/>
-                    </a:ext>
-                  </a:extLst>
-                </p14:cNvPr>
-                <p14:cNvContentPartPr/>
-                <p14:nvPr/>
-              </p14:nvContentPartPr>
-              <p14:xfrm>
-                <a:off x="3407328" y="4245696"/>
-                <a:ext cx="16920" cy="61920"/>
-              </p14:xfrm>
-            </p:contentPart>
-          </mc:Choice>
-          <mc:Fallback xmlns="">
-            <p:pic>
-              <p:nvPicPr>
-                <p:cNvPr id="44" name="Ink 43">
-                  <a:extLst>
-                    <a:ext uri="{FF2B5EF4-FFF2-40B4-BE49-F238E27FC236}">
-                      <a16:creationId xmlns:a16="http://schemas.microsoft.com/office/drawing/2014/main" id="{F1DE1007-63D2-C03D-8AB9-BF4DF3E8468E}"/>
-                    </a:ext>
-                  </a:extLst>
-                </p:cNvPr>
-                <p:cNvPicPr/>
-                <p:nvPr/>
-              </p:nvPicPr>
-              <p:blipFill>
-                <a:blip r:embed="rId22"/>
-                <a:stretch>
-                  <a:fillRect/>
-                </a:stretch>
-              </p:blipFill>
-              <p:spPr>
-                <a:xfrm>
-                  <a:off x="3398328" y="4237056"/>
-                  <a:ext cx="34560" cy="79560"/>
-                </a:xfrm>
-                <a:prstGeom prst="rect">
-                  <a:avLst/>
-                </a:prstGeom>
-              </p:spPr>
-            </p:pic>
-          </mc:Fallback>
-        </mc:AlternateContent>
-        <mc:AlternateContent xmlns:mc="http://schemas.openxmlformats.org/markup-compatibility/2006" xmlns:p14="http://schemas.microsoft.com/office/powerpoint/2010/main">
-          <mc:Choice Requires="p14">
-            <p:contentPart p14:bwMode="auto" r:id="rId23">
-              <p14:nvContentPartPr>
-                <p14:cNvPr id="45" name="Ink 44">
-                  <a:extLst>
-                    <a:ext uri="{FF2B5EF4-FFF2-40B4-BE49-F238E27FC236}">
-                      <a16:creationId xmlns:a16="http://schemas.microsoft.com/office/drawing/2014/main" id="{247DF4A5-DAA9-A9BB-032F-918A72794F15}"/>
-                    </a:ext>
-                  </a:extLst>
-                </p14:cNvPr>
-                <p14:cNvContentPartPr/>
-                <p14:nvPr/>
-              </p14:nvContentPartPr>
-              <p14:xfrm>
-                <a:off x="3303288" y="4395456"/>
-                <a:ext cx="7560" cy="174240"/>
-              </p14:xfrm>
-            </p:contentPart>
-          </mc:Choice>
-          <mc:Fallback xmlns="">
-            <p:pic>
-              <p:nvPicPr>
-                <p:cNvPr id="45" name="Ink 44">
-                  <a:extLst>
-                    <a:ext uri="{FF2B5EF4-FFF2-40B4-BE49-F238E27FC236}">
-                      <a16:creationId xmlns:a16="http://schemas.microsoft.com/office/drawing/2014/main" id="{247DF4A5-DAA9-A9BB-032F-918A72794F15}"/>
-                    </a:ext>
-                  </a:extLst>
-                </p:cNvPr>
-                <p:cNvPicPr/>
-                <p:nvPr/>
-              </p:nvPicPr>
-              <p:blipFill>
-                <a:blip r:embed="rId24"/>
-                <a:stretch>
-                  <a:fillRect/>
-                </a:stretch>
-              </p:blipFill>
-              <p:spPr>
-                <a:xfrm>
-                  <a:off x="3294288" y="4386816"/>
-                  <a:ext cx="25200" cy="191880"/>
-                </a:xfrm>
-                <a:prstGeom prst="rect">
-                  <a:avLst/>
-                </a:prstGeom>
-              </p:spPr>
-            </p:pic>
-          </mc:Fallback>
-        </mc:AlternateContent>
-        <mc:AlternateContent xmlns:mc="http://schemas.openxmlformats.org/markup-compatibility/2006" xmlns:p14="http://schemas.microsoft.com/office/powerpoint/2010/main">
-          <mc:Choice Requires="p14">
-            <p:contentPart p14:bwMode="auto" r:id="rId25">
-              <p14:nvContentPartPr>
-                <p14:cNvPr id="46" name="Ink 45">
-                  <a:extLst>
-                    <a:ext uri="{FF2B5EF4-FFF2-40B4-BE49-F238E27FC236}">
-                      <a16:creationId xmlns:a16="http://schemas.microsoft.com/office/drawing/2014/main" id="{8F4F8FD2-76F5-7C02-2C0B-9BB86F69956C}"/>
-                    </a:ext>
-                  </a:extLst>
-                </p14:cNvPr>
-                <p14:cNvContentPartPr/>
-                <p14:nvPr/>
-              </p14:nvContentPartPr>
-              <p14:xfrm>
-                <a:off x="3435048" y="4376736"/>
-                <a:ext cx="10080" cy="204120"/>
-              </p14:xfrm>
-            </p:contentPart>
-          </mc:Choice>
-          <mc:Fallback xmlns="">
-            <p:pic>
-              <p:nvPicPr>
-                <p:cNvPr id="46" name="Ink 45">
-                  <a:extLst>
-                    <a:ext uri="{FF2B5EF4-FFF2-40B4-BE49-F238E27FC236}">
-                      <a16:creationId xmlns:a16="http://schemas.microsoft.com/office/drawing/2014/main" id="{8F4F8FD2-76F5-7C02-2C0B-9BB86F69956C}"/>
-                    </a:ext>
-                  </a:extLst>
-                </p:cNvPr>
-                <p:cNvPicPr/>
-                <p:nvPr/>
-              </p:nvPicPr>
-              <p:blipFill>
-                <a:blip r:embed="rId26"/>
-                <a:stretch>
-                  <a:fillRect/>
-                </a:stretch>
-              </p:blipFill>
-              <p:spPr>
-                <a:xfrm>
-                  <a:off x="3426048" y="4367736"/>
-                  <a:ext cx="27720" cy="221760"/>
-                </a:xfrm>
-                <a:prstGeom prst="rect">
-                  <a:avLst/>
-                </a:prstGeom>
-              </p:spPr>
-            </p:pic>
-          </mc:Fallback>
-        </mc:AlternateContent>
-      </p:grpSp>
-      <mc:AlternateContent xmlns:mc="http://schemas.openxmlformats.org/markup-compatibility/2006" xmlns:p14="http://schemas.microsoft.com/office/powerpoint/2010/main">
-        <mc:Choice Requires="p14">
-          <p:contentPart p14:bwMode="auto" r:id="rId27">
-            <p14:nvContentPartPr>
-              <p14:cNvPr id="47" name="Ink 46">
-                <a:extLst>
-                  <a:ext uri="{FF2B5EF4-FFF2-40B4-BE49-F238E27FC236}">
-                    <a16:creationId xmlns:a16="http://schemas.microsoft.com/office/drawing/2014/main" id="{06D360CF-EFAB-FF77-EF91-CBF5921A87EC}"/>
-                  </a:ext>
-                </a:extLst>
-              </p14:cNvPr>
-              <p14:cNvContentPartPr/>
-              <p14:nvPr/>
-            </p14:nvContentPartPr>
-            <p14:xfrm>
-              <a:off x="863370" y="826632"/>
-              <a:ext cx="727560" cy="1551240"/>
-            </p14:xfrm>
-          </p:contentPart>
-        </mc:Choice>
-        <mc:Fallback xmlns="">
-          <p:pic>
-            <p:nvPicPr>
-              <p:cNvPr id="47" name="Ink 46">
-                <a:extLst>
-                  <a:ext uri="{FF2B5EF4-FFF2-40B4-BE49-F238E27FC236}">
-                    <a16:creationId xmlns:a16="http://schemas.microsoft.com/office/drawing/2014/main" id="{06D360CF-EFAB-FF77-EF91-CBF5921A87EC}"/>
-                  </a:ext>
-                </a:extLst>
-              </p:cNvPr>
-              <p:cNvPicPr/>
-              <p:nvPr/>
-            </p:nvPicPr>
-            <p:blipFill>
-              <a:blip r:embed="rId28"/>
-              <a:stretch>
-                <a:fillRect/>
-              </a:stretch>
-            </p:blipFill>
-            <p:spPr>
-              <a:xfrm>
-                <a:off x="854370" y="817632"/>
-                <a:ext cx="745200" cy="1568880"/>
-              </a:xfrm>
-              <a:prstGeom prst="rect">
-                <a:avLst/>
-              </a:prstGeom>
-            </p:spPr>
-          </p:pic>
-        </mc:Fallback>
-      </mc:AlternateContent>
-      <mc:AlternateContent xmlns:mc="http://schemas.openxmlformats.org/markup-compatibility/2006" xmlns:p14="http://schemas.microsoft.com/office/powerpoint/2010/main">
-        <mc:Choice Requires="p14">
-          <p:contentPart p14:bwMode="auto" r:id="rId29">
-            <p14:nvContentPartPr>
-              <p14:cNvPr id="48" name="Ink 47">
-                <a:extLst>
-                  <a:ext uri="{FF2B5EF4-FFF2-40B4-BE49-F238E27FC236}">
-                    <a16:creationId xmlns:a16="http://schemas.microsoft.com/office/drawing/2014/main" id="{BCAEF677-6885-0A34-DEC8-8C4D58F5ABF0}"/>
-                  </a:ext>
-                </a:extLst>
-              </p14:cNvPr>
-              <p14:cNvContentPartPr/>
-              <p14:nvPr/>
-            </p14:nvContentPartPr>
-            <p14:xfrm>
-              <a:off x="1874970" y="761472"/>
-              <a:ext cx="661680" cy="1649520"/>
-            </p14:xfrm>
-          </p:contentPart>
-        </mc:Choice>
-        <mc:Fallback xmlns="">
-          <p:pic>
-            <p:nvPicPr>
-              <p:cNvPr id="48" name="Ink 47">
-                <a:extLst>
-                  <a:ext uri="{FF2B5EF4-FFF2-40B4-BE49-F238E27FC236}">
-                    <a16:creationId xmlns:a16="http://schemas.microsoft.com/office/drawing/2014/main" id="{BCAEF677-6885-0A34-DEC8-8C4D58F5ABF0}"/>
-                  </a:ext>
-                </a:extLst>
-              </p:cNvPr>
-              <p:cNvPicPr/>
-              <p:nvPr/>
-            </p:nvPicPr>
-            <p:blipFill>
-              <a:blip r:embed="rId30"/>
-              <a:stretch>
-                <a:fillRect/>
-              </a:stretch>
-            </p:blipFill>
-            <p:spPr>
-              <a:xfrm>
-                <a:off x="1866330" y="752832"/>
-                <a:ext cx="679320" cy="1667160"/>
-              </a:xfrm>
-              <a:prstGeom prst="rect">
-                <a:avLst/>
-              </a:prstGeom>
-            </p:spPr>
-          </p:pic>
-        </mc:Fallback>
-      </mc:AlternateContent>
-      <p:grpSp>
-        <p:nvGrpSpPr>
-          <p:cNvPr id="49" name="Group 48">
-            <a:extLst>
-              <a:ext uri="{FF2B5EF4-FFF2-40B4-BE49-F238E27FC236}">
-                <a16:creationId xmlns:a16="http://schemas.microsoft.com/office/drawing/2014/main" id="{6684241A-39FD-3E13-DFF0-4AB0EABAD3E2}"/>
-              </a:ext>
-            </a:extLst>
-          </p:cNvPr>
-          <p:cNvGrpSpPr/>
-          <p:nvPr/>
-        </p:nvGrpSpPr>
-        <p:grpSpPr>
-          <a:xfrm>
-            <a:off x="1140570" y="1333512"/>
-            <a:ext cx="1173600" cy="798120"/>
-            <a:chOff x="2762928" y="3078576"/>
-            <a:chExt cx="1173600" cy="798120"/>
-          </a:xfrm>
-        </p:grpSpPr>
-        <mc:AlternateContent xmlns:mc="http://schemas.openxmlformats.org/markup-compatibility/2006" xmlns:p14="http://schemas.microsoft.com/office/powerpoint/2010/main">
-          <mc:Choice Requires="p14">
-            <p:contentPart p14:bwMode="auto" r:id="rId31">
-              <p14:nvContentPartPr>
-                <p14:cNvPr id="50" name="Ink 49">
-                  <a:extLst>
-                    <a:ext uri="{FF2B5EF4-FFF2-40B4-BE49-F238E27FC236}">
-                      <a16:creationId xmlns:a16="http://schemas.microsoft.com/office/drawing/2014/main" id="{DD997DBA-F1D5-E863-43F6-31DBF8A64647}"/>
-                    </a:ext>
-                  </a:extLst>
-                </p14:cNvPr>
-                <p14:cNvContentPartPr/>
-                <p14:nvPr/>
-              </p14:nvContentPartPr>
-              <p14:xfrm>
-                <a:off x="2878128" y="3846816"/>
-                <a:ext cx="39600" cy="360"/>
-              </p14:xfrm>
-            </p:contentPart>
-          </mc:Choice>
-          <mc:Fallback xmlns="">
-            <p:pic>
-              <p:nvPicPr>
-                <p:cNvPr id="50" name="Ink 49">
-                  <a:extLst>
-                    <a:ext uri="{FF2B5EF4-FFF2-40B4-BE49-F238E27FC236}">
-                      <a16:creationId xmlns:a16="http://schemas.microsoft.com/office/drawing/2014/main" id="{DD997DBA-F1D5-E863-43F6-31DBF8A64647}"/>
-                    </a:ext>
-                  </a:extLst>
-                </p:cNvPr>
-                <p:cNvPicPr/>
-                <p:nvPr/>
-              </p:nvPicPr>
-              <p:blipFill>
-                <a:blip r:embed="rId32"/>
-                <a:stretch>
-                  <a:fillRect/>
-                </a:stretch>
-              </p:blipFill>
-              <p:spPr>
-                <a:xfrm>
-                  <a:off x="2869488" y="3837816"/>
-                  <a:ext cx="57240" cy="18000"/>
-                </a:xfrm>
-                <a:prstGeom prst="rect">
-                  <a:avLst/>
-                </a:prstGeom>
-              </p:spPr>
-            </p:pic>
-          </mc:Fallback>
-        </mc:AlternateContent>
-        <mc:AlternateContent xmlns:mc="http://schemas.openxmlformats.org/markup-compatibility/2006" xmlns:p14="http://schemas.microsoft.com/office/powerpoint/2010/main">
-          <mc:Choice Requires="p14">
-            <p:contentPart p14:bwMode="auto" r:id="rId33">
-              <p14:nvContentPartPr>
-                <p14:cNvPr id="51" name="Ink 50">
-                  <a:extLst>
-                    <a:ext uri="{FF2B5EF4-FFF2-40B4-BE49-F238E27FC236}">
-                      <a16:creationId xmlns:a16="http://schemas.microsoft.com/office/drawing/2014/main" id="{C6E1CB31-606D-8DFE-53B3-6D6DBB82C499}"/>
-                    </a:ext>
-                  </a:extLst>
-                </p14:cNvPr>
-                <p14:cNvContentPartPr/>
-                <p14:nvPr/>
-              </p14:nvContentPartPr>
-              <p14:xfrm>
-                <a:off x="2806848" y="3527136"/>
-                <a:ext cx="9720" cy="360"/>
-              </p14:xfrm>
-            </p:contentPart>
-          </mc:Choice>
-          <mc:Fallback xmlns="">
-            <p:pic>
-              <p:nvPicPr>
-                <p:cNvPr id="51" name="Ink 50">
-                  <a:extLst>
-                    <a:ext uri="{FF2B5EF4-FFF2-40B4-BE49-F238E27FC236}">
-                      <a16:creationId xmlns:a16="http://schemas.microsoft.com/office/drawing/2014/main" id="{C6E1CB31-606D-8DFE-53B3-6D6DBB82C499}"/>
-                    </a:ext>
-                  </a:extLst>
-                </p:cNvPr>
-                <p:cNvPicPr/>
-                <p:nvPr/>
-              </p:nvPicPr>
-              <p:blipFill>
-                <a:blip r:embed="rId34"/>
-                <a:stretch>
-                  <a:fillRect/>
-                </a:stretch>
-              </p:blipFill>
-              <p:spPr>
-                <a:xfrm>
-                  <a:off x="2797848" y="3518136"/>
-                  <a:ext cx="27360" cy="18000"/>
-                </a:xfrm>
-                <a:prstGeom prst="rect">
-                  <a:avLst/>
-                </a:prstGeom>
-              </p:spPr>
-            </p:pic>
-          </mc:Fallback>
-        </mc:AlternateContent>
-        <mc:AlternateContent xmlns:mc="http://schemas.openxmlformats.org/markup-compatibility/2006" xmlns:p14="http://schemas.microsoft.com/office/powerpoint/2010/main">
-          <mc:Choice Requires="p14">
-            <p:contentPart p14:bwMode="auto" r:id="rId35">
-              <p14:nvContentPartPr>
-                <p14:cNvPr id="52" name="Ink 51">
-                  <a:extLst>
-                    <a:ext uri="{FF2B5EF4-FFF2-40B4-BE49-F238E27FC236}">
-                      <a16:creationId xmlns:a16="http://schemas.microsoft.com/office/drawing/2014/main" id="{7CD8CFB3-3F18-D588-D724-DED272785C34}"/>
-                    </a:ext>
-                  </a:extLst>
-                </p14:cNvPr>
-                <p14:cNvContentPartPr/>
-                <p14:nvPr/>
-              </p14:nvContentPartPr>
-              <p14:xfrm>
-                <a:off x="2762928" y="3168936"/>
-                <a:ext cx="360" cy="3600"/>
-              </p14:xfrm>
-            </p:contentPart>
-          </mc:Choice>
-          <mc:Fallback xmlns="">
-            <p:pic>
-              <p:nvPicPr>
-                <p:cNvPr id="52" name="Ink 51">
-                  <a:extLst>
-                    <a:ext uri="{FF2B5EF4-FFF2-40B4-BE49-F238E27FC236}">
-                      <a16:creationId xmlns:a16="http://schemas.microsoft.com/office/drawing/2014/main" id="{7CD8CFB3-3F18-D588-D724-DED272785C34}"/>
-                    </a:ext>
-                  </a:extLst>
-                </p:cNvPr>
-                <p:cNvPicPr/>
-                <p:nvPr/>
-              </p:nvPicPr>
-              <p:blipFill>
-                <a:blip r:embed="rId36"/>
-                <a:stretch>
-                  <a:fillRect/>
-                </a:stretch>
-              </p:blipFill>
-              <p:spPr>
-                <a:xfrm>
-                  <a:off x="2753928" y="3160296"/>
-                  <a:ext cx="18000" cy="21240"/>
-                </a:xfrm>
-                <a:prstGeom prst="rect">
-                  <a:avLst/>
-                </a:prstGeom>
-              </p:spPr>
-            </p:pic>
-          </mc:Fallback>
-        </mc:AlternateContent>
-        <mc:AlternateContent xmlns:mc="http://schemas.openxmlformats.org/markup-compatibility/2006" xmlns:p14="http://schemas.microsoft.com/office/powerpoint/2010/main">
-          <mc:Choice Requires="p14">
-            <p:contentPart p14:bwMode="auto" r:id="rId37">
-              <p14:nvContentPartPr>
-                <p14:cNvPr id="53" name="Ink 52">
-                  <a:extLst>
-                    <a:ext uri="{FF2B5EF4-FFF2-40B4-BE49-F238E27FC236}">
-                      <a16:creationId xmlns:a16="http://schemas.microsoft.com/office/drawing/2014/main" id="{CE916905-AD58-2B2E-A24E-BC310D47D746}"/>
-                    </a:ext>
-                  </a:extLst>
-                </p14:cNvPr>
-                <p14:cNvContentPartPr/>
-                <p14:nvPr/>
-              </p14:nvContentPartPr>
-              <p14:xfrm>
-                <a:off x="3206448" y="3791736"/>
-                <a:ext cx="9720" cy="12600"/>
-              </p14:xfrm>
-            </p:contentPart>
-          </mc:Choice>
-          <mc:Fallback xmlns="">
-            <p:pic>
-              <p:nvPicPr>
-                <p:cNvPr id="53" name="Ink 52">
-                  <a:extLst>
-                    <a:ext uri="{FF2B5EF4-FFF2-40B4-BE49-F238E27FC236}">
-                      <a16:creationId xmlns:a16="http://schemas.microsoft.com/office/drawing/2014/main" id="{CE916905-AD58-2B2E-A24E-BC310D47D746}"/>
-                    </a:ext>
-                  </a:extLst>
-                </p:cNvPr>
-                <p:cNvPicPr/>
-                <p:nvPr/>
-              </p:nvPicPr>
-              <p:blipFill>
-                <a:blip r:embed="rId38"/>
-                <a:stretch>
-                  <a:fillRect/>
-                </a:stretch>
-              </p:blipFill>
-              <p:spPr>
-                <a:xfrm>
-                  <a:off x="3197448" y="3782736"/>
-                  <a:ext cx="27360" cy="30240"/>
-                </a:xfrm>
-                <a:prstGeom prst="rect">
-                  <a:avLst/>
-                </a:prstGeom>
-              </p:spPr>
-            </p:pic>
-          </mc:Fallback>
-        </mc:AlternateContent>
-        <mc:AlternateContent xmlns:mc="http://schemas.openxmlformats.org/markup-compatibility/2006" xmlns:p14="http://schemas.microsoft.com/office/powerpoint/2010/main">
-          <mc:Choice Requires="p14">
-            <p:contentPart p14:bwMode="auto" r:id="rId39">
-              <p14:nvContentPartPr>
-                <p14:cNvPr id="54" name="Ink 53">
-                  <a:extLst>
-                    <a:ext uri="{FF2B5EF4-FFF2-40B4-BE49-F238E27FC236}">
-                      <a16:creationId xmlns:a16="http://schemas.microsoft.com/office/drawing/2014/main" id="{9C20CD27-41CA-71F1-5E8A-63DE4D4CC0FB}"/>
-                    </a:ext>
-                  </a:extLst>
-                </p14:cNvPr>
-                <p14:cNvContentPartPr/>
-                <p14:nvPr/>
-              </p14:nvContentPartPr>
-              <p14:xfrm>
-                <a:off x="3324168" y="3412656"/>
-                <a:ext cx="5040" cy="12600"/>
-              </p14:xfrm>
-            </p:contentPart>
-          </mc:Choice>
-          <mc:Fallback xmlns="">
-            <p:pic>
-              <p:nvPicPr>
-                <p:cNvPr id="54" name="Ink 53">
-                  <a:extLst>
-                    <a:ext uri="{FF2B5EF4-FFF2-40B4-BE49-F238E27FC236}">
-                      <a16:creationId xmlns:a16="http://schemas.microsoft.com/office/drawing/2014/main" id="{9C20CD27-41CA-71F1-5E8A-63DE4D4CC0FB}"/>
-                    </a:ext>
-                  </a:extLst>
-                </p:cNvPr>
-                <p:cNvPicPr/>
-                <p:nvPr/>
-              </p:nvPicPr>
-              <p:blipFill>
-                <a:blip r:embed="rId40"/>
-                <a:stretch>
-                  <a:fillRect/>
-                </a:stretch>
-              </p:blipFill>
-              <p:spPr>
-                <a:xfrm>
-                  <a:off x="3315168" y="3403656"/>
-                  <a:ext cx="22680" cy="30240"/>
-                </a:xfrm>
-                <a:prstGeom prst="rect">
-                  <a:avLst/>
-                </a:prstGeom>
-              </p:spPr>
-            </p:pic>
-          </mc:Fallback>
-        </mc:AlternateContent>
-        <mc:AlternateContent xmlns:mc="http://schemas.openxmlformats.org/markup-compatibility/2006" xmlns:p14="http://schemas.microsoft.com/office/powerpoint/2010/main">
-          <mc:Choice Requires="p14">
-            <p:contentPart p14:bwMode="auto" r:id="rId41">
-              <p14:nvContentPartPr>
-                <p14:cNvPr id="55" name="Ink 54">
-                  <a:extLst>
-                    <a:ext uri="{FF2B5EF4-FFF2-40B4-BE49-F238E27FC236}">
-                      <a16:creationId xmlns:a16="http://schemas.microsoft.com/office/drawing/2014/main" id="{5E14FDE3-8BE8-8A4D-7D8A-81F4AE8EE156}"/>
-                    </a:ext>
-                  </a:extLst>
-                </p14:cNvPr>
-                <p14:cNvContentPartPr/>
-                <p14:nvPr/>
-              </p14:nvContentPartPr>
-              <p14:xfrm>
-                <a:off x="3136968" y="3479616"/>
-                <a:ext cx="5040" cy="360"/>
-              </p14:xfrm>
-            </p:contentPart>
-          </mc:Choice>
-          <mc:Fallback xmlns="">
-            <p:pic>
-              <p:nvPicPr>
-                <p:cNvPr id="55" name="Ink 54">
-                  <a:extLst>
-                    <a:ext uri="{FF2B5EF4-FFF2-40B4-BE49-F238E27FC236}">
-                      <a16:creationId xmlns:a16="http://schemas.microsoft.com/office/drawing/2014/main" id="{5E14FDE3-8BE8-8A4D-7D8A-81F4AE8EE156}"/>
-                    </a:ext>
-                  </a:extLst>
-                </p:cNvPr>
-                <p:cNvPicPr/>
-                <p:nvPr/>
-              </p:nvPicPr>
-              <p:blipFill>
-                <a:blip r:embed="rId42"/>
-                <a:stretch>
-                  <a:fillRect/>
-                </a:stretch>
-              </p:blipFill>
-              <p:spPr>
-                <a:xfrm>
-                  <a:off x="3128328" y="3470976"/>
-                  <a:ext cx="22680" cy="18000"/>
-                </a:xfrm>
-                <a:prstGeom prst="rect">
-                  <a:avLst/>
-                </a:prstGeom>
-              </p:spPr>
-            </p:pic>
-          </mc:Fallback>
-        </mc:AlternateContent>
-        <mc:AlternateContent xmlns:mc="http://schemas.openxmlformats.org/markup-compatibility/2006" xmlns:p14="http://schemas.microsoft.com/office/powerpoint/2010/main">
-          <mc:Choice Requires="p14">
-            <p:contentPart p14:bwMode="auto" r:id="rId43">
-              <p14:nvContentPartPr>
-                <p14:cNvPr id="56" name="Ink 55">
-                  <a:extLst>
-                    <a:ext uri="{FF2B5EF4-FFF2-40B4-BE49-F238E27FC236}">
-                      <a16:creationId xmlns:a16="http://schemas.microsoft.com/office/drawing/2014/main" id="{2B981195-B925-131A-1677-18626DF1348C}"/>
-                    </a:ext>
-                  </a:extLst>
-                </p14:cNvPr>
-                <p14:cNvContentPartPr/>
-                <p14:nvPr/>
-              </p14:nvContentPartPr>
-              <p14:xfrm>
-                <a:off x="3053808" y="3103776"/>
-                <a:ext cx="5040" cy="360"/>
-              </p14:xfrm>
-            </p:contentPart>
-          </mc:Choice>
-          <mc:Fallback xmlns="">
-            <p:pic>
-              <p:nvPicPr>
-                <p:cNvPr id="56" name="Ink 55">
-                  <a:extLst>
-                    <a:ext uri="{FF2B5EF4-FFF2-40B4-BE49-F238E27FC236}">
-                      <a16:creationId xmlns:a16="http://schemas.microsoft.com/office/drawing/2014/main" id="{2B981195-B925-131A-1677-18626DF1348C}"/>
-                    </a:ext>
-                  </a:extLst>
-                </p:cNvPr>
-                <p:cNvPicPr/>
-                <p:nvPr/>
-              </p:nvPicPr>
-              <p:blipFill>
-                <a:blip r:embed="rId42"/>
-                <a:stretch>
-                  <a:fillRect/>
-                </a:stretch>
-              </p:blipFill>
-              <p:spPr>
-                <a:xfrm>
-                  <a:off x="3045168" y="3095136"/>
-                  <a:ext cx="22680" cy="18000"/>
-                </a:xfrm>
-                <a:prstGeom prst="rect">
-                  <a:avLst/>
-                </a:prstGeom>
-              </p:spPr>
-            </p:pic>
-          </mc:Fallback>
-        </mc:AlternateContent>
-        <mc:AlternateContent xmlns:mc="http://schemas.openxmlformats.org/markup-compatibility/2006" xmlns:p14="http://schemas.microsoft.com/office/powerpoint/2010/main">
-          <mc:Choice Requires="p14">
-            <p:contentPart p14:bwMode="auto" r:id="rId44">
-              <p14:nvContentPartPr>
-                <p14:cNvPr id="57" name="Ink 56">
-                  <a:extLst>
-                    <a:ext uri="{FF2B5EF4-FFF2-40B4-BE49-F238E27FC236}">
-                      <a16:creationId xmlns:a16="http://schemas.microsoft.com/office/drawing/2014/main" id="{88B76A82-5804-8047-90AF-0D66BC5A9CD5}"/>
-                    </a:ext>
-                  </a:extLst>
-                </p14:cNvPr>
-                <p14:cNvContentPartPr/>
-                <p14:nvPr/>
-              </p14:nvContentPartPr>
-              <p14:xfrm>
-                <a:off x="3360888" y="3078576"/>
-                <a:ext cx="360" cy="360"/>
-              </p14:xfrm>
-            </p:contentPart>
-          </mc:Choice>
-          <mc:Fallback xmlns="">
-            <p:pic>
-              <p:nvPicPr>
-                <p:cNvPr id="57" name="Ink 56">
-                  <a:extLst>
-                    <a:ext uri="{FF2B5EF4-FFF2-40B4-BE49-F238E27FC236}">
-                      <a16:creationId xmlns:a16="http://schemas.microsoft.com/office/drawing/2014/main" id="{88B76A82-5804-8047-90AF-0D66BC5A9CD5}"/>
-                    </a:ext>
-                  </a:extLst>
-                </p:cNvPr>
-                <p:cNvPicPr/>
-                <p:nvPr/>
-              </p:nvPicPr>
-              <p:blipFill>
-                <a:blip r:embed="rId45"/>
-                <a:stretch>
-                  <a:fillRect/>
-                </a:stretch>
-              </p:blipFill>
-              <p:spPr>
-                <a:xfrm>
-                  <a:off x="3352248" y="3069936"/>
-                  <a:ext cx="18000" cy="18000"/>
-                </a:xfrm>
-                <a:prstGeom prst="rect">
-                  <a:avLst/>
-                </a:prstGeom>
-              </p:spPr>
-            </p:pic>
-          </mc:Fallback>
-        </mc:AlternateContent>
-        <mc:AlternateContent xmlns:mc="http://schemas.openxmlformats.org/markup-compatibility/2006" xmlns:p14="http://schemas.microsoft.com/office/powerpoint/2010/main">
-          <mc:Choice Requires="p14">
-            <p:contentPart p14:bwMode="auto" r:id="rId46">
-              <p14:nvContentPartPr>
-                <p14:cNvPr id="58" name="Ink 57">
-                  <a:extLst>
-                    <a:ext uri="{FF2B5EF4-FFF2-40B4-BE49-F238E27FC236}">
-                      <a16:creationId xmlns:a16="http://schemas.microsoft.com/office/drawing/2014/main" id="{2E5620E4-3765-D63F-B3FD-92E876F46C69}"/>
-                    </a:ext>
-                  </a:extLst>
-                </p14:cNvPr>
-                <p14:cNvContentPartPr/>
-                <p14:nvPr/>
-              </p14:nvContentPartPr>
-              <p14:xfrm>
-                <a:off x="3899088" y="3872016"/>
-                <a:ext cx="360" cy="4680"/>
-              </p14:xfrm>
-            </p:contentPart>
-          </mc:Choice>
-          <mc:Fallback xmlns="">
-            <p:pic>
-              <p:nvPicPr>
-                <p:cNvPr id="58" name="Ink 57">
-                  <a:extLst>
-                    <a:ext uri="{FF2B5EF4-FFF2-40B4-BE49-F238E27FC236}">
-                      <a16:creationId xmlns:a16="http://schemas.microsoft.com/office/drawing/2014/main" id="{2E5620E4-3765-D63F-B3FD-92E876F46C69}"/>
-                    </a:ext>
-                  </a:extLst>
-                </p:cNvPr>
-                <p:cNvPicPr/>
-                <p:nvPr/>
-              </p:nvPicPr>
-              <p:blipFill>
-                <a:blip r:embed="rId47"/>
-                <a:stretch>
-                  <a:fillRect/>
-                </a:stretch>
-              </p:blipFill>
-              <p:spPr>
-                <a:xfrm>
-                  <a:off x="3890448" y="3863376"/>
-                  <a:ext cx="18000" cy="22320"/>
-                </a:xfrm>
-                <a:prstGeom prst="rect">
-                  <a:avLst/>
-                </a:prstGeom>
-              </p:spPr>
-            </p:pic>
-          </mc:Fallback>
-        </mc:AlternateContent>
-        <mc:AlternateContent xmlns:mc="http://schemas.openxmlformats.org/markup-compatibility/2006" xmlns:p14="http://schemas.microsoft.com/office/powerpoint/2010/main">
-          <mc:Choice Requires="p14">
-            <p:contentPart p14:bwMode="auto" r:id="rId48">
-              <p14:nvContentPartPr>
-                <p14:cNvPr id="59" name="Ink 58">
-                  <a:extLst>
-                    <a:ext uri="{FF2B5EF4-FFF2-40B4-BE49-F238E27FC236}">
-                      <a16:creationId xmlns:a16="http://schemas.microsoft.com/office/drawing/2014/main" id="{2FFB6181-D64C-B9DF-70EF-FED94F2EFEEA}"/>
-                    </a:ext>
-                  </a:extLst>
-                </p14:cNvPr>
-                <p14:cNvContentPartPr/>
-                <p14:nvPr/>
-              </p14:nvContentPartPr>
-              <p14:xfrm>
-                <a:off x="3753648" y="3594456"/>
-                <a:ext cx="11880" cy="360"/>
-              </p14:xfrm>
-            </p:contentPart>
-          </mc:Choice>
-          <mc:Fallback xmlns="">
-            <p:pic>
-              <p:nvPicPr>
-                <p:cNvPr id="59" name="Ink 58">
-                  <a:extLst>
-                    <a:ext uri="{FF2B5EF4-FFF2-40B4-BE49-F238E27FC236}">
-                      <a16:creationId xmlns:a16="http://schemas.microsoft.com/office/drawing/2014/main" id="{2FFB6181-D64C-B9DF-70EF-FED94F2EFEEA}"/>
-                    </a:ext>
-                  </a:extLst>
-                </p:cNvPr>
-                <p:cNvPicPr/>
-                <p:nvPr/>
-              </p:nvPicPr>
-              <p:blipFill>
-                <a:blip r:embed="rId49"/>
-                <a:stretch>
-                  <a:fillRect/>
-                </a:stretch>
-              </p:blipFill>
-              <p:spPr>
-                <a:xfrm>
-                  <a:off x="3745008" y="3585456"/>
-                  <a:ext cx="29520" cy="18000"/>
-                </a:xfrm>
-                <a:prstGeom prst="rect">
-                  <a:avLst/>
-                </a:prstGeom>
-              </p:spPr>
-            </p:pic>
-          </mc:Fallback>
-        </mc:AlternateContent>
-        <mc:AlternateContent xmlns:mc="http://schemas.openxmlformats.org/markup-compatibility/2006" xmlns:p14="http://schemas.microsoft.com/office/powerpoint/2010/main">
-          <mc:Choice Requires="p14">
-            <p:contentPart p14:bwMode="auto" r:id="rId50">
-              <p14:nvContentPartPr>
-                <p14:cNvPr id="60" name="Ink 59">
-                  <a:extLst>
-                    <a:ext uri="{FF2B5EF4-FFF2-40B4-BE49-F238E27FC236}">
-                      <a16:creationId xmlns:a16="http://schemas.microsoft.com/office/drawing/2014/main" id="{241275C1-E308-6715-A3CF-E78D2C4A6947}"/>
-                    </a:ext>
-                  </a:extLst>
-                </p14:cNvPr>
-                <p14:cNvContentPartPr/>
-                <p14:nvPr/>
-              </p14:nvContentPartPr>
-              <p14:xfrm>
-                <a:off x="3689208" y="3742056"/>
-                <a:ext cx="5040" cy="6840"/>
-              </p14:xfrm>
-            </p:contentPart>
-          </mc:Choice>
-          <mc:Fallback xmlns="">
-            <p:pic>
-              <p:nvPicPr>
-                <p:cNvPr id="60" name="Ink 59">
-                  <a:extLst>
-                    <a:ext uri="{FF2B5EF4-FFF2-40B4-BE49-F238E27FC236}">
-                      <a16:creationId xmlns:a16="http://schemas.microsoft.com/office/drawing/2014/main" id="{241275C1-E308-6715-A3CF-E78D2C4A6947}"/>
-                    </a:ext>
-                  </a:extLst>
-                </p:cNvPr>
-                <p:cNvPicPr/>
-                <p:nvPr/>
-              </p:nvPicPr>
-              <p:blipFill>
-                <a:blip r:embed="rId51"/>
-                <a:stretch>
-                  <a:fillRect/>
-                </a:stretch>
-              </p:blipFill>
-              <p:spPr>
-                <a:xfrm>
-                  <a:off x="3680208" y="3733056"/>
-                  <a:ext cx="22680" cy="24480"/>
-                </a:xfrm>
-                <a:prstGeom prst="rect">
-                  <a:avLst/>
-                </a:prstGeom>
-              </p:spPr>
-            </p:pic>
-          </mc:Fallback>
-        </mc:AlternateContent>
-        <mc:AlternateContent xmlns:mc="http://schemas.openxmlformats.org/markup-compatibility/2006" xmlns:p14="http://schemas.microsoft.com/office/powerpoint/2010/main">
-          <mc:Choice Requires="p14">
-            <p:contentPart p14:bwMode="auto" r:id="rId52">
-              <p14:nvContentPartPr>
-                <p14:cNvPr id="61" name="Ink 60">
-                  <a:extLst>
-                    <a:ext uri="{FF2B5EF4-FFF2-40B4-BE49-F238E27FC236}">
-                      <a16:creationId xmlns:a16="http://schemas.microsoft.com/office/drawing/2014/main" id="{68E64CDD-4B88-055D-BC36-44AE3FC6419C}"/>
-                    </a:ext>
-                  </a:extLst>
-                </p14:cNvPr>
-                <p14:cNvContentPartPr/>
-                <p14:nvPr/>
-              </p14:nvContentPartPr>
-              <p14:xfrm>
-                <a:off x="3936168" y="3389256"/>
-                <a:ext cx="360" cy="360"/>
-              </p14:xfrm>
-            </p:contentPart>
-          </mc:Choice>
-          <mc:Fallback xmlns="">
-            <p:pic>
-              <p:nvPicPr>
-                <p:cNvPr id="61" name="Ink 60">
-                  <a:extLst>
-                    <a:ext uri="{FF2B5EF4-FFF2-40B4-BE49-F238E27FC236}">
-                      <a16:creationId xmlns:a16="http://schemas.microsoft.com/office/drawing/2014/main" id="{68E64CDD-4B88-055D-BC36-44AE3FC6419C}"/>
-                    </a:ext>
-                  </a:extLst>
-                </p:cNvPr>
-                <p:cNvPicPr/>
-                <p:nvPr/>
-              </p:nvPicPr>
-              <p:blipFill>
-                <a:blip r:embed="rId45"/>
-                <a:stretch>
-                  <a:fillRect/>
-                </a:stretch>
-              </p:blipFill>
-              <p:spPr>
-                <a:xfrm>
-                  <a:off x="3927528" y="3380616"/>
-                  <a:ext cx="18000" cy="18000"/>
-                </a:xfrm>
-                <a:prstGeom prst="rect">
-                  <a:avLst/>
-                </a:prstGeom>
-              </p:spPr>
-            </p:pic>
-          </mc:Fallback>
-        </mc:AlternateContent>
-        <mc:AlternateContent xmlns:mc="http://schemas.openxmlformats.org/markup-compatibility/2006" xmlns:p14="http://schemas.microsoft.com/office/powerpoint/2010/main">
-          <mc:Choice Requires="p14">
-            <p:contentPart p14:bwMode="auto" r:id="rId53">
-              <p14:nvContentPartPr>
-                <p14:cNvPr id="62" name="Ink 61">
-                  <a:extLst>
-                    <a:ext uri="{FF2B5EF4-FFF2-40B4-BE49-F238E27FC236}">
-                      <a16:creationId xmlns:a16="http://schemas.microsoft.com/office/drawing/2014/main" id="{482DFB2A-390F-D390-2B8F-24D84C2EE75C}"/>
-                    </a:ext>
-                  </a:extLst>
-                </p14:cNvPr>
-                <p14:cNvContentPartPr/>
-                <p14:nvPr/>
-              </p14:nvContentPartPr>
-              <p14:xfrm>
-                <a:off x="3467448" y="3667176"/>
-                <a:ext cx="9720" cy="360"/>
-              </p14:xfrm>
-            </p:contentPart>
-          </mc:Choice>
-          <mc:Fallback xmlns="">
-            <p:pic>
-              <p:nvPicPr>
-                <p:cNvPr id="62" name="Ink 61">
-                  <a:extLst>
-                    <a:ext uri="{FF2B5EF4-FFF2-40B4-BE49-F238E27FC236}">
-                      <a16:creationId xmlns:a16="http://schemas.microsoft.com/office/drawing/2014/main" id="{482DFB2A-390F-D390-2B8F-24D84C2EE75C}"/>
-                    </a:ext>
-                  </a:extLst>
-                </p:cNvPr>
-                <p:cNvPicPr/>
-                <p:nvPr/>
-              </p:nvPicPr>
-              <p:blipFill>
-                <a:blip r:embed="rId34"/>
-                <a:stretch>
-                  <a:fillRect/>
-                </a:stretch>
-              </p:blipFill>
-              <p:spPr>
-                <a:xfrm>
-                  <a:off x="3458448" y="3658176"/>
-                  <a:ext cx="27360" cy="18000"/>
-                </a:xfrm>
-                <a:prstGeom prst="rect">
-                  <a:avLst/>
-                </a:prstGeom>
-              </p:spPr>
-            </p:pic>
-          </mc:Fallback>
-        </mc:AlternateContent>
-      </p:grpSp>
-      <mc:AlternateContent xmlns:mc="http://schemas.openxmlformats.org/markup-compatibility/2006" xmlns:p14="http://schemas.microsoft.com/office/powerpoint/2010/main">
-        <mc:Choice Requires="p14">
-          <p:contentPart p14:bwMode="auto" r:id="rId54">
-            <p14:nvContentPartPr>
-              <p14:cNvPr id="63" name="Ink 62">
-                <a:extLst>
-                  <a:ext uri="{FF2B5EF4-FFF2-40B4-BE49-F238E27FC236}">
-                    <a16:creationId xmlns:a16="http://schemas.microsoft.com/office/drawing/2014/main" id="{A35E8040-7E34-9129-5BAC-E9A22B3EA06E}"/>
-                  </a:ext>
-                </a:extLst>
-              </p14:cNvPr>
-              <p14:cNvContentPartPr/>
-              <p14:nvPr/>
-            </p14:nvContentPartPr>
-            <p14:xfrm>
-              <a:off x="1274490" y="1588032"/>
-              <a:ext cx="18720" cy="360"/>
-            </p14:xfrm>
-          </p:contentPart>
-        </mc:Choice>
-        <mc:Fallback xmlns="">
-          <p:pic>
-            <p:nvPicPr>
-              <p:cNvPr id="63" name="Ink 62">
-                <a:extLst>
-                  <a:ext uri="{FF2B5EF4-FFF2-40B4-BE49-F238E27FC236}">
-                    <a16:creationId xmlns:a16="http://schemas.microsoft.com/office/drawing/2014/main" id="{A35E8040-7E34-9129-5BAC-E9A22B3EA06E}"/>
-                  </a:ext>
-                </a:extLst>
-              </p:cNvPr>
-              <p:cNvPicPr/>
-              <p:nvPr/>
-            </p:nvPicPr>
-            <p:blipFill>
-              <a:blip r:embed="rId55"/>
-              <a:stretch>
-                <a:fillRect/>
-              </a:stretch>
-            </p:blipFill>
-            <p:spPr>
-              <a:xfrm>
-                <a:off x="1265490" y="1579392"/>
-                <a:ext cx="36360" cy="18000"/>
-              </a:xfrm>
-              <a:prstGeom prst="rect">
-                <a:avLst/>
-              </a:prstGeom>
-            </p:spPr>
-          </p:pic>
-        </mc:Fallback>
-      </mc:AlternateContent>
-      <mc:AlternateContent xmlns:mc="http://schemas.openxmlformats.org/markup-compatibility/2006" xmlns:p14="http://schemas.microsoft.com/office/powerpoint/2010/main">
-        <mc:Choice Requires="p14">
-          <p:contentPart p14:bwMode="auto" r:id="rId56">
-            <p14:nvContentPartPr>
-              <p14:cNvPr id="64" name="Ink 63">
-                <a:extLst>
-                  <a:ext uri="{FF2B5EF4-FFF2-40B4-BE49-F238E27FC236}">
-                    <a16:creationId xmlns:a16="http://schemas.microsoft.com/office/drawing/2014/main" id="{485CD1AD-326E-F456-D65B-CB0FA7074F23}"/>
-                  </a:ext>
-                </a:extLst>
-              </p14:cNvPr>
-              <p14:cNvContentPartPr/>
-              <p14:nvPr/>
-            </p14:nvContentPartPr>
-            <p14:xfrm>
-              <a:off x="1657890" y="1498752"/>
-              <a:ext cx="360" cy="360"/>
-            </p14:xfrm>
-          </p:contentPart>
-        </mc:Choice>
-        <mc:Fallback xmlns="">
-          <p:pic>
-            <p:nvPicPr>
-              <p:cNvPr id="64" name="Ink 63">
-                <a:extLst>
-                  <a:ext uri="{FF2B5EF4-FFF2-40B4-BE49-F238E27FC236}">
-                    <a16:creationId xmlns:a16="http://schemas.microsoft.com/office/drawing/2014/main" id="{485CD1AD-326E-F456-D65B-CB0FA7074F23}"/>
-                  </a:ext>
-                </a:extLst>
-              </p:cNvPr>
-              <p:cNvPicPr/>
-              <p:nvPr/>
-            </p:nvPicPr>
-            <p:blipFill>
-              <a:blip r:embed="rId57"/>
-              <a:stretch>
-                <a:fillRect/>
-              </a:stretch>
-            </p:blipFill>
-            <p:spPr>
-              <a:xfrm>
-                <a:off x="1648890" y="1490112"/>
-                <a:ext cx="18000" cy="18000"/>
-              </a:xfrm>
-              <a:prstGeom prst="rect">
-                <a:avLst/>
-              </a:prstGeom>
-            </p:spPr>
-          </p:pic>
-        </mc:Fallback>
-      </mc:AlternateContent>
-      <mc:AlternateContent xmlns:mc="http://schemas.openxmlformats.org/markup-compatibility/2006" xmlns:p14="http://schemas.microsoft.com/office/powerpoint/2010/main">
-        <mc:Choice Requires="p14">
-          <p:contentPart p14:bwMode="auto" r:id="rId58">
-            <p14:nvContentPartPr>
-              <p14:cNvPr id="65" name="Ink 64">
-                <a:extLst>
-                  <a:ext uri="{FF2B5EF4-FFF2-40B4-BE49-F238E27FC236}">
-                    <a16:creationId xmlns:a16="http://schemas.microsoft.com/office/drawing/2014/main" id="{A4019843-BD62-75D8-40B3-755A554A07AE}"/>
-                  </a:ext>
-                </a:extLst>
-              </p14:cNvPr>
-              <p14:cNvContentPartPr/>
-              <p14:nvPr/>
-            </p14:nvContentPartPr>
-            <p14:xfrm>
-              <a:off x="1667250" y="1878912"/>
-              <a:ext cx="6120" cy="360"/>
-            </p14:xfrm>
-          </p:contentPart>
-        </mc:Choice>
-        <mc:Fallback xmlns="">
-          <p:pic>
-            <p:nvPicPr>
-              <p:cNvPr id="65" name="Ink 64">
-                <a:extLst>
-                  <a:ext uri="{FF2B5EF4-FFF2-40B4-BE49-F238E27FC236}">
-                    <a16:creationId xmlns:a16="http://schemas.microsoft.com/office/drawing/2014/main" id="{A4019843-BD62-75D8-40B3-755A554A07AE}"/>
-                  </a:ext>
-                </a:extLst>
-              </p:cNvPr>
-              <p:cNvPicPr/>
-              <p:nvPr/>
-            </p:nvPicPr>
-            <p:blipFill>
-              <a:blip r:embed="rId59"/>
-              <a:stretch>
-                <a:fillRect/>
-              </a:stretch>
-            </p:blipFill>
-            <p:spPr>
-              <a:xfrm>
-                <a:off x="1658250" y="1870272"/>
-                <a:ext cx="23760" cy="18000"/>
-              </a:xfrm>
-              <a:prstGeom prst="rect">
-                <a:avLst/>
-              </a:prstGeom>
-            </p:spPr>
-          </p:pic>
-        </mc:Fallback>
-      </mc:AlternateContent>
-      <mc:AlternateContent xmlns:mc="http://schemas.openxmlformats.org/markup-compatibility/2006" xmlns:p14="http://schemas.microsoft.com/office/powerpoint/2010/main">
-        <mc:Choice Requires="p14">
-          <p:contentPart p14:bwMode="auto" r:id="rId60">
-            <p14:nvContentPartPr>
-              <p14:cNvPr id="66" name="Ink 65">
-                <a:extLst>
-                  <a:ext uri="{FF2B5EF4-FFF2-40B4-BE49-F238E27FC236}">
-                    <a16:creationId xmlns:a16="http://schemas.microsoft.com/office/drawing/2014/main" id="{E51FB828-67E8-28A7-FB3F-BEC7DB7F4C9B}"/>
-                  </a:ext>
-                </a:extLst>
-              </p14:cNvPr>
-              <p14:cNvContentPartPr/>
-              <p14:nvPr/>
-            </p14:nvContentPartPr>
-            <p14:xfrm>
-              <a:off x="1362330" y="1945152"/>
-              <a:ext cx="7200" cy="1440"/>
-            </p14:xfrm>
-          </p:contentPart>
-        </mc:Choice>
-        <mc:Fallback xmlns="">
-          <p:pic>
-            <p:nvPicPr>
-              <p:cNvPr id="66" name="Ink 65">
-                <a:extLst>
-                  <a:ext uri="{FF2B5EF4-FFF2-40B4-BE49-F238E27FC236}">
-                    <a16:creationId xmlns:a16="http://schemas.microsoft.com/office/drawing/2014/main" id="{E51FB828-67E8-28A7-FB3F-BEC7DB7F4C9B}"/>
-                  </a:ext>
-                </a:extLst>
-              </p:cNvPr>
-              <p:cNvPicPr/>
-              <p:nvPr/>
-            </p:nvPicPr>
-            <p:blipFill>
-              <a:blip r:embed="rId61"/>
-              <a:stretch>
-                <a:fillRect/>
-              </a:stretch>
-            </p:blipFill>
-            <p:spPr>
-              <a:xfrm>
-                <a:off x="1353330" y="1936152"/>
-                <a:ext cx="24840" cy="19080"/>
-              </a:xfrm>
-              <a:prstGeom prst="rect">
-                <a:avLst/>
-              </a:prstGeom>
-            </p:spPr>
-          </p:pic>
-        </mc:Fallback>
-      </mc:AlternateContent>
-      <mc:AlternateContent xmlns:mc="http://schemas.openxmlformats.org/markup-compatibility/2006" xmlns:p14="http://schemas.microsoft.com/office/powerpoint/2010/main">
-        <mc:Choice Requires="p14">
-          <p:contentPart p14:bwMode="auto" r:id="rId62">
-            <p14:nvContentPartPr>
-              <p14:cNvPr id="67" name="Ink 66">
-                <a:extLst>
-                  <a:ext uri="{FF2B5EF4-FFF2-40B4-BE49-F238E27FC236}">
-                    <a16:creationId xmlns:a16="http://schemas.microsoft.com/office/drawing/2014/main" id="{AA1BE36D-2686-3F8B-6440-A4D6021FABAD}"/>
-                  </a:ext>
-                </a:extLst>
-              </p14:cNvPr>
-              <p14:cNvContentPartPr/>
-              <p14:nvPr/>
-            </p14:nvContentPartPr>
-            <p14:xfrm>
-              <a:off x="1889010" y="2167632"/>
-              <a:ext cx="5040" cy="21240"/>
-            </p14:xfrm>
-          </p:contentPart>
-        </mc:Choice>
-        <mc:Fallback xmlns="">
-          <p:pic>
-            <p:nvPicPr>
-              <p:cNvPr id="67" name="Ink 66">
-                <a:extLst>
-                  <a:ext uri="{FF2B5EF4-FFF2-40B4-BE49-F238E27FC236}">
-                    <a16:creationId xmlns:a16="http://schemas.microsoft.com/office/drawing/2014/main" id="{AA1BE36D-2686-3F8B-6440-A4D6021FABAD}"/>
-                  </a:ext>
-                </a:extLst>
-              </p:cNvPr>
-              <p:cNvPicPr/>
-              <p:nvPr/>
-            </p:nvPicPr>
-            <p:blipFill>
-              <a:blip r:embed="rId63"/>
-              <a:stretch>
-                <a:fillRect/>
-              </a:stretch>
-            </p:blipFill>
-            <p:spPr>
-              <a:xfrm>
-                <a:off x="1880010" y="2158992"/>
-                <a:ext cx="22680" cy="38880"/>
-              </a:xfrm>
-              <a:prstGeom prst="rect">
-                <a:avLst/>
-              </a:prstGeom>
-            </p:spPr>
-          </p:pic>
-        </mc:Fallback>
-      </mc:AlternateContent>
-      <p:grpSp>
-        <p:nvGrpSpPr>
-          <p:cNvPr id="68" name="Group 67">
-            <a:extLst>
-              <a:ext uri="{FF2B5EF4-FFF2-40B4-BE49-F238E27FC236}">
-                <a16:creationId xmlns:a16="http://schemas.microsoft.com/office/drawing/2014/main" id="{C9457D91-C268-398D-179A-B68F8D967ADB}"/>
-              </a:ext>
-            </a:extLst>
-          </p:cNvPr>
-          <p:cNvGrpSpPr/>
-          <p:nvPr/>
-        </p:nvGrpSpPr>
-        <p:grpSpPr>
-          <a:xfrm>
-            <a:off x="2015730" y="1561752"/>
-            <a:ext cx="203760" cy="143640"/>
-            <a:chOff x="3638088" y="3306816"/>
-            <a:chExt cx="203760" cy="143640"/>
-          </a:xfrm>
-        </p:grpSpPr>
-        <mc:AlternateContent xmlns:mc="http://schemas.openxmlformats.org/markup-compatibility/2006" xmlns:p14="http://schemas.microsoft.com/office/powerpoint/2010/main">
-          <mc:Choice Requires="p14">
-            <p:contentPart p14:bwMode="auto" r:id="rId64">
-              <p14:nvContentPartPr>
-                <p14:cNvPr id="69" name="Ink 68">
-                  <a:extLst>
-                    <a:ext uri="{FF2B5EF4-FFF2-40B4-BE49-F238E27FC236}">
-                      <a16:creationId xmlns:a16="http://schemas.microsoft.com/office/drawing/2014/main" id="{473A9C48-6149-CCD5-F538-7AA3A419FFED}"/>
-                    </a:ext>
-                  </a:extLst>
-                </p14:cNvPr>
-                <p14:cNvContentPartPr/>
-                <p14:nvPr/>
-              </p14:nvContentPartPr>
-              <p14:xfrm>
-                <a:off x="3638088" y="3449016"/>
-                <a:ext cx="2520" cy="1440"/>
-              </p14:xfrm>
-            </p:contentPart>
-          </mc:Choice>
-          <mc:Fallback xmlns="">
-            <p:pic>
-              <p:nvPicPr>
-                <p:cNvPr id="69" name="Ink 68">
-                  <a:extLst>
-                    <a:ext uri="{FF2B5EF4-FFF2-40B4-BE49-F238E27FC236}">
-                      <a16:creationId xmlns:a16="http://schemas.microsoft.com/office/drawing/2014/main" id="{473A9C48-6149-CCD5-F538-7AA3A419FFED}"/>
-                    </a:ext>
-                  </a:extLst>
-                </p:cNvPr>
-                <p:cNvPicPr/>
-                <p:nvPr/>
-              </p:nvPicPr>
-              <p:blipFill>
-                <a:blip r:embed="rId65"/>
-                <a:stretch>
-                  <a:fillRect/>
-                </a:stretch>
-              </p:blipFill>
-              <p:spPr>
-                <a:xfrm>
-                  <a:off x="3629448" y="3440016"/>
-                  <a:ext cx="20160" cy="19080"/>
-                </a:xfrm>
-                <a:prstGeom prst="rect">
-                  <a:avLst/>
-                </a:prstGeom>
-              </p:spPr>
-            </p:pic>
-          </mc:Fallback>
-        </mc:AlternateContent>
-        <mc:AlternateContent xmlns:mc="http://schemas.openxmlformats.org/markup-compatibility/2006" xmlns:p14="http://schemas.microsoft.com/office/powerpoint/2010/main">
-          <mc:Choice Requires="p14">
-            <p:contentPart p14:bwMode="auto" r:id="rId66">
-              <p14:nvContentPartPr>
-                <p14:cNvPr id="70" name="Ink 69">
-                  <a:extLst>
-                    <a:ext uri="{FF2B5EF4-FFF2-40B4-BE49-F238E27FC236}">
-                      <a16:creationId xmlns:a16="http://schemas.microsoft.com/office/drawing/2014/main" id="{2F612256-638F-6B59-545E-FCBCDA2F4576}"/>
-                    </a:ext>
-                  </a:extLst>
-                </p14:cNvPr>
-                <p14:cNvContentPartPr/>
-                <p14:nvPr/>
-              </p14:nvContentPartPr>
-              <p14:xfrm>
-                <a:off x="3841488" y="3306816"/>
-                <a:ext cx="360" cy="7920"/>
-              </p14:xfrm>
-            </p:contentPart>
-          </mc:Choice>
-          <mc:Fallback xmlns="">
-            <p:pic>
-              <p:nvPicPr>
-                <p:cNvPr id="70" name="Ink 69">
-                  <a:extLst>
-                    <a:ext uri="{FF2B5EF4-FFF2-40B4-BE49-F238E27FC236}">
-                      <a16:creationId xmlns:a16="http://schemas.microsoft.com/office/drawing/2014/main" id="{2F612256-638F-6B59-545E-FCBCDA2F4576}"/>
-                    </a:ext>
-                  </a:extLst>
-                </p:cNvPr>
-                <p:cNvPicPr/>
-                <p:nvPr/>
-              </p:nvPicPr>
-              <p:blipFill>
-                <a:blip r:embed="rId67"/>
-                <a:stretch>
-                  <a:fillRect/>
-                </a:stretch>
-              </p:blipFill>
-              <p:spPr>
-                <a:xfrm>
-                  <a:off x="3832848" y="3297816"/>
-                  <a:ext cx="18000" cy="25560"/>
-                </a:xfrm>
-                <a:prstGeom prst="rect">
-                  <a:avLst/>
-                </a:prstGeom>
-              </p:spPr>
-            </p:pic>
-          </mc:Fallback>
-        </mc:AlternateContent>
-      </p:grpSp>
-      <mc:AlternateContent xmlns:mc="http://schemas.openxmlformats.org/markup-compatibility/2006" xmlns:p14="http://schemas.microsoft.com/office/powerpoint/2010/main">
-        <mc:Choice Requires="p14">
-          <p:contentPart p14:bwMode="auto" r:id="rId68">
-            <p14:nvContentPartPr>
-              <p14:cNvPr id="71" name="Ink 70">
-                <a:extLst>
-                  <a:ext uri="{FF2B5EF4-FFF2-40B4-BE49-F238E27FC236}">
-                    <a16:creationId xmlns:a16="http://schemas.microsoft.com/office/drawing/2014/main" id="{0BB902BC-A5E4-0DCA-1F33-A103D1E30D55}"/>
-                  </a:ext>
-                </a:extLst>
-              </p14:cNvPr>
-              <p14:cNvContentPartPr/>
-              <p14:nvPr/>
-            </p14:nvContentPartPr>
-            <p14:xfrm>
-              <a:off x="2300130" y="1253232"/>
-              <a:ext cx="7200" cy="10440"/>
-            </p14:xfrm>
-          </p:contentPart>
-        </mc:Choice>
-        <mc:Fallback xmlns="">
-          <p:pic>
-            <p:nvPicPr>
-              <p:cNvPr id="71" name="Ink 70">
-                <a:extLst>
-                  <a:ext uri="{FF2B5EF4-FFF2-40B4-BE49-F238E27FC236}">
-                    <a16:creationId xmlns:a16="http://schemas.microsoft.com/office/drawing/2014/main" id="{0BB902BC-A5E4-0DCA-1F33-A103D1E30D55}"/>
-                  </a:ext>
-                </a:extLst>
-              </p:cNvPr>
-              <p:cNvPicPr/>
-              <p:nvPr/>
-            </p:nvPicPr>
-            <p:blipFill>
-              <a:blip r:embed="rId69"/>
-              <a:stretch>
-                <a:fillRect/>
-              </a:stretch>
-            </p:blipFill>
-            <p:spPr>
-              <a:xfrm>
-                <a:off x="2291130" y="1244232"/>
-                <a:ext cx="24840" cy="28080"/>
-              </a:xfrm>
-              <a:prstGeom prst="rect">
-                <a:avLst/>
-              </a:prstGeom>
-            </p:spPr>
-          </p:pic>
-        </mc:Fallback>
-      </mc:AlternateContent>
-      <mc:AlternateContent xmlns:mc="http://schemas.openxmlformats.org/markup-compatibility/2006" xmlns:p14="http://schemas.microsoft.com/office/powerpoint/2010/main">
-        <mc:Choice Requires="p14">
-          <p:contentPart p14:bwMode="auto" r:id="rId70">
-            <p14:nvContentPartPr>
-              <p14:cNvPr id="72" name="Ink 71">
-                <a:extLst>
-                  <a:ext uri="{FF2B5EF4-FFF2-40B4-BE49-F238E27FC236}">
-                    <a16:creationId xmlns:a16="http://schemas.microsoft.com/office/drawing/2014/main" id="{1295C1AE-9054-38C4-EE50-E25A1A0E6081}"/>
-                  </a:ext>
-                </a:extLst>
-              </p14:cNvPr>
-              <p14:cNvContentPartPr/>
-              <p14:nvPr/>
-            </p14:nvContentPartPr>
-            <p14:xfrm>
-              <a:off x="1981170" y="587592"/>
-              <a:ext cx="104760" cy="348480"/>
-            </p14:xfrm>
-          </p:contentPart>
-        </mc:Choice>
-        <mc:Fallback xmlns="">
-          <p:pic>
-            <p:nvPicPr>
-              <p:cNvPr id="72" name="Ink 71">
-                <a:extLst>
-                  <a:ext uri="{FF2B5EF4-FFF2-40B4-BE49-F238E27FC236}">
-                    <a16:creationId xmlns:a16="http://schemas.microsoft.com/office/drawing/2014/main" id="{1295C1AE-9054-38C4-EE50-E25A1A0E6081}"/>
-                  </a:ext>
-                </a:extLst>
-              </p:cNvPr>
-              <p:cNvPicPr/>
-              <p:nvPr/>
-            </p:nvPicPr>
-            <p:blipFill>
-              <a:blip r:embed="rId71"/>
-              <a:stretch>
-                <a:fillRect/>
-              </a:stretch>
-            </p:blipFill>
-            <p:spPr>
-              <a:xfrm>
-                <a:off x="1972530" y="578592"/>
-                <a:ext cx="122400" cy="366120"/>
-              </a:xfrm>
-              <a:prstGeom prst="rect">
-                <a:avLst/>
-              </a:prstGeom>
-            </p:spPr>
-          </p:pic>
-        </mc:Fallback>
-      </mc:AlternateContent>
-      <mc:AlternateContent xmlns:mc="http://schemas.openxmlformats.org/markup-compatibility/2006" xmlns:p14="http://schemas.microsoft.com/office/powerpoint/2010/main">
-        <mc:Choice Requires="p14">
-          <p:contentPart p14:bwMode="auto" r:id="rId72">
-            <p14:nvContentPartPr>
-              <p14:cNvPr id="73" name="Ink 72">
-                <a:extLst>
-                  <a:ext uri="{FF2B5EF4-FFF2-40B4-BE49-F238E27FC236}">
-                    <a16:creationId xmlns:a16="http://schemas.microsoft.com/office/drawing/2014/main" id="{9CC5D360-F5BA-D371-E80A-E2E3C852FEF9}"/>
-                  </a:ext>
-                </a:extLst>
-              </p14:cNvPr>
-              <p14:cNvContentPartPr/>
-              <p14:nvPr/>
-            </p14:nvContentPartPr>
-            <p14:xfrm>
-              <a:off x="1108170" y="633672"/>
-              <a:ext cx="95400" cy="262800"/>
-            </p14:xfrm>
-          </p:contentPart>
-        </mc:Choice>
-        <mc:Fallback xmlns="">
-          <p:pic>
-            <p:nvPicPr>
-              <p:cNvPr id="73" name="Ink 72">
-                <a:extLst>
-                  <a:ext uri="{FF2B5EF4-FFF2-40B4-BE49-F238E27FC236}">
-                    <a16:creationId xmlns:a16="http://schemas.microsoft.com/office/drawing/2014/main" id="{9CC5D360-F5BA-D371-E80A-E2E3C852FEF9}"/>
-                  </a:ext>
-                </a:extLst>
-              </p:cNvPr>
-              <p:cNvPicPr/>
-              <p:nvPr/>
-            </p:nvPicPr>
-            <p:blipFill>
-              <a:blip r:embed="rId73"/>
-              <a:stretch>
-                <a:fillRect/>
-              </a:stretch>
-            </p:blipFill>
-            <p:spPr>
-              <a:xfrm>
-                <a:off x="1099170" y="625032"/>
-                <a:ext cx="113040" cy="280440"/>
-              </a:xfrm>
-              <a:prstGeom prst="rect">
-                <a:avLst/>
-              </a:prstGeom>
-            </p:spPr>
-          </p:pic>
-        </mc:Fallback>
-      </mc:AlternateContent>
-      <mc:AlternateContent xmlns:mc="http://schemas.openxmlformats.org/markup-compatibility/2006" xmlns:p14="http://schemas.microsoft.com/office/powerpoint/2010/main">
-        <mc:Choice Requires="p14">
-          <p:contentPart p14:bwMode="auto" r:id="rId74">
-            <p14:nvContentPartPr>
-              <p14:cNvPr id="74" name="Ink 73">
-                <a:extLst>
-                  <a:ext uri="{FF2B5EF4-FFF2-40B4-BE49-F238E27FC236}">
-                    <a16:creationId xmlns:a16="http://schemas.microsoft.com/office/drawing/2014/main" id="{12A6C593-2125-22E8-9FFE-E04EBDF51186}"/>
-                  </a:ext>
-                </a:extLst>
-              </p14:cNvPr>
-              <p14:cNvContentPartPr/>
-              <p14:nvPr/>
-            </p14:nvContentPartPr>
-            <p14:xfrm>
-              <a:off x="1617570" y="359352"/>
-              <a:ext cx="42840" cy="303480"/>
-            </p14:xfrm>
-          </p:contentPart>
-        </mc:Choice>
-        <mc:Fallback xmlns="">
-          <p:pic>
-            <p:nvPicPr>
-              <p:cNvPr id="74" name="Ink 73">
-                <a:extLst>
-                  <a:ext uri="{FF2B5EF4-FFF2-40B4-BE49-F238E27FC236}">
-                    <a16:creationId xmlns:a16="http://schemas.microsoft.com/office/drawing/2014/main" id="{12A6C593-2125-22E8-9FFE-E04EBDF51186}"/>
-                  </a:ext>
-                </a:extLst>
-              </p:cNvPr>
-              <p:cNvPicPr/>
-              <p:nvPr/>
-            </p:nvPicPr>
-            <p:blipFill>
-              <a:blip r:embed="rId75"/>
-              <a:stretch>
-                <a:fillRect/>
-              </a:stretch>
-            </p:blipFill>
-            <p:spPr>
-              <a:xfrm>
-                <a:off x="1608570" y="350712"/>
-                <a:ext cx="60480" cy="321120"/>
-              </a:xfrm>
-              <a:prstGeom prst="rect">
-                <a:avLst/>
-              </a:prstGeom>
-            </p:spPr>
-          </p:pic>
-        </mc:Fallback>
-      </mc:AlternateContent>
-      <p:sp>
-        <p:nvSpPr>
-          <p:cNvPr id="104" name="TextBox 103">
-            <a:extLst>
-              <a:ext uri="{FF2B5EF4-FFF2-40B4-BE49-F238E27FC236}">
-                <a16:creationId xmlns:a16="http://schemas.microsoft.com/office/drawing/2014/main" id="{3B2234AE-A2A9-DB5F-21C5-1320BD300FE9}"/>
-              </a:ext>
-            </a:extLst>
-          </p:cNvPr>
-          <p:cNvSpPr txBox="1"/>
-          <p:nvPr/>
-        </p:nvSpPr>
-        <p:spPr>
-          <a:xfrm>
-            <a:off x="3247564" y="467352"/>
-            <a:ext cx="3713444" cy="2308324"/>
-          </a:xfrm>
-          <a:prstGeom prst="rect">
-            <a:avLst/>
-          </a:prstGeom>
-          <a:noFill/>
-        </p:spPr>
-        <p:txBody>
-          <a:bodyPr wrap="square" rtlCol="0">
-            <a:spAutoFit/>
-          </a:bodyPr>
-          <a:lstStyle/>
-          <a:p>
-            <a:r>
-              <a:rPr lang="da-DK" dirty="0"/>
-              <a:t>Independent variable </a:t>
-            </a:r>
-            <a:r>
-              <a:rPr lang="da-DK" dirty="0">
-                <a:sym typeface="Wingdings" panose="05000000000000000000" pitchFamily="2" charset="2"/>
-              </a:rPr>
-              <a:t> time</a:t>
-            </a:r>
-          </a:p>
-          <a:p>
-            <a:r>
-              <a:rPr lang="da-DK" dirty="0">
-                <a:sym typeface="Wingdings" panose="05000000000000000000" pitchFamily="2" charset="2"/>
-              </a:rPr>
-              <a:t>Dependent variable  </a:t>
-            </a:r>
-            <a:r>
-              <a:rPr lang="da-DK" dirty="0" err="1">
-                <a:sym typeface="Wingdings" panose="05000000000000000000" pitchFamily="2" charset="2"/>
-              </a:rPr>
-              <a:t>Many</a:t>
-            </a:r>
-            <a:r>
-              <a:rPr lang="da-DK" dirty="0">
-                <a:sym typeface="Wingdings" panose="05000000000000000000" pitchFamily="2" charset="2"/>
-              </a:rPr>
-              <a:t>! (but </a:t>
-            </a:r>
-            <a:r>
-              <a:rPr lang="da-DK" dirty="0" err="1">
-                <a:sym typeface="Wingdings" panose="05000000000000000000" pitchFamily="2" charset="2"/>
-              </a:rPr>
-              <a:t>we</a:t>
-            </a:r>
-            <a:r>
-              <a:rPr lang="da-DK" dirty="0">
-                <a:sym typeface="Wingdings" panose="05000000000000000000" pitchFamily="2" charset="2"/>
-              </a:rPr>
-              <a:t> </a:t>
-            </a:r>
-            <a:r>
-              <a:rPr lang="da-DK" dirty="0" err="1">
-                <a:sym typeface="Wingdings" panose="05000000000000000000" pitchFamily="2" charset="2"/>
-              </a:rPr>
-              <a:t>are</a:t>
-            </a:r>
-            <a:r>
-              <a:rPr lang="da-DK" dirty="0">
-                <a:sym typeface="Wingdings" panose="05000000000000000000" pitchFamily="2" charset="2"/>
-              </a:rPr>
-              <a:t> </a:t>
-            </a:r>
-            <a:r>
-              <a:rPr lang="da-DK" dirty="0" err="1">
-                <a:sym typeface="Wingdings" panose="05000000000000000000" pitchFamily="2" charset="2"/>
-              </a:rPr>
-              <a:t>interested</a:t>
-            </a:r>
-            <a:r>
-              <a:rPr lang="da-DK" dirty="0">
-                <a:sym typeface="Wingdings" panose="05000000000000000000" pitchFamily="2" charset="2"/>
-              </a:rPr>
-              <a:t> in ”heat removed” from the system (</a:t>
-            </a:r>
-            <a:r>
-              <a:rPr lang="da-DK" dirty="0" err="1">
-                <a:sym typeface="Wingdings" panose="05000000000000000000" pitchFamily="2" charset="2"/>
-              </a:rPr>
-              <a:t>which</a:t>
-            </a:r>
-            <a:r>
-              <a:rPr lang="da-DK" dirty="0">
-                <a:sym typeface="Wingdings" panose="05000000000000000000" pitchFamily="2" charset="2"/>
-              </a:rPr>
-              <a:t> </a:t>
-            </a:r>
-            <a:r>
-              <a:rPr lang="da-DK" dirty="0" err="1">
-                <a:sym typeface="Wingdings" panose="05000000000000000000" pitchFamily="2" charset="2"/>
-              </a:rPr>
-              <a:t>depends</a:t>
-            </a:r>
-            <a:r>
-              <a:rPr lang="da-DK" dirty="0">
-                <a:sym typeface="Wingdings" panose="05000000000000000000" pitchFamily="2" charset="2"/>
-              </a:rPr>
-              <a:t> on </a:t>
-            </a:r>
-            <a:r>
-              <a:rPr lang="da-DK" dirty="0" err="1">
-                <a:sym typeface="Wingdings" panose="05000000000000000000" pitchFamily="2" charset="2"/>
-              </a:rPr>
-              <a:t>other</a:t>
-            </a:r>
-            <a:r>
-              <a:rPr lang="da-DK" dirty="0">
-                <a:sym typeface="Wingdings" panose="05000000000000000000" pitchFamily="2" charset="2"/>
-              </a:rPr>
-              <a:t> time dependent variables)</a:t>
-            </a:r>
-          </a:p>
-          <a:p>
-            <a:r>
-              <a:rPr lang="da-DK" dirty="0">
-                <a:sym typeface="Wingdings" panose="05000000000000000000" pitchFamily="2" charset="2"/>
-              </a:rPr>
-              <a:t>Or </a:t>
-            </a:r>
-            <a:r>
-              <a:rPr lang="da-DK" dirty="0" err="1">
-                <a:sym typeface="Wingdings" panose="05000000000000000000" pitchFamily="2" charset="2"/>
-              </a:rPr>
-              <a:t>are</a:t>
-            </a:r>
-            <a:r>
-              <a:rPr lang="da-DK" dirty="0">
-                <a:sym typeface="Wingdings" panose="05000000000000000000" pitchFamily="2" charset="2"/>
-              </a:rPr>
-              <a:t> </a:t>
-            </a:r>
-            <a:r>
-              <a:rPr lang="da-DK" dirty="0" err="1">
-                <a:sym typeface="Wingdings" panose="05000000000000000000" pitchFamily="2" charset="2"/>
-              </a:rPr>
-              <a:t>we</a:t>
-            </a:r>
-            <a:r>
-              <a:rPr lang="da-DK" dirty="0">
-                <a:sym typeface="Wingdings" panose="05000000000000000000" pitchFamily="2" charset="2"/>
-              </a:rPr>
-              <a:t> </a:t>
-            </a:r>
-            <a:r>
-              <a:rPr lang="da-DK" dirty="0" err="1">
-                <a:sym typeface="Wingdings" panose="05000000000000000000" pitchFamily="2" charset="2"/>
-              </a:rPr>
-              <a:t>interested</a:t>
-            </a:r>
-            <a:r>
-              <a:rPr lang="da-DK" dirty="0">
-                <a:sym typeface="Wingdings" panose="05000000000000000000" pitchFamily="2" charset="2"/>
-              </a:rPr>
-              <a:t> in </a:t>
-            </a:r>
-            <a:r>
-              <a:rPr lang="da-DK" dirty="0" err="1">
-                <a:sym typeface="Wingdings" panose="05000000000000000000" pitchFamily="2" charset="2"/>
-              </a:rPr>
-              <a:t>temperature</a:t>
-            </a:r>
-            <a:r>
-              <a:rPr lang="da-DK" dirty="0">
-                <a:sym typeface="Wingdings" panose="05000000000000000000" pitchFamily="2" charset="2"/>
-              </a:rPr>
-              <a:t> of the system?</a:t>
-            </a:r>
-          </a:p>
-          <a:p>
-            <a:r>
-              <a:rPr lang="da-DK" dirty="0" err="1">
-                <a:sym typeface="Wingdings" panose="05000000000000000000" pitchFamily="2" charset="2"/>
-              </a:rPr>
-              <a:t>Boundary</a:t>
-            </a:r>
-            <a:r>
-              <a:rPr lang="da-DK" dirty="0">
-                <a:sym typeface="Wingdings" panose="05000000000000000000" pitchFamily="2" charset="2"/>
-              </a:rPr>
-              <a:t> of system to model?</a:t>
-            </a:r>
-            <a:endParaRPr lang="da-DK" dirty="0"/>
-          </a:p>
-        </p:txBody>
-      </p:sp>
-      <p:sp>
-        <p:nvSpPr>
-          <p:cNvPr id="105" name="Rectangle 104">
-            <a:extLst>
-              <a:ext uri="{FF2B5EF4-FFF2-40B4-BE49-F238E27FC236}">
-                <a16:creationId xmlns:a16="http://schemas.microsoft.com/office/drawing/2014/main" id="{A7B5C972-5281-A5EC-064D-3C67BE670CD0}"/>
-              </a:ext>
-            </a:extLst>
-          </p:cNvPr>
-          <p:cNvSpPr/>
-          <p:nvPr/>
-        </p:nvSpPr>
-        <p:spPr>
-          <a:xfrm>
-            <a:off x="1020330" y="1086192"/>
-            <a:ext cx="1367554" cy="1227544"/>
-          </a:xfrm>
-          <a:prstGeom prst="rect">
-            <a:avLst/>
-          </a:prstGeom>
-          <a:noFill/>
-          <a:ln>
-            <a:solidFill>
-              <a:srgbClr val="FF0000"/>
-            </a:solidFill>
-            <a:prstDash val="dash"/>
-          </a:ln>
-        </p:spPr>
-        <p:style>
-          <a:lnRef idx="2">
-            <a:schemeClr val="accent1">
-              <a:shade val="15000"/>
-            </a:schemeClr>
-          </a:lnRef>
-          <a:fillRef idx="1">
-            <a:schemeClr val="accent1"/>
-          </a:fillRef>
-          <a:effectRef idx="0">
-            <a:schemeClr val="accent1"/>
-          </a:effectRef>
-          <a:fontRef idx="minor">
-            <a:schemeClr val="lt1"/>
-          </a:fontRef>
-        </p:style>
-        <p:txBody>
-          <a:bodyPr rtlCol="0" anchor="ctr"/>
-          <a:lstStyle/>
-          <a:p>
-            <a:pPr algn="ctr"/>
-            <a:endParaRPr lang="da-DK"/>
-          </a:p>
-        </p:txBody>
-      </p:sp>
-      <mc:AlternateContent xmlns:mc="http://schemas.openxmlformats.org/markup-compatibility/2006" xmlns:p14="http://schemas.microsoft.com/office/powerpoint/2010/main">
-        <mc:Choice Requires="p14">
-          <p:contentPart p14:bwMode="auto" r:id="rId76">
-            <p14:nvContentPartPr>
-              <p14:cNvPr id="107" name="Ink 106">
-                <a:extLst>
-                  <a:ext uri="{FF2B5EF4-FFF2-40B4-BE49-F238E27FC236}">
-                    <a16:creationId xmlns:a16="http://schemas.microsoft.com/office/drawing/2014/main" id="{4AF853B9-85CA-E0F3-E3BD-56DDA6DC7F82}"/>
-                  </a:ext>
-                </a:extLst>
-              </p14:cNvPr>
-              <p14:cNvContentPartPr/>
-              <p14:nvPr/>
-            </p14:nvContentPartPr>
-            <p14:xfrm>
-              <a:off x="2414736" y="2018304"/>
-              <a:ext cx="720720" cy="194400"/>
-            </p14:xfrm>
-          </p:contentPart>
-        </mc:Choice>
-        <mc:Fallback xmlns="">
-          <p:pic>
-            <p:nvPicPr>
-              <p:cNvPr id="107" name="Ink 106">
-                <a:extLst>
-                  <a:ext uri="{FF2B5EF4-FFF2-40B4-BE49-F238E27FC236}">
-                    <a16:creationId xmlns:a16="http://schemas.microsoft.com/office/drawing/2014/main" id="{4AF853B9-85CA-E0F3-E3BD-56DDA6DC7F82}"/>
-                  </a:ext>
-                </a:extLst>
-              </p:cNvPr>
-              <p:cNvPicPr/>
-              <p:nvPr/>
-            </p:nvPicPr>
-            <p:blipFill>
-              <a:blip r:embed="rId77"/>
-              <a:stretch>
-                <a:fillRect/>
-              </a:stretch>
-            </p:blipFill>
-            <p:spPr>
-              <a:xfrm>
-                <a:off x="2406096" y="2009304"/>
-                <a:ext cx="738360" cy="212040"/>
-              </a:xfrm>
-              <a:prstGeom prst="rect">
-                <a:avLst/>
-              </a:prstGeom>
-            </p:spPr>
-          </p:pic>
-        </mc:Fallback>
-      </mc:AlternateContent>
-      <mc:AlternateContent xmlns:mc="http://schemas.openxmlformats.org/markup-compatibility/2006" xmlns:p14="http://schemas.microsoft.com/office/powerpoint/2010/main">
-        <mc:Choice Requires="p14">
-          <p:contentPart p14:bwMode="auto" r:id="rId78">
-            <p14:nvContentPartPr>
-              <p14:cNvPr id="114" name="Ink 113">
-                <a:extLst>
-                  <a:ext uri="{FF2B5EF4-FFF2-40B4-BE49-F238E27FC236}">
-                    <a16:creationId xmlns:a16="http://schemas.microsoft.com/office/drawing/2014/main" id="{CEABFDDE-09F0-D43F-C215-491778C1C60D}"/>
-                  </a:ext>
-                </a:extLst>
-              </p14:cNvPr>
-              <p14:cNvContentPartPr/>
-              <p14:nvPr/>
-            </p14:nvContentPartPr>
-            <p14:xfrm>
-              <a:off x="8273088" y="1628856"/>
-              <a:ext cx="1557360" cy="685800"/>
-            </p14:xfrm>
-          </p:contentPart>
-        </mc:Choice>
-        <mc:Fallback xmlns="">
-          <p:pic>
-            <p:nvPicPr>
-              <p:cNvPr id="114" name="Ink 113">
-                <a:extLst>
-                  <a:ext uri="{FF2B5EF4-FFF2-40B4-BE49-F238E27FC236}">
-                    <a16:creationId xmlns:a16="http://schemas.microsoft.com/office/drawing/2014/main" id="{CEABFDDE-09F0-D43F-C215-491778C1C60D}"/>
-                  </a:ext>
-                </a:extLst>
-              </p:cNvPr>
-              <p:cNvPicPr/>
-              <p:nvPr/>
-            </p:nvPicPr>
-            <p:blipFill>
-              <a:blip r:embed="rId79"/>
-              <a:stretch>
-                <a:fillRect/>
-              </a:stretch>
-            </p:blipFill>
-            <p:spPr>
-              <a:xfrm>
-                <a:off x="8264448" y="1619856"/>
-                <a:ext cx="1575000" cy="703440"/>
-              </a:xfrm>
-              <a:prstGeom prst="rect">
-                <a:avLst/>
-              </a:prstGeom>
-            </p:spPr>
-          </p:pic>
-        </mc:Fallback>
-      </mc:AlternateContent>
-    </p:spTree>
-    <p:extLst>
-      <p:ext uri="{BB962C8B-B14F-4D97-AF65-F5344CB8AC3E}">
-        <p14:creationId xmlns:p14="http://schemas.microsoft.com/office/powerpoint/2010/main" val="2654403263"/>
-      </p:ext>
-    </p:extLst>
-  </p:cSld>
-  <p:clrMapOvr>
-    <a:masterClrMapping/>
-  </p:clrMapOvr>
-</p:sld>
-</file>
-
-<file path=ppt/slides/slide11.xml><?xml version="1.0" encoding="utf-8"?>
-<p:sld xmlns:a="http://schemas.openxmlformats.org/drawingml/2006/main" xmlns:r="http://schemas.openxmlformats.org/officeDocument/2006/relationships" xmlns:p="http://schemas.openxmlformats.org/presentationml/2006/main">
-  <p:cSld>
-    <p:spTree>
-      <p:nvGrpSpPr>
-        <p:cNvPr id="1" name=""/>
-        <p:cNvGrpSpPr/>
-        <p:nvPr/>
-      </p:nvGrpSpPr>
-      <p:grpSpPr>
-        <a:xfrm>
-          <a:off x="0" y="0"/>
-          <a:ext cx="0" cy="0"/>
-          <a:chOff x="0" y="0"/>
-          <a:chExt cx="0" cy="0"/>
-        </a:xfrm>
-      </p:grpSpPr>
-      <p:pic>
-        <p:nvPicPr>
-          <p:cNvPr id="4" name="Picture 3">
-            <a:extLst>
-              <a:ext uri="{FF2B5EF4-FFF2-40B4-BE49-F238E27FC236}">
                 <a16:creationId xmlns:a16="http://schemas.microsoft.com/office/drawing/2014/main" id="{F904516E-D059-1F2E-AAD6-465EA0583588}"/>
               </a:ext>
             </a:extLst>
@@ -17019,7 +14359,7 @@
 </p:sld>
 </file>
 
-<file path=ppt/slides/slide12.xml><?xml version="1.0" encoding="utf-8"?>
+<file path=ppt/slides/slide11.xml><?xml version="1.0" encoding="utf-8"?>
 <p:sld xmlns:a="http://schemas.openxmlformats.org/drawingml/2006/main" xmlns:r="http://schemas.openxmlformats.org/officeDocument/2006/relationships" xmlns:p="http://schemas.openxmlformats.org/presentationml/2006/main">
   <p:cSld>
     <p:spTree>
@@ -21456,7 +18796,7 @@
 </p:sld>
 </file>
 
-<file path=ppt/slides/slide13.xml><?xml version="1.0" encoding="utf-8"?>
+<file path=ppt/slides/slide12.xml><?xml version="1.0" encoding="utf-8"?>
 <p:sld xmlns:a="http://schemas.openxmlformats.org/drawingml/2006/main" xmlns:r="http://schemas.openxmlformats.org/officeDocument/2006/relationships" xmlns:p="http://schemas.openxmlformats.org/presentationml/2006/main">
   <p:cSld>
     <p:spTree>
@@ -21687,7 +19027,7 @@
 </p:sld>
 </file>
 
-<file path=ppt/slides/slide14.xml><?xml version="1.0" encoding="utf-8"?>
+<file path=ppt/slides/slide13.xml><?xml version="1.0" encoding="utf-8"?>
 <p:sld xmlns:a="http://schemas.openxmlformats.org/drawingml/2006/main" xmlns:r="http://schemas.openxmlformats.org/officeDocument/2006/relationships" xmlns:p="http://schemas.openxmlformats.org/presentationml/2006/main">
   <p:cSld>
     <p:spTree>
@@ -23096,7 +20436,7 @@
 </p:sld>
 </file>
 
-<file path=ppt/slides/slide15.xml><?xml version="1.0" encoding="utf-8"?>
+<file path=ppt/slides/slide14.xml><?xml version="1.0" encoding="utf-8"?>
 <p:sld xmlns:a="http://schemas.openxmlformats.org/drawingml/2006/main" xmlns:r="http://schemas.openxmlformats.org/officeDocument/2006/relationships" xmlns:p="http://schemas.openxmlformats.org/presentationml/2006/main">
   <p:cSld>
     <p:spTree>
@@ -23371,7 +20711,7 @@
 </p:sld>
 </file>
 
-<file path=ppt/slides/slide16.xml><?xml version="1.0" encoding="utf-8"?>
+<file path=ppt/slides/slide15.xml><?xml version="1.0" encoding="utf-8"?>
 <p:sld xmlns:a="http://schemas.openxmlformats.org/drawingml/2006/main" xmlns:r="http://schemas.openxmlformats.org/officeDocument/2006/relationships" xmlns:p="http://schemas.openxmlformats.org/presentationml/2006/main">
   <p:cSld>
     <p:spTree>
@@ -25143,117 +22483,6 @@
 </file>
 
 <file path=ppt/slides/slide4.xml><?xml version="1.0" encoding="utf-8"?>
-<p:sld xmlns:a="http://schemas.openxmlformats.org/drawingml/2006/main" xmlns:r="http://schemas.openxmlformats.org/officeDocument/2006/relationships" xmlns:p="http://schemas.openxmlformats.org/presentationml/2006/main">
-  <p:cSld>
-    <p:spTree>
-      <p:nvGrpSpPr>
-        <p:cNvPr id="1" name=""/>
-        <p:cNvGrpSpPr/>
-        <p:nvPr/>
-      </p:nvGrpSpPr>
-      <p:grpSpPr>
-        <a:xfrm>
-          <a:off x="0" y="0"/>
-          <a:ext cx="0" cy="0"/>
-          <a:chOff x="0" y="0"/>
-          <a:chExt cx="0" cy="0"/>
-        </a:xfrm>
-      </p:grpSpPr>
-      <p:sp>
-        <p:nvSpPr>
-          <p:cNvPr id="3" name="Content Placeholder 2">
-            <a:extLst>
-              <a:ext uri="{FF2B5EF4-FFF2-40B4-BE49-F238E27FC236}">
-                <a16:creationId xmlns:a16="http://schemas.microsoft.com/office/drawing/2014/main" id="{6488C343-A849-35D8-E832-6839F3742948}"/>
-              </a:ext>
-            </a:extLst>
-          </p:cNvPr>
-          <p:cNvSpPr>
-            <a:spLocks noGrp="1"/>
-          </p:cNvSpPr>
-          <p:nvPr>
-            <p:ph idx="1"/>
-          </p:nvPr>
-        </p:nvSpPr>
-        <p:spPr>
-          <a:xfrm>
-            <a:off x="7344508" y="747102"/>
-            <a:ext cx="4003431" cy="2125052"/>
-          </a:xfrm>
-        </p:spPr>
-        <p:txBody>
-          <a:bodyPr/>
-          <a:lstStyle/>
-          <a:p>
-            <a:pPr>
-              <a:buFont typeface="Wingdings" panose="05000000000000000000" pitchFamily="2" charset="2"/>
-              <a:buChar char="Ø"/>
-            </a:pPr>
-            <a:r>
-              <a:rPr lang="da-DK" dirty="0"/>
-              <a:t>Repository </a:t>
-            </a:r>
-            <a:r>
-              <a:rPr lang="da-DK" dirty="0" err="1"/>
-              <a:t>structure</a:t>
-            </a:r>
-            <a:endParaRPr lang="da-DK" dirty="0"/>
-          </a:p>
-          <a:p>
-            <a:pPr>
-              <a:buFont typeface="Wingdings" panose="05000000000000000000" pitchFamily="2" charset="2"/>
-              <a:buChar char="Ø"/>
-            </a:pPr>
-            <a:r>
-              <a:rPr lang="da-DK" dirty="0"/>
-              <a:t>Book</a:t>
-            </a:r>
-          </a:p>
-          <a:p>
-            <a:pPr>
-              <a:buFont typeface="Wingdings" panose="05000000000000000000" pitchFamily="2" charset="2"/>
-              <a:buChar char="Ø"/>
-            </a:pPr>
-            <a:r>
-              <a:rPr lang="da-DK" dirty="0"/>
-              <a:t>Learning </a:t>
-            </a:r>
-            <a:r>
-              <a:rPr lang="da-DK" dirty="0" err="1"/>
-              <a:t>outcomes</a:t>
-            </a:r>
-            <a:endParaRPr lang="da-DK" dirty="0"/>
-          </a:p>
-          <a:p>
-            <a:pPr>
-              <a:buFont typeface="Wingdings" panose="05000000000000000000" pitchFamily="2" charset="2"/>
-              <a:buChar char="Ø"/>
-            </a:pPr>
-            <a:r>
-              <a:rPr lang="da-DK" dirty="0" err="1"/>
-              <a:t>Exam</a:t>
-            </a:r>
-            <a:endParaRPr lang="da-DK" dirty="0"/>
-          </a:p>
-          <a:p>
-            <a:endParaRPr lang="da-DK" dirty="0"/>
-          </a:p>
-        </p:txBody>
-      </p:sp>
-    </p:spTree>
-    <p:extLst>
-      <p:ext uri="{BB962C8B-B14F-4D97-AF65-F5344CB8AC3E}">
-        <p14:creationId xmlns:p14="http://schemas.microsoft.com/office/powerpoint/2010/main" val="1629653014"/>
-      </p:ext>
-    </p:extLst>
-  </p:cSld>
-  <p:clrMapOvr>
-    <a:masterClrMapping/>
-  </p:clrMapOvr>
-</p:sld>
-</file>
-
-<file path=ppt/slides/slide5.xml><?xml version="1.0" encoding="utf-8"?>
 <p:sld xmlns:a="http://schemas.openxmlformats.org/drawingml/2006/main" xmlns:r="http://schemas.openxmlformats.org/officeDocument/2006/relationships" xmlns:p="http://schemas.openxmlformats.org/presentationml/2006/main" showMasterSp="0">
   <p:cSld>
     <p:spTree>
@@ -25908,7 +23137,7 @@
 </p:sld>
 </file>
 
-<file path=ppt/slides/slide6.xml><?xml version="1.0" encoding="utf-8"?>
+<file path=ppt/slides/slide5.xml><?xml version="1.0" encoding="utf-8"?>
 <p:sld xmlns:a="http://schemas.openxmlformats.org/drawingml/2006/main" xmlns:r="http://schemas.openxmlformats.org/officeDocument/2006/relationships" xmlns:p="http://schemas.openxmlformats.org/presentationml/2006/main">
   <p:cSld>
     <p:spTree>
@@ -26110,7 +23339,7 @@
 </p:sld>
 </file>
 
-<file path=ppt/slides/slide7.xml><?xml version="1.0" encoding="utf-8"?>
+<file path=ppt/slides/slide6.xml><?xml version="1.0" encoding="utf-8"?>
 <p:sld xmlns:a="http://schemas.openxmlformats.org/drawingml/2006/main" xmlns:r="http://schemas.openxmlformats.org/officeDocument/2006/relationships" xmlns:p="http://schemas.openxmlformats.org/presentationml/2006/main">
   <p:cSld>
     <p:spTree>
@@ -29278,7 +26507,7 @@
 </p:sld>
 </file>
 
-<file path=ppt/slides/slide8.xml><?xml version="1.0" encoding="utf-8"?>
+<file path=ppt/slides/slide7.xml><?xml version="1.0" encoding="utf-8"?>
 <p:sld xmlns:a="http://schemas.openxmlformats.org/drawingml/2006/main" xmlns:r="http://schemas.openxmlformats.org/officeDocument/2006/relationships" xmlns:p="http://schemas.openxmlformats.org/presentationml/2006/main">
   <p:cSld>
     <p:spTree>
@@ -32577,7 +29806,7 @@
 </p:sld>
 </file>
 
-<file path=ppt/slides/slide9.xml><?xml version="1.0" encoding="utf-8"?>
+<file path=ppt/slides/slide8.xml><?xml version="1.0" encoding="utf-8"?>
 <p:sld xmlns:a="http://schemas.openxmlformats.org/drawingml/2006/main" xmlns:r="http://schemas.openxmlformats.org/officeDocument/2006/relationships" xmlns:p="http://schemas.openxmlformats.org/presentationml/2006/main">
   <p:cSld>
     <p:spTree>
@@ -39565,6 +36794,2505 @@
     <p:extLst>
       <p:ext uri="{BB962C8B-B14F-4D97-AF65-F5344CB8AC3E}">
         <p14:creationId xmlns:p14="http://schemas.microsoft.com/office/powerpoint/2010/main" val="3924267911"/>
+      </p:ext>
+    </p:extLst>
+  </p:cSld>
+  <p:clrMapOvr>
+    <a:masterClrMapping/>
+  </p:clrMapOvr>
+</p:sld>
+</file>
+
+<file path=ppt/slides/slide9.xml><?xml version="1.0" encoding="utf-8"?>
+<p:sld xmlns:a="http://schemas.openxmlformats.org/drawingml/2006/main" xmlns:r="http://schemas.openxmlformats.org/officeDocument/2006/relationships" xmlns:p="http://schemas.openxmlformats.org/presentationml/2006/main">
+  <p:cSld>
+    <p:spTree>
+      <p:nvGrpSpPr>
+        <p:cNvPr id="1" name=""/>
+        <p:cNvGrpSpPr/>
+        <p:nvPr/>
+      </p:nvGrpSpPr>
+      <p:grpSpPr>
+        <a:xfrm>
+          <a:off x="0" y="0"/>
+          <a:ext cx="0" cy="0"/>
+          <a:chOff x="0" y="0"/>
+          <a:chExt cx="0" cy="0"/>
+        </a:xfrm>
+      </p:grpSpPr>
+      <p:pic>
+        <p:nvPicPr>
+          <p:cNvPr id="4" name="Picture 3">
+            <a:extLst>
+              <a:ext uri="{FF2B5EF4-FFF2-40B4-BE49-F238E27FC236}">
+                <a16:creationId xmlns:a16="http://schemas.microsoft.com/office/drawing/2014/main" id="{F0DFC5B7-7F7E-ED82-90EB-44D45FBA7236}"/>
+              </a:ext>
+            </a:extLst>
+          </p:cNvPr>
+          <p:cNvPicPr>
+            <a:picLocks noChangeAspect="1"/>
+          </p:cNvPicPr>
+          <p:nvPr/>
+        </p:nvPicPr>
+        <p:blipFill>
+          <a:blip r:embed="rId2"/>
+          <a:stretch>
+            <a:fillRect/>
+          </a:stretch>
+        </p:blipFill>
+        <p:spPr>
+          <a:xfrm>
+            <a:off x="7496400" y="258924"/>
+            <a:ext cx="4494236" cy="5107087"/>
+          </a:xfrm>
+          <a:prstGeom prst="rect">
+            <a:avLst/>
+          </a:prstGeom>
+        </p:spPr>
+      </p:pic>
+      <p:pic>
+        <p:nvPicPr>
+          <p:cNvPr id="6" name="Picture 5">
+            <a:extLst>
+              <a:ext uri="{FF2B5EF4-FFF2-40B4-BE49-F238E27FC236}">
+                <a16:creationId xmlns:a16="http://schemas.microsoft.com/office/drawing/2014/main" id="{A497910F-BA09-2B01-9D32-EDC2EA4965FA}"/>
+              </a:ext>
+            </a:extLst>
+          </p:cNvPr>
+          <p:cNvPicPr>
+            <a:picLocks noChangeAspect="1"/>
+          </p:cNvPicPr>
+          <p:nvPr/>
+        </p:nvPicPr>
+        <p:blipFill>
+          <a:blip r:embed="rId3"/>
+          <a:stretch>
+            <a:fillRect/>
+          </a:stretch>
+        </p:blipFill>
+        <p:spPr>
+          <a:xfrm>
+            <a:off x="520365" y="5051550"/>
+            <a:ext cx="4915586" cy="895475"/>
+          </a:xfrm>
+          <a:prstGeom prst="rect">
+            <a:avLst/>
+          </a:prstGeom>
+        </p:spPr>
+      </p:pic>
+      <p:pic>
+        <p:nvPicPr>
+          <p:cNvPr id="8" name="Picture 7">
+            <a:extLst>
+              <a:ext uri="{FF2B5EF4-FFF2-40B4-BE49-F238E27FC236}">
+                <a16:creationId xmlns:a16="http://schemas.microsoft.com/office/drawing/2014/main" id="{A0ED089D-58D6-57D9-6AB0-569BD94063E9}"/>
+              </a:ext>
+            </a:extLst>
+          </p:cNvPr>
+          <p:cNvPicPr>
+            <a:picLocks noChangeAspect="1"/>
+          </p:cNvPicPr>
+          <p:nvPr/>
+        </p:nvPicPr>
+        <p:blipFill>
+          <a:blip r:embed="rId4"/>
+          <a:stretch>
+            <a:fillRect/>
+          </a:stretch>
+        </p:blipFill>
+        <p:spPr>
+          <a:xfrm>
+            <a:off x="520365" y="3751843"/>
+            <a:ext cx="4486901" cy="838317"/>
+          </a:xfrm>
+          <a:prstGeom prst="rect">
+            <a:avLst/>
+          </a:prstGeom>
+        </p:spPr>
+      </p:pic>
+      <p:sp>
+        <p:nvSpPr>
+          <p:cNvPr id="9" name="TextBox 8">
+            <a:extLst>
+              <a:ext uri="{FF2B5EF4-FFF2-40B4-BE49-F238E27FC236}">
+                <a16:creationId xmlns:a16="http://schemas.microsoft.com/office/drawing/2014/main" id="{8876F00A-046C-DEB8-8825-FDD126F659E8}"/>
+              </a:ext>
+            </a:extLst>
+          </p:cNvPr>
+          <p:cNvSpPr txBox="1"/>
+          <p:nvPr/>
+        </p:nvSpPr>
+        <p:spPr>
+          <a:xfrm>
+            <a:off x="790015" y="3290453"/>
+            <a:ext cx="1568058" cy="369332"/>
+          </a:xfrm>
+          <a:prstGeom prst="rect">
+            <a:avLst/>
+          </a:prstGeom>
+          <a:noFill/>
+        </p:spPr>
+        <p:txBody>
+          <a:bodyPr wrap="none" rtlCol="0">
+            <a:spAutoFit/>
+          </a:bodyPr>
+          <a:lstStyle/>
+          <a:p>
+            <a:r>
+              <a:rPr lang="da-DK" dirty="0"/>
+              <a:t>Mass balance</a:t>
+            </a:r>
+          </a:p>
+        </p:txBody>
+      </p:sp>
+      <p:sp>
+        <p:nvSpPr>
+          <p:cNvPr id="10" name="TextBox 9">
+            <a:extLst>
+              <a:ext uri="{FF2B5EF4-FFF2-40B4-BE49-F238E27FC236}">
+                <a16:creationId xmlns:a16="http://schemas.microsoft.com/office/drawing/2014/main" id="{551144A2-C8FC-8173-7C9E-7A3E313C0ACF}"/>
+              </a:ext>
+            </a:extLst>
+          </p:cNvPr>
+          <p:cNvSpPr txBox="1"/>
+          <p:nvPr/>
+        </p:nvSpPr>
+        <p:spPr>
+          <a:xfrm>
+            <a:off x="790015" y="4636189"/>
+            <a:ext cx="1752211" cy="369332"/>
+          </a:xfrm>
+          <a:prstGeom prst="rect">
+            <a:avLst/>
+          </a:prstGeom>
+          <a:noFill/>
+        </p:spPr>
+        <p:txBody>
+          <a:bodyPr wrap="none" rtlCol="0">
+            <a:spAutoFit/>
+          </a:bodyPr>
+          <a:lstStyle/>
+          <a:p>
+            <a:r>
+              <a:rPr lang="da-DK" dirty="0"/>
+              <a:t>Energy balance</a:t>
+            </a:r>
+          </a:p>
+        </p:txBody>
+      </p:sp>
+      <mc:AlternateContent xmlns:mc="http://schemas.openxmlformats.org/markup-compatibility/2006" xmlns:p14="http://schemas.microsoft.com/office/powerpoint/2010/main">
+        <mc:Choice Requires="p14">
+          <p:contentPart p14:bwMode="auto" r:id="rId5">
+            <p14:nvContentPartPr>
+              <p14:cNvPr id="35" name="Ink 34">
+                <a:extLst>
+                  <a:ext uri="{FF2B5EF4-FFF2-40B4-BE49-F238E27FC236}">
+                    <a16:creationId xmlns:a16="http://schemas.microsoft.com/office/drawing/2014/main" id="{52172770-10DA-DF04-456D-873FC6C39C57}"/>
+                  </a:ext>
+                </a:extLst>
+              </p14:cNvPr>
+              <p14:cNvContentPartPr/>
+              <p14:nvPr/>
+            </p14:nvContentPartPr>
+            <p14:xfrm>
+              <a:off x="958050" y="816912"/>
+              <a:ext cx="707040" cy="1672560"/>
+            </p14:xfrm>
+          </p:contentPart>
+        </mc:Choice>
+        <mc:Fallback xmlns="">
+          <p:pic>
+            <p:nvPicPr>
+              <p:cNvPr id="35" name="Ink 34">
+                <a:extLst>
+                  <a:ext uri="{FF2B5EF4-FFF2-40B4-BE49-F238E27FC236}">
+                    <a16:creationId xmlns:a16="http://schemas.microsoft.com/office/drawing/2014/main" id="{52172770-10DA-DF04-456D-873FC6C39C57}"/>
+                  </a:ext>
+                </a:extLst>
+              </p:cNvPr>
+              <p:cNvPicPr/>
+              <p:nvPr/>
+            </p:nvPicPr>
+            <p:blipFill>
+              <a:blip r:embed="rId6"/>
+              <a:stretch>
+                <a:fillRect/>
+              </a:stretch>
+            </p:blipFill>
+            <p:spPr>
+              <a:xfrm>
+                <a:off x="949050" y="808272"/>
+                <a:ext cx="724680" cy="1690200"/>
+              </a:xfrm>
+              <a:prstGeom prst="rect">
+                <a:avLst/>
+              </a:prstGeom>
+            </p:spPr>
+          </p:pic>
+        </mc:Fallback>
+      </mc:AlternateContent>
+      <mc:AlternateContent xmlns:mc="http://schemas.openxmlformats.org/markup-compatibility/2006" xmlns:p14="http://schemas.microsoft.com/office/powerpoint/2010/main">
+        <mc:Choice Requires="p14">
+          <p:contentPart p14:bwMode="auto" r:id="rId7">
+            <p14:nvContentPartPr>
+              <p14:cNvPr id="36" name="Ink 35">
+                <a:extLst>
+                  <a:ext uri="{FF2B5EF4-FFF2-40B4-BE49-F238E27FC236}">
+                    <a16:creationId xmlns:a16="http://schemas.microsoft.com/office/drawing/2014/main" id="{9768AC6E-4C25-0779-18CD-39C30B9812EA}"/>
+                  </a:ext>
+                </a:extLst>
+              </p14:cNvPr>
+              <p14:cNvContentPartPr/>
+              <p14:nvPr/>
+            </p14:nvContentPartPr>
+            <p14:xfrm>
+              <a:off x="1784970" y="728352"/>
+              <a:ext cx="665640" cy="1783800"/>
+            </p14:xfrm>
+          </p:contentPart>
+        </mc:Choice>
+        <mc:Fallback xmlns="">
+          <p:pic>
+            <p:nvPicPr>
+              <p:cNvPr id="36" name="Ink 35">
+                <a:extLst>
+                  <a:ext uri="{FF2B5EF4-FFF2-40B4-BE49-F238E27FC236}">
+                    <a16:creationId xmlns:a16="http://schemas.microsoft.com/office/drawing/2014/main" id="{9768AC6E-4C25-0779-18CD-39C30B9812EA}"/>
+                  </a:ext>
+                </a:extLst>
+              </p:cNvPr>
+              <p:cNvPicPr/>
+              <p:nvPr/>
+            </p:nvPicPr>
+            <p:blipFill>
+              <a:blip r:embed="rId8"/>
+              <a:stretch>
+                <a:fillRect/>
+              </a:stretch>
+            </p:blipFill>
+            <p:spPr>
+              <a:xfrm>
+                <a:off x="1775970" y="719352"/>
+                <a:ext cx="683280" cy="1801440"/>
+              </a:xfrm>
+              <a:prstGeom prst="rect">
+                <a:avLst/>
+              </a:prstGeom>
+            </p:spPr>
+          </p:pic>
+        </mc:Fallback>
+      </mc:AlternateContent>
+      <mc:AlternateContent xmlns:mc="http://schemas.openxmlformats.org/markup-compatibility/2006" xmlns:p14="http://schemas.microsoft.com/office/powerpoint/2010/main">
+        <mc:Choice Requires="p14">
+          <p:contentPart p14:bwMode="auto" r:id="rId9">
+            <p14:nvContentPartPr>
+              <p14:cNvPr id="37" name="Ink 36">
+                <a:extLst>
+                  <a:ext uri="{FF2B5EF4-FFF2-40B4-BE49-F238E27FC236}">
+                    <a16:creationId xmlns:a16="http://schemas.microsoft.com/office/drawing/2014/main" id="{3621F9E4-9914-A637-518C-4114635164F4}"/>
+                  </a:ext>
+                </a:extLst>
+              </p14:cNvPr>
+              <p14:cNvContentPartPr/>
+              <p14:nvPr/>
+            </p14:nvContentPartPr>
+            <p14:xfrm>
+              <a:off x="1242090" y="467352"/>
+              <a:ext cx="811080" cy="954720"/>
+            </p14:xfrm>
+          </p:contentPart>
+        </mc:Choice>
+        <mc:Fallback xmlns="">
+          <p:pic>
+            <p:nvPicPr>
+              <p:cNvPr id="37" name="Ink 36">
+                <a:extLst>
+                  <a:ext uri="{FF2B5EF4-FFF2-40B4-BE49-F238E27FC236}">
+                    <a16:creationId xmlns:a16="http://schemas.microsoft.com/office/drawing/2014/main" id="{3621F9E4-9914-A637-518C-4114635164F4}"/>
+                  </a:ext>
+                </a:extLst>
+              </p:cNvPr>
+              <p:cNvPicPr/>
+              <p:nvPr/>
+            </p:nvPicPr>
+            <p:blipFill>
+              <a:blip r:embed="rId10"/>
+              <a:stretch>
+                <a:fillRect/>
+              </a:stretch>
+            </p:blipFill>
+            <p:spPr>
+              <a:xfrm>
+                <a:off x="1233090" y="458352"/>
+                <a:ext cx="828720" cy="972360"/>
+              </a:xfrm>
+              <a:prstGeom prst="rect">
+                <a:avLst/>
+              </a:prstGeom>
+            </p:spPr>
+          </p:pic>
+        </mc:Fallback>
+      </mc:AlternateContent>
+      <mc:AlternateContent xmlns:mc="http://schemas.openxmlformats.org/markup-compatibility/2006" xmlns:p14="http://schemas.microsoft.com/office/powerpoint/2010/main">
+        <mc:Choice Requires="p14">
+          <p:contentPart p14:bwMode="auto" r:id="rId11">
+            <p14:nvContentPartPr>
+              <p14:cNvPr id="38" name="Ink 37">
+                <a:extLst>
+                  <a:ext uri="{FF2B5EF4-FFF2-40B4-BE49-F238E27FC236}">
+                    <a16:creationId xmlns:a16="http://schemas.microsoft.com/office/drawing/2014/main" id="{A79F51BA-3326-A507-12C4-192D4C271309}"/>
+                  </a:ext>
+                </a:extLst>
+              </p14:cNvPr>
+              <p14:cNvContentPartPr/>
+              <p14:nvPr/>
+            </p14:nvContentPartPr>
+            <p14:xfrm>
+              <a:off x="1944090" y="1315872"/>
+              <a:ext cx="254520" cy="191160"/>
+            </p14:xfrm>
+          </p:contentPart>
+        </mc:Choice>
+        <mc:Fallback xmlns="">
+          <p:pic>
+            <p:nvPicPr>
+              <p:cNvPr id="38" name="Ink 37">
+                <a:extLst>
+                  <a:ext uri="{FF2B5EF4-FFF2-40B4-BE49-F238E27FC236}">
+                    <a16:creationId xmlns:a16="http://schemas.microsoft.com/office/drawing/2014/main" id="{A79F51BA-3326-A507-12C4-192D4C271309}"/>
+                  </a:ext>
+                </a:extLst>
+              </p:cNvPr>
+              <p:cNvPicPr/>
+              <p:nvPr/>
+            </p:nvPicPr>
+            <p:blipFill>
+              <a:blip r:embed="rId12"/>
+              <a:stretch>
+                <a:fillRect/>
+              </a:stretch>
+            </p:blipFill>
+            <p:spPr>
+              <a:xfrm>
+                <a:off x="1935450" y="1307232"/>
+                <a:ext cx="272160" cy="208800"/>
+              </a:xfrm>
+              <a:prstGeom prst="rect">
+                <a:avLst/>
+              </a:prstGeom>
+            </p:spPr>
+          </p:pic>
+        </mc:Fallback>
+      </mc:AlternateContent>
+      <mc:AlternateContent xmlns:mc="http://schemas.openxmlformats.org/markup-compatibility/2006" xmlns:p14="http://schemas.microsoft.com/office/powerpoint/2010/main">
+        <mc:Choice Requires="p14">
+          <p:contentPart p14:bwMode="auto" r:id="rId13">
+            <p14:nvContentPartPr>
+              <p14:cNvPr id="39" name="Ink 38">
+                <a:extLst>
+                  <a:ext uri="{FF2B5EF4-FFF2-40B4-BE49-F238E27FC236}">
+                    <a16:creationId xmlns:a16="http://schemas.microsoft.com/office/drawing/2014/main" id="{82F66382-2FF2-97A9-9C46-1FA7B4187E75}"/>
+                  </a:ext>
+                </a:extLst>
+              </p14:cNvPr>
+              <p14:cNvContentPartPr/>
+              <p14:nvPr/>
+            </p14:nvContentPartPr>
+            <p14:xfrm>
+              <a:off x="1020330" y="1086192"/>
+              <a:ext cx="1368000" cy="47880"/>
+            </p14:xfrm>
+          </p:contentPart>
+        </mc:Choice>
+        <mc:Fallback xmlns="">
+          <p:pic>
+            <p:nvPicPr>
+              <p:cNvPr id="39" name="Ink 38">
+                <a:extLst>
+                  <a:ext uri="{FF2B5EF4-FFF2-40B4-BE49-F238E27FC236}">
+                    <a16:creationId xmlns:a16="http://schemas.microsoft.com/office/drawing/2014/main" id="{82F66382-2FF2-97A9-9C46-1FA7B4187E75}"/>
+                  </a:ext>
+                </a:extLst>
+              </p:cNvPr>
+              <p:cNvPicPr/>
+              <p:nvPr/>
+            </p:nvPicPr>
+            <p:blipFill>
+              <a:blip r:embed="rId14"/>
+              <a:stretch>
+                <a:fillRect/>
+              </a:stretch>
+            </p:blipFill>
+            <p:spPr>
+              <a:xfrm>
+                <a:off x="1011330" y="1077552"/>
+                <a:ext cx="1385640" cy="65520"/>
+              </a:xfrm>
+              <a:prstGeom prst="rect">
+                <a:avLst/>
+              </a:prstGeom>
+            </p:spPr>
+          </p:pic>
+        </mc:Fallback>
+      </mc:AlternateContent>
+      <mc:AlternateContent xmlns:mc="http://schemas.openxmlformats.org/markup-compatibility/2006" xmlns:p14="http://schemas.microsoft.com/office/powerpoint/2010/main">
+        <mc:Choice Requires="p14">
+          <p:contentPart p14:bwMode="auto" r:id="rId15">
+            <p14:nvContentPartPr>
+              <p14:cNvPr id="40" name="Ink 39">
+                <a:extLst>
+                  <a:ext uri="{FF2B5EF4-FFF2-40B4-BE49-F238E27FC236}">
+                    <a16:creationId xmlns:a16="http://schemas.microsoft.com/office/drawing/2014/main" id="{A57A1A15-D466-0BFB-1BF6-1A067D9BC3C4}"/>
+                  </a:ext>
+                </a:extLst>
+              </p14:cNvPr>
+              <p14:cNvContentPartPr/>
+              <p14:nvPr/>
+            </p14:nvContentPartPr>
+            <p14:xfrm>
+              <a:off x="856530" y="833112"/>
+              <a:ext cx="702360" cy="1603080"/>
+            </p14:xfrm>
+          </p:contentPart>
+        </mc:Choice>
+        <mc:Fallback xmlns="">
+          <p:pic>
+            <p:nvPicPr>
+              <p:cNvPr id="40" name="Ink 39">
+                <a:extLst>
+                  <a:ext uri="{FF2B5EF4-FFF2-40B4-BE49-F238E27FC236}">
+                    <a16:creationId xmlns:a16="http://schemas.microsoft.com/office/drawing/2014/main" id="{A57A1A15-D466-0BFB-1BF6-1A067D9BC3C4}"/>
+                  </a:ext>
+                </a:extLst>
+              </p:cNvPr>
+              <p:cNvPicPr/>
+              <p:nvPr/>
+            </p:nvPicPr>
+            <p:blipFill>
+              <a:blip r:embed="rId16"/>
+              <a:stretch>
+                <a:fillRect/>
+              </a:stretch>
+            </p:blipFill>
+            <p:spPr>
+              <a:xfrm>
+                <a:off x="847890" y="824472"/>
+                <a:ext cx="720000" cy="1620720"/>
+              </a:xfrm>
+              <a:prstGeom prst="rect">
+                <a:avLst/>
+              </a:prstGeom>
+            </p:spPr>
+          </p:pic>
+        </mc:Fallback>
+      </mc:AlternateContent>
+      <mc:AlternateContent xmlns:mc="http://schemas.openxmlformats.org/markup-compatibility/2006" xmlns:p14="http://schemas.microsoft.com/office/powerpoint/2010/main">
+        <mc:Choice Requires="p14">
+          <p:contentPart p14:bwMode="auto" r:id="rId17">
+            <p14:nvContentPartPr>
+              <p14:cNvPr id="41" name="Ink 40">
+                <a:extLst>
+                  <a:ext uri="{FF2B5EF4-FFF2-40B4-BE49-F238E27FC236}">
+                    <a16:creationId xmlns:a16="http://schemas.microsoft.com/office/drawing/2014/main" id="{12A85F30-3651-CB89-8DB3-182B0BC77FB0}"/>
+                  </a:ext>
+                </a:extLst>
+              </p14:cNvPr>
+              <p14:cNvContentPartPr/>
+              <p14:nvPr/>
+            </p14:nvContentPartPr>
+            <p14:xfrm>
+              <a:off x="1868850" y="751392"/>
+              <a:ext cx="701640" cy="1689840"/>
+            </p14:xfrm>
+          </p:contentPart>
+        </mc:Choice>
+        <mc:Fallback xmlns="">
+          <p:pic>
+            <p:nvPicPr>
+              <p:cNvPr id="41" name="Ink 40">
+                <a:extLst>
+                  <a:ext uri="{FF2B5EF4-FFF2-40B4-BE49-F238E27FC236}">
+                    <a16:creationId xmlns:a16="http://schemas.microsoft.com/office/drawing/2014/main" id="{12A85F30-3651-CB89-8DB3-182B0BC77FB0}"/>
+                  </a:ext>
+                </a:extLst>
+              </p:cNvPr>
+              <p:cNvPicPr/>
+              <p:nvPr/>
+            </p:nvPicPr>
+            <p:blipFill>
+              <a:blip r:embed="rId18"/>
+              <a:stretch>
+                <a:fillRect/>
+              </a:stretch>
+            </p:blipFill>
+            <p:spPr>
+              <a:xfrm>
+                <a:off x="1859850" y="742752"/>
+                <a:ext cx="719280" cy="1707480"/>
+              </a:xfrm>
+              <a:prstGeom prst="rect">
+                <a:avLst/>
+              </a:prstGeom>
+            </p:spPr>
+          </p:pic>
+        </mc:Fallback>
+      </mc:AlternateContent>
+      <p:grpSp>
+        <p:nvGrpSpPr>
+          <p:cNvPr id="42" name="Group 41">
+            <a:extLst>
+              <a:ext uri="{FF2B5EF4-FFF2-40B4-BE49-F238E27FC236}">
+                <a16:creationId xmlns:a16="http://schemas.microsoft.com/office/drawing/2014/main" id="{3BAD35DF-E2E4-7A82-9271-085DB12E1786}"/>
+              </a:ext>
+            </a:extLst>
+          </p:cNvPr>
+          <p:cNvGrpSpPr/>
+          <p:nvPr/>
+        </p:nvGrpSpPr>
+        <p:grpSpPr>
+          <a:xfrm>
+            <a:off x="1549170" y="2476152"/>
+            <a:ext cx="402120" cy="359640"/>
+            <a:chOff x="3171528" y="4221216"/>
+            <a:chExt cx="402120" cy="359640"/>
+          </a:xfrm>
+        </p:grpSpPr>
+        <mc:AlternateContent xmlns:mc="http://schemas.openxmlformats.org/markup-compatibility/2006" xmlns:p14="http://schemas.microsoft.com/office/powerpoint/2010/main">
+          <mc:Choice Requires="p14">
+            <p:contentPart p14:bwMode="auto" r:id="rId19">
+              <p14:nvContentPartPr>
+                <p14:cNvPr id="43" name="Ink 42">
+                  <a:extLst>
+                    <a:ext uri="{FF2B5EF4-FFF2-40B4-BE49-F238E27FC236}">
+                      <a16:creationId xmlns:a16="http://schemas.microsoft.com/office/drawing/2014/main" id="{CEB6013F-78C1-0BB1-86C5-BB874AEF706A}"/>
+                    </a:ext>
+                  </a:extLst>
+                </p14:cNvPr>
+                <p14:cNvContentPartPr/>
+                <p14:nvPr/>
+              </p14:nvContentPartPr>
+              <p14:xfrm>
+                <a:off x="3171528" y="4221216"/>
+                <a:ext cx="402120" cy="253800"/>
+              </p14:xfrm>
+            </p:contentPart>
+          </mc:Choice>
+          <mc:Fallback xmlns="">
+            <p:pic>
+              <p:nvPicPr>
+                <p:cNvPr id="43" name="Ink 42">
+                  <a:extLst>
+                    <a:ext uri="{FF2B5EF4-FFF2-40B4-BE49-F238E27FC236}">
+                      <a16:creationId xmlns:a16="http://schemas.microsoft.com/office/drawing/2014/main" id="{CEB6013F-78C1-0BB1-86C5-BB874AEF706A}"/>
+                    </a:ext>
+                  </a:extLst>
+                </p:cNvPr>
+                <p:cNvPicPr/>
+                <p:nvPr/>
+              </p:nvPicPr>
+              <p:blipFill>
+                <a:blip r:embed="rId20"/>
+                <a:stretch>
+                  <a:fillRect/>
+                </a:stretch>
+              </p:blipFill>
+              <p:spPr>
+                <a:xfrm>
+                  <a:off x="3162888" y="4212576"/>
+                  <a:ext cx="419760" cy="271440"/>
+                </a:xfrm>
+                <a:prstGeom prst="rect">
+                  <a:avLst/>
+                </a:prstGeom>
+              </p:spPr>
+            </p:pic>
+          </mc:Fallback>
+        </mc:AlternateContent>
+        <mc:AlternateContent xmlns:mc="http://schemas.openxmlformats.org/markup-compatibility/2006" xmlns:p14="http://schemas.microsoft.com/office/powerpoint/2010/main">
+          <mc:Choice Requires="p14">
+            <p:contentPart p14:bwMode="auto" r:id="rId21">
+              <p14:nvContentPartPr>
+                <p14:cNvPr id="44" name="Ink 43">
+                  <a:extLst>
+                    <a:ext uri="{FF2B5EF4-FFF2-40B4-BE49-F238E27FC236}">
+                      <a16:creationId xmlns:a16="http://schemas.microsoft.com/office/drawing/2014/main" id="{F1DE1007-63D2-C03D-8AB9-BF4DF3E8468E}"/>
+                    </a:ext>
+                  </a:extLst>
+                </p14:cNvPr>
+                <p14:cNvContentPartPr/>
+                <p14:nvPr/>
+              </p14:nvContentPartPr>
+              <p14:xfrm>
+                <a:off x="3407328" y="4245696"/>
+                <a:ext cx="16920" cy="61920"/>
+              </p14:xfrm>
+            </p:contentPart>
+          </mc:Choice>
+          <mc:Fallback xmlns="">
+            <p:pic>
+              <p:nvPicPr>
+                <p:cNvPr id="44" name="Ink 43">
+                  <a:extLst>
+                    <a:ext uri="{FF2B5EF4-FFF2-40B4-BE49-F238E27FC236}">
+                      <a16:creationId xmlns:a16="http://schemas.microsoft.com/office/drawing/2014/main" id="{F1DE1007-63D2-C03D-8AB9-BF4DF3E8468E}"/>
+                    </a:ext>
+                  </a:extLst>
+                </p:cNvPr>
+                <p:cNvPicPr/>
+                <p:nvPr/>
+              </p:nvPicPr>
+              <p:blipFill>
+                <a:blip r:embed="rId22"/>
+                <a:stretch>
+                  <a:fillRect/>
+                </a:stretch>
+              </p:blipFill>
+              <p:spPr>
+                <a:xfrm>
+                  <a:off x="3398328" y="4237056"/>
+                  <a:ext cx="34560" cy="79560"/>
+                </a:xfrm>
+                <a:prstGeom prst="rect">
+                  <a:avLst/>
+                </a:prstGeom>
+              </p:spPr>
+            </p:pic>
+          </mc:Fallback>
+        </mc:AlternateContent>
+        <mc:AlternateContent xmlns:mc="http://schemas.openxmlformats.org/markup-compatibility/2006" xmlns:p14="http://schemas.microsoft.com/office/powerpoint/2010/main">
+          <mc:Choice Requires="p14">
+            <p:contentPart p14:bwMode="auto" r:id="rId23">
+              <p14:nvContentPartPr>
+                <p14:cNvPr id="45" name="Ink 44">
+                  <a:extLst>
+                    <a:ext uri="{FF2B5EF4-FFF2-40B4-BE49-F238E27FC236}">
+                      <a16:creationId xmlns:a16="http://schemas.microsoft.com/office/drawing/2014/main" id="{247DF4A5-DAA9-A9BB-032F-918A72794F15}"/>
+                    </a:ext>
+                  </a:extLst>
+                </p14:cNvPr>
+                <p14:cNvContentPartPr/>
+                <p14:nvPr/>
+              </p14:nvContentPartPr>
+              <p14:xfrm>
+                <a:off x="3303288" y="4395456"/>
+                <a:ext cx="7560" cy="174240"/>
+              </p14:xfrm>
+            </p:contentPart>
+          </mc:Choice>
+          <mc:Fallback xmlns="">
+            <p:pic>
+              <p:nvPicPr>
+                <p:cNvPr id="45" name="Ink 44">
+                  <a:extLst>
+                    <a:ext uri="{FF2B5EF4-FFF2-40B4-BE49-F238E27FC236}">
+                      <a16:creationId xmlns:a16="http://schemas.microsoft.com/office/drawing/2014/main" id="{247DF4A5-DAA9-A9BB-032F-918A72794F15}"/>
+                    </a:ext>
+                  </a:extLst>
+                </p:cNvPr>
+                <p:cNvPicPr/>
+                <p:nvPr/>
+              </p:nvPicPr>
+              <p:blipFill>
+                <a:blip r:embed="rId24"/>
+                <a:stretch>
+                  <a:fillRect/>
+                </a:stretch>
+              </p:blipFill>
+              <p:spPr>
+                <a:xfrm>
+                  <a:off x="3294288" y="4386816"/>
+                  <a:ext cx="25200" cy="191880"/>
+                </a:xfrm>
+                <a:prstGeom prst="rect">
+                  <a:avLst/>
+                </a:prstGeom>
+              </p:spPr>
+            </p:pic>
+          </mc:Fallback>
+        </mc:AlternateContent>
+        <mc:AlternateContent xmlns:mc="http://schemas.openxmlformats.org/markup-compatibility/2006" xmlns:p14="http://schemas.microsoft.com/office/powerpoint/2010/main">
+          <mc:Choice Requires="p14">
+            <p:contentPart p14:bwMode="auto" r:id="rId25">
+              <p14:nvContentPartPr>
+                <p14:cNvPr id="46" name="Ink 45">
+                  <a:extLst>
+                    <a:ext uri="{FF2B5EF4-FFF2-40B4-BE49-F238E27FC236}">
+                      <a16:creationId xmlns:a16="http://schemas.microsoft.com/office/drawing/2014/main" id="{8F4F8FD2-76F5-7C02-2C0B-9BB86F69956C}"/>
+                    </a:ext>
+                  </a:extLst>
+                </p14:cNvPr>
+                <p14:cNvContentPartPr/>
+                <p14:nvPr/>
+              </p14:nvContentPartPr>
+              <p14:xfrm>
+                <a:off x="3435048" y="4376736"/>
+                <a:ext cx="10080" cy="204120"/>
+              </p14:xfrm>
+            </p:contentPart>
+          </mc:Choice>
+          <mc:Fallback xmlns="">
+            <p:pic>
+              <p:nvPicPr>
+                <p:cNvPr id="46" name="Ink 45">
+                  <a:extLst>
+                    <a:ext uri="{FF2B5EF4-FFF2-40B4-BE49-F238E27FC236}">
+                      <a16:creationId xmlns:a16="http://schemas.microsoft.com/office/drawing/2014/main" id="{8F4F8FD2-76F5-7C02-2C0B-9BB86F69956C}"/>
+                    </a:ext>
+                  </a:extLst>
+                </p:cNvPr>
+                <p:cNvPicPr/>
+                <p:nvPr/>
+              </p:nvPicPr>
+              <p:blipFill>
+                <a:blip r:embed="rId26"/>
+                <a:stretch>
+                  <a:fillRect/>
+                </a:stretch>
+              </p:blipFill>
+              <p:spPr>
+                <a:xfrm>
+                  <a:off x="3426048" y="4367736"/>
+                  <a:ext cx="27720" cy="221760"/>
+                </a:xfrm>
+                <a:prstGeom prst="rect">
+                  <a:avLst/>
+                </a:prstGeom>
+              </p:spPr>
+            </p:pic>
+          </mc:Fallback>
+        </mc:AlternateContent>
+      </p:grpSp>
+      <mc:AlternateContent xmlns:mc="http://schemas.openxmlformats.org/markup-compatibility/2006" xmlns:p14="http://schemas.microsoft.com/office/powerpoint/2010/main">
+        <mc:Choice Requires="p14">
+          <p:contentPart p14:bwMode="auto" r:id="rId27">
+            <p14:nvContentPartPr>
+              <p14:cNvPr id="47" name="Ink 46">
+                <a:extLst>
+                  <a:ext uri="{FF2B5EF4-FFF2-40B4-BE49-F238E27FC236}">
+                    <a16:creationId xmlns:a16="http://schemas.microsoft.com/office/drawing/2014/main" id="{06D360CF-EFAB-FF77-EF91-CBF5921A87EC}"/>
+                  </a:ext>
+                </a:extLst>
+              </p14:cNvPr>
+              <p14:cNvContentPartPr/>
+              <p14:nvPr/>
+            </p14:nvContentPartPr>
+            <p14:xfrm>
+              <a:off x="863370" y="826632"/>
+              <a:ext cx="727560" cy="1551240"/>
+            </p14:xfrm>
+          </p:contentPart>
+        </mc:Choice>
+        <mc:Fallback xmlns="">
+          <p:pic>
+            <p:nvPicPr>
+              <p:cNvPr id="47" name="Ink 46">
+                <a:extLst>
+                  <a:ext uri="{FF2B5EF4-FFF2-40B4-BE49-F238E27FC236}">
+                    <a16:creationId xmlns:a16="http://schemas.microsoft.com/office/drawing/2014/main" id="{06D360CF-EFAB-FF77-EF91-CBF5921A87EC}"/>
+                  </a:ext>
+                </a:extLst>
+              </p:cNvPr>
+              <p:cNvPicPr/>
+              <p:nvPr/>
+            </p:nvPicPr>
+            <p:blipFill>
+              <a:blip r:embed="rId28"/>
+              <a:stretch>
+                <a:fillRect/>
+              </a:stretch>
+            </p:blipFill>
+            <p:spPr>
+              <a:xfrm>
+                <a:off x="854370" y="817632"/>
+                <a:ext cx="745200" cy="1568880"/>
+              </a:xfrm>
+              <a:prstGeom prst="rect">
+                <a:avLst/>
+              </a:prstGeom>
+            </p:spPr>
+          </p:pic>
+        </mc:Fallback>
+      </mc:AlternateContent>
+      <mc:AlternateContent xmlns:mc="http://schemas.openxmlformats.org/markup-compatibility/2006" xmlns:p14="http://schemas.microsoft.com/office/powerpoint/2010/main">
+        <mc:Choice Requires="p14">
+          <p:contentPart p14:bwMode="auto" r:id="rId29">
+            <p14:nvContentPartPr>
+              <p14:cNvPr id="48" name="Ink 47">
+                <a:extLst>
+                  <a:ext uri="{FF2B5EF4-FFF2-40B4-BE49-F238E27FC236}">
+                    <a16:creationId xmlns:a16="http://schemas.microsoft.com/office/drawing/2014/main" id="{BCAEF677-6885-0A34-DEC8-8C4D58F5ABF0}"/>
+                  </a:ext>
+                </a:extLst>
+              </p14:cNvPr>
+              <p14:cNvContentPartPr/>
+              <p14:nvPr/>
+            </p14:nvContentPartPr>
+            <p14:xfrm>
+              <a:off x="1874970" y="761472"/>
+              <a:ext cx="661680" cy="1649520"/>
+            </p14:xfrm>
+          </p:contentPart>
+        </mc:Choice>
+        <mc:Fallback xmlns="">
+          <p:pic>
+            <p:nvPicPr>
+              <p:cNvPr id="48" name="Ink 47">
+                <a:extLst>
+                  <a:ext uri="{FF2B5EF4-FFF2-40B4-BE49-F238E27FC236}">
+                    <a16:creationId xmlns:a16="http://schemas.microsoft.com/office/drawing/2014/main" id="{BCAEF677-6885-0A34-DEC8-8C4D58F5ABF0}"/>
+                  </a:ext>
+                </a:extLst>
+              </p:cNvPr>
+              <p:cNvPicPr/>
+              <p:nvPr/>
+            </p:nvPicPr>
+            <p:blipFill>
+              <a:blip r:embed="rId30"/>
+              <a:stretch>
+                <a:fillRect/>
+              </a:stretch>
+            </p:blipFill>
+            <p:spPr>
+              <a:xfrm>
+                <a:off x="1866330" y="752832"/>
+                <a:ext cx="679320" cy="1667160"/>
+              </a:xfrm>
+              <a:prstGeom prst="rect">
+                <a:avLst/>
+              </a:prstGeom>
+            </p:spPr>
+          </p:pic>
+        </mc:Fallback>
+      </mc:AlternateContent>
+      <p:grpSp>
+        <p:nvGrpSpPr>
+          <p:cNvPr id="49" name="Group 48">
+            <a:extLst>
+              <a:ext uri="{FF2B5EF4-FFF2-40B4-BE49-F238E27FC236}">
+                <a16:creationId xmlns:a16="http://schemas.microsoft.com/office/drawing/2014/main" id="{6684241A-39FD-3E13-DFF0-4AB0EABAD3E2}"/>
+              </a:ext>
+            </a:extLst>
+          </p:cNvPr>
+          <p:cNvGrpSpPr/>
+          <p:nvPr/>
+        </p:nvGrpSpPr>
+        <p:grpSpPr>
+          <a:xfrm>
+            <a:off x="1140570" y="1333512"/>
+            <a:ext cx="1173600" cy="798120"/>
+            <a:chOff x="2762928" y="3078576"/>
+            <a:chExt cx="1173600" cy="798120"/>
+          </a:xfrm>
+        </p:grpSpPr>
+        <mc:AlternateContent xmlns:mc="http://schemas.openxmlformats.org/markup-compatibility/2006" xmlns:p14="http://schemas.microsoft.com/office/powerpoint/2010/main">
+          <mc:Choice Requires="p14">
+            <p:contentPart p14:bwMode="auto" r:id="rId31">
+              <p14:nvContentPartPr>
+                <p14:cNvPr id="50" name="Ink 49">
+                  <a:extLst>
+                    <a:ext uri="{FF2B5EF4-FFF2-40B4-BE49-F238E27FC236}">
+                      <a16:creationId xmlns:a16="http://schemas.microsoft.com/office/drawing/2014/main" id="{DD997DBA-F1D5-E863-43F6-31DBF8A64647}"/>
+                    </a:ext>
+                  </a:extLst>
+                </p14:cNvPr>
+                <p14:cNvContentPartPr/>
+                <p14:nvPr/>
+              </p14:nvContentPartPr>
+              <p14:xfrm>
+                <a:off x="2878128" y="3846816"/>
+                <a:ext cx="39600" cy="360"/>
+              </p14:xfrm>
+            </p:contentPart>
+          </mc:Choice>
+          <mc:Fallback xmlns="">
+            <p:pic>
+              <p:nvPicPr>
+                <p:cNvPr id="50" name="Ink 49">
+                  <a:extLst>
+                    <a:ext uri="{FF2B5EF4-FFF2-40B4-BE49-F238E27FC236}">
+                      <a16:creationId xmlns:a16="http://schemas.microsoft.com/office/drawing/2014/main" id="{DD997DBA-F1D5-E863-43F6-31DBF8A64647}"/>
+                    </a:ext>
+                  </a:extLst>
+                </p:cNvPr>
+                <p:cNvPicPr/>
+                <p:nvPr/>
+              </p:nvPicPr>
+              <p:blipFill>
+                <a:blip r:embed="rId32"/>
+                <a:stretch>
+                  <a:fillRect/>
+                </a:stretch>
+              </p:blipFill>
+              <p:spPr>
+                <a:xfrm>
+                  <a:off x="2869488" y="3837816"/>
+                  <a:ext cx="57240" cy="18000"/>
+                </a:xfrm>
+                <a:prstGeom prst="rect">
+                  <a:avLst/>
+                </a:prstGeom>
+              </p:spPr>
+            </p:pic>
+          </mc:Fallback>
+        </mc:AlternateContent>
+        <mc:AlternateContent xmlns:mc="http://schemas.openxmlformats.org/markup-compatibility/2006" xmlns:p14="http://schemas.microsoft.com/office/powerpoint/2010/main">
+          <mc:Choice Requires="p14">
+            <p:contentPart p14:bwMode="auto" r:id="rId33">
+              <p14:nvContentPartPr>
+                <p14:cNvPr id="51" name="Ink 50">
+                  <a:extLst>
+                    <a:ext uri="{FF2B5EF4-FFF2-40B4-BE49-F238E27FC236}">
+                      <a16:creationId xmlns:a16="http://schemas.microsoft.com/office/drawing/2014/main" id="{C6E1CB31-606D-8DFE-53B3-6D6DBB82C499}"/>
+                    </a:ext>
+                  </a:extLst>
+                </p14:cNvPr>
+                <p14:cNvContentPartPr/>
+                <p14:nvPr/>
+              </p14:nvContentPartPr>
+              <p14:xfrm>
+                <a:off x="2806848" y="3527136"/>
+                <a:ext cx="9720" cy="360"/>
+              </p14:xfrm>
+            </p:contentPart>
+          </mc:Choice>
+          <mc:Fallback xmlns="">
+            <p:pic>
+              <p:nvPicPr>
+                <p:cNvPr id="51" name="Ink 50">
+                  <a:extLst>
+                    <a:ext uri="{FF2B5EF4-FFF2-40B4-BE49-F238E27FC236}">
+                      <a16:creationId xmlns:a16="http://schemas.microsoft.com/office/drawing/2014/main" id="{C6E1CB31-606D-8DFE-53B3-6D6DBB82C499}"/>
+                    </a:ext>
+                  </a:extLst>
+                </p:cNvPr>
+                <p:cNvPicPr/>
+                <p:nvPr/>
+              </p:nvPicPr>
+              <p:blipFill>
+                <a:blip r:embed="rId34"/>
+                <a:stretch>
+                  <a:fillRect/>
+                </a:stretch>
+              </p:blipFill>
+              <p:spPr>
+                <a:xfrm>
+                  <a:off x="2797848" y="3518136"/>
+                  <a:ext cx="27360" cy="18000"/>
+                </a:xfrm>
+                <a:prstGeom prst="rect">
+                  <a:avLst/>
+                </a:prstGeom>
+              </p:spPr>
+            </p:pic>
+          </mc:Fallback>
+        </mc:AlternateContent>
+        <mc:AlternateContent xmlns:mc="http://schemas.openxmlformats.org/markup-compatibility/2006" xmlns:p14="http://schemas.microsoft.com/office/powerpoint/2010/main">
+          <mc:Choice Requires="p14">
+            <p:contentPart p14:bwMode="auto" r:id="rId35">
+              <p14:nvContentPartPr>
+                <p14:cNvPr id="52" name="Ink 51">
+                  <a:extLst>
+                    <a:ext uri="{FF2B5EF4-FFF2-40B4-BE49-F238E27FC236}">
+                      <a16:creationId xmlns:a16="http://schemas.microsoft.com/office/drawing/2014/main" id="{7CD8CFB3-3F18-D588-D724-DED272785C34}"/>
+                    </a:ext>
+                  </a:extLst>
+                </p14:cNvPr>
+                <p14:cNvContentPartPr/>
+                <p14:nvPr/>
+              </p14:nvContentPartPr>
+              <p14:xfrm>
+                <a:off x="2762928" y="3168936"/>
+                <a:ext cx="360" cy="3600"/>
+              </p14:xfrm>
+            </p:contentPart>
+          </mc:Choice>
+          <mc:Fallback xmlns="">
+            <p:pic>
+              <p:nvPicPr>
+                <p:cNvPr id="52" name="Ink 51">
+                  <a:extLst>
+                    <a:ext uri="{FF2B5EF4-FFF2-40B4-BE49-F238E27FC236}">
+                      <a16:creationId xmlns:a16="http://schemas.microsoft.com/office/drawing/2014/main" id="{7CD8CFB3-3F18-D588-D724-DED272785C34}"/>
+                    </a:ext>
+                  </a:extLst>
+                </p:cNvPr>
+                <p:cNvPicPr/>
+                <p:nvPr/>
+              </p:nvPicPr>
+              <p:blipFill>
+                <a:blip r:embed="rId36"/>
+                <a:stretch>
+                  <a:fillRect/>
+                </a:stretch>
+              </p:blipFill>
+              <p:spPr>
+                <a:xfrm>
+                  <a:off x="2753928" y="3160296"/>
+                  <a:ext cx="18000" cy="21240"/>
+                </a:xfrm>
+                <a:prstGeom prst="rect">
+                  <a:avLst/>
+                </a:prstGeom>
+              </p:spPr>
+            </p:pic>
+          </mc:Fallback>
+        </mc:AlternateContent>
+        <mc:AlternateContent xmlns:mc="http://schemas.openxmlformats.org/markup-compatibility/2006" xmlns:p14="http://schemas.microsoft.com/office/powerpoint/2010/main">
+          <mc:Choice Requires="p14">
+            <p:contentPart p14:bwMode="auto" r:id="rId37">
+              <p14:nvContentPartPr>
+                <p14:cNvPr id="53" name="Ink 52">
+                  <a:extLst>
+                    <a:ext uri="{FF2B5EF4-FFF2-40B4-BE49-F238E27FC236}">
+                      <a16:creationId xmlns:a16="http://schemas.microsoft.com/office/drawing/2014/main" id="{CE916905-AD58-2B2E-A24E-BC310D47D746}"/>
+                    </a:ext>
+                  </a:extLst>
+                </p14:cNvPr>
+                <p14:cNvContentPartPr/>
+                <p14:nvPr/>
+              </p14:nvContentPartPr>
+              <p14:xfrm>
+                <a:off x="3206448" y="3791736"/>
+                <a:ext cx="9720" cy="12600"/>
+              </p14:xfrm>
+            </p:contentPart>
+          </mc:Choice>
+          <mc:Fallback xmlns="">
+            <p:pic>
+              <p:nvPicPr>
+                <p:cNvPr id="53" name="Ink 52">
+                  <a:extLst>
+                    <a:ext uri="{FF2B5EF4-FFF2-40B4-BE49-F238E27FC236}">
+                      <a16:creationId xmlns:a16="http://schemas.microsoft.com/office/drawing/2014/main" id="{CE916905-AD58-2B2E-A24E-BC310D47D746}"/>
+                    </a:ext>
+                  </a:extLst>
+                </p:cNvPr>
+                <p:cNvPicPr/>
+                <p:nvPr/>
+              </p:nvPicPr>
+              <p:blipFill>
+                <a:blip r:embed="rId38"/>
+                <a:stretch>
+                  <a:fillRect/>
+                </a:stretch>
+              </p:blipFill>
+              <p:spPr>
+                <a:xfrm>
+                  <a:off x="3197448" y="3782736"/>
+                  <a:ext cx="27360" cy="30240"/>
+                </a:xfrm>
+                <a:prstGeom prst="rect">
+                  <a:avLst/>
+                </a:prstGeom>
+              </p:spPr>
+            </p:pic>
+          </mc:Fallback>
+        </mc:AlternateContent>
+        <mc:AlternateContent xmlns:mc="http://schemas.openxmlformats.org/markup-compatibility/2006" xmlns:p14="http://schemas.microsoft.com/office/powerpoint/2010/main">
+          <mc:Choice Requires="p14">
+            <p:contentPart p14:bwMode="auto" r:id="rId39">
+              <p14:nvContentPartPr>
+                <p14:cNvPr id="54" name="Ink 53">
+                  <a:extLst>
+                    <a:ext uri="{FF2B5EF4-FFF2-40B4-BE49-F238E27FC236}">
+                      <a16:creationId xmlns:a16="http://schemas.microsoft.com/office/drawing/2014/main" id="{9C20CD27-41CA-71F1-5E8A-63DE4D4CC0FB}"/>
+                    </a:ext>
+                  </a:extLst>
+                </p14:cNvPr>
+                <p14:cNvContentPartPr/>
+                <p14:nvPr/>
+              </p14:nvContentPartPr>
+              <p14:xfrm>
+                <a:off x="3324168" y="3412656"/>
+                <a:ext cx="5040" cy="12600"/>
+              </p14:xfrm>
+            </p:contentPart>
+          </mc:Choice>
+          <mc:Fallback xmlns="">
+            <p:pic>
+              <p:nvPicPr>
+                <p:cNvPr id="54" name="Ink 53">
+                  <a:extLst>
+                    <a:ext uri="{FF2B5EF4-FFF2-40B4-BE49-F238E27FC236}">
+                      <a16:creationId xmlns:a16="http://schemas.microsoft.com/office/drawing/2014/main" id="{9C20CD27-41CA-71F1-5E8A-63DE4D4CC0FB}"/>
+                    </a:ext>
+                  </a:extLst>
+                </p:cNvPr>
+                <p:cNvPicPr/>
+                <p:nvPr/>
+              </p:nvPicPr>
+              <p:blipFill>
+                <a:blip r:embed="rId40"/>
+                <a:stretch>
+                  <a:fillRect/>
+                </a:stretch>
+              </p:blipFill>
+              <p:spPr>
+                <a:xfrm>
+                  <a:off x="3315168" y="3403656"/>
+                  <a:ext cx="22680" cy="30240"/>
+                </a:xfrm>
+                <a:prstGeom prst="rect">
+                  <a:avLst/>
+                </a:prstGeom>
+              </p:spPr>
+            </p:pic>
+          </mc:Fallback>
+        </mc:AlternateContent>
+        <mc:AlternateContent xmlns:mc="http://schemas.openxmlformats.org/markup-compatibility/2006" xmlns:p14="http://schemas.microsoft.com/office/powerpoint/2010/main">
+          <mc:Choice Requires="p14">
+            <p:contentPart p14:bwMode="auto" r:id="rId41">
+              <p14:nvContentPartPr>
+                <p14:cNvPr id="55" name="Ink 54">
+                  <a:extLst>
+                    <a:ext uri="{FF2B5EF4-FFF2-40B4-BE49-F238E27FC236}">
+                      <a16:creationId xmlns:a16="http://schemas.microsoft.com/office/drawing/2014/main" id="{5E14FDE3-8BE8-8A4D-7D8A-81F4AE8EE156}"/>
+                    </a:ext>
+                  </a:extLst>
+                </p14:cNvPr>
+                <p14:cNvContentPartPr/>
+                <p14:nvPr/>
+              </p14:nvContentPartPr>
+              <p14:xfrm>
+                <a:off x="3136968" y="3479616"/>
+                <a:ext cx="5040" cy="360"/>
+              </p14:xfrm>
+            </p:contentPart>
+          </mc:Choice>
+          <mc:Fallback xmlns="">
+            <p:pic>
+              <p:nvPicPr>
+                <p:cNvPr id="55" name="Ink 54">
+                  <a:extLst>
+                    <a:ext uri="{FF2B5EF4-FFF2-40B4-BE49-F238E27FC236}">
+                      <a16:creationId xmlns:a16="http://schemas.microsoft.com/office/drawing/2014/main" id="{5E14FDE3-8BE8-8A4D-7D8A-81F4AE8EE156}"/>
+                    </a:ext>
+                  </a:extLst>
+                </p:cNvPr>
+                <p:cNvPicPr/>
+                <p:nvPr/>
+              </p:nvPicPr>
+              <p:blipFill>
+                <a:blip r:embed="rId42"/>
+                <a:stretch>
+                  <a:fillRect/>
+                </a:stretch>
+              </p:blipFill>
+              <p:spPr>
+                <a:xfrm>
+                  <a:off x="3128328" y="3470976"/>
+                  <a:ext cx="22680" cy="18000"/>
+                </a:xfrm>
+                <a:prstGeom prst="rect">
+                  <a:avLst/>
+                </a:prstGeom>
+              </p:spPr>
+            </p:pic>
+          </mc:Fallback>
+        </mc:AlternateContent>
+        <mc:AlternateContent xmlns:mc="http://schemas.openxmlformats.org/markup-compatibility/2006" xmlns:p14="http://schemas.microsoft.com/office/powerpoint/2010/main">
+          <mc:Choice Requires="p14">
+            <p:contentPart p14:bwMode="auto" r:id="rId43">
+              <p14:nvContentPartPr>
+                <p14:cNvPr id="56" name="Ink 55">
+                  <a:extLst>
+                    <a:ext uri="{FF2B5EF4-FFF2-40B4-BE49-F238E27FC236}">
+                      <a16:creationId xmlns:a16="http://schemas.microsoft.com/office/drawing/2014/main" id="{2B981195-B925-131A-1677-18626DF1348C}"/>
+                    </a:ext>
+                  </a:extLst>
+                </p14:cNvPr>
+                <p14:cNvContentPartPr/>
+                <p14:nvPr/>
+              </p14:nvContentPartPr>
+              <p14:xfrm>
+                <a:off x="3053808" y="3103776"/>
+                <a:ext cx="5040" cy="360"/>
+              </p14:xfrm>
+            </p:contentPart>
+          </mc:Choice>
+          <mc:Fallback xmlns="">
+            <p:pic>
+              <p:nvPicPr>
+                <p:cNvPr id="56" name="Ink 55">
+                  <a:extLst>
+                    <a:ext uri="{FF2B5EF4-FFF2-40B4-BE49-F238E27FC236}">
+                      <a16:creationId xmlns:a16="http://schemas.microsoft.com/office/drawing/2014/main" id="{2B981195-B925-131A-1677-18626DF1348C}"/>
+                    </a:ext>
+                  </a:extLst>
+                </p:cNvPr>
+                <p:cNvPicPr/>
+                <p:nvPr/>
+              </p:nvPicPr>
+              <p:blipFill>
+                <a:blip r:embed="rId42"/>
+                <a:stretch>
+                  <a:fillRect/>
+                </a:stretch>
+              </p:blipFill>
+              <p:spPr>
+                <a:xfrm>
+                  <a:off x="3045168" y="3095136"/>
+                  <a:ext cx="22680" cy="18000"/>
+                </a:xfrm>
+                <a:prstGeom prst="rect">
+                  <a:avLst/>
+                </a:prstGeom>
+              </p:spPr>
+            </p:pic>
+          </mc:Fallback>
+        </mc:AlternateContent>
+        <mc:AlternateContent xmlns:mc="http://schemas.openxmlformats.org/markup-compatibility/2006" xmlns:p14="http://schemas.microsoft.com/office/powerpoint/2010/main">
+          <mc:Choice Requires="p14">
+            <p:contentPart p14:bwMode="auto" r:id="rId44">
+              <p14:nvContentPartPr>
+                <p14:cNvPr id="57" name="Ink 56">
+                  <a:extLst>
+                    <a:ext uri="{FF2B5EF4-FFF2-40B4-BE49-F238E27FC236}">
+                      <a16:creationId xmlns:a16="http://schemas.microsoft.com/office/drawing/2014/main" id="{88B76A82-5804-8047-90AF-0D66BC5A9CD5}"/>
+                    </a:ext>
+                  </a:extLst>
+                </p14:cNvPr>
+                <p14:cNvContentPartPr/>
+                <p14:nvPr/>
+              </p14:nvContentPartPr>
+              <p14:xfrm>
+                <a:off x="3360888" y="3078576"/>
+                <a:ext cx="360" cy="360"/>
+              </p14:xfrm>
+            </p:contentPart>
+          </mc:Choice>
+          <mc:Fallback xmlns="">
+            <p:pic>
+              <p:nvPicPr>
+                <p:cNvPr id="57" name="Ink 56">
+                  <a:extLst>
+                    <a:ext uri="{FF2B5EF4-FFF2-40B4-BE49-F238E27FC236}">
+                      <a16:creationId xmlns:a16="http://schemas.microsoft.com/office/drawing/2014/main" id="{88B76A82-5804-8047-90AF-0D66BC5A9CD5}"/>
+                    </a:ext>
+                  </a:extLst>
+                </p:cNvPr>
+                <p:cNvPicPr/>
+                <p:nvPr/>
+              </p:nvPicPr>
+              <p:blipFill>
+                <a:blip r:embed="rId45"/>
+                <a:stretch>
+                  <a:fillRect/>
+                </a:stretch>
+              </p:blipFill>
+              <p:spPr>
+                <a:xfrm>
+                  <a:off x="3352248" y="3069936"/>
+                  <a:ext cx="18000" cy="18000"/>
+                </a:xfrm>
+                <a:prstGeom prst="rect">
+                  <a:avLst/>
+                </a:prstGeom>
+              </p:spPr>
+            </p:pic>
+          </mc:Fallback>
+        </mc:AlternateContent>
+        <mc:AlternateContent xmlns:mc="http://schemas.openxmlformats.org/markup-compatibility/2006" xmlns:p14="http://schemas.microsoft.com/office/powerpoint/2010/main">
+          <mc:Choice Requires="p14">
+            <p:contentPart p14:bwMode="auto" r:id="rId46">
+              <p14:nvContentPartPr>
+                <p14:cNvPr id="58" name="Ink 57">
+                  <a:extLst>
+                    <a:ext uri="{FF2B5EF4-FFF2-40B4-BE49-F238E27FC236}">
+                      <a16:creationId xmlns:a16="http://schemas.microsoft.com/office/drawing/2014/main" id="{2E5620E4-3765-D63F-B3FD-92E876F46C69}"/>
+                    </a:ext>
+                  </a:extLst>
+                </p14:cNvPr>
+                <p14:cNvContentPartPr/>
+                <p14:nvPr/>
+              </p14:nvContentPartPr>
+              <p14:xfrm>
+                <a:off x="3899088" y="3872016"/>
+                <a:ext cx="360" cy="4680"/>
+              </p14:xfrm>
+            </p:contentPart>
+          </mc:Choice>
+          <mc:Fallback xmlns="">
+            <p:pic>
+              <p:nvPicPr>
+                <p:cNvPr id="58" name="Ink 57">
+                  <a:extLst>
+                    <a:ext uri="{FF2B5EF4-FFF2-40B4-BE49-F238E27FC236}">
+                      <a16:creationId xmlns:a16="http://schemas.microsoft.com/office/drawing/2014/main" id="{2E5620E4-3765-D63F-B3FD-92E876F46C69}"/>
+                    </a:ext>
+                  </a:extLst>
+                </p:cNvPr>
+                <p:cNvPicPr/>
+                <p:nvPr/>
+              </p:nvPicPr>
+              <p:blipFill>
+                <a:blip r:embed="rId47"/>
+                <a:stretch>
+                  <a:fillRect/>
+                </a:stretch>
+              </p:blipFill>
+              <p:spPr>
+                <a:xfrm>
+                  <a:off x="3890448" y="3863376"/>
+                  <a:ext cx="18000" cy="22320"/>
+                </a:xfrm>
+                <a:prstGeom prst="rect">
+                  <a:avLst/>
+                </a:prstGeom>
+              </p:spPr>
+            </p:pic>
+          </mc:Fallback>
+        </mc:AlternateContent>
+        <mc:AlternateContent xmlns:mc="http://schemas.openxmlformats.org/markup-compatibility/2006" xmlns:p14="http://schemas.microsoft.com/office/powerpoint/2010/main">
+          <mc:Choice Requires="p14">
+            <p:contentPart p14:bwMode="auto" r:id="rId48">
+              <p14:nvContentPartPr>
+                <p14:cNvPr id="59" name="Ink 58">
+                  <a:extLst>
+                    <a:ext uri="{FF2B5EF4-FFF2-40B4-BE49-F238E27FC236}">
+                      <a16:creationId xmlns:a16="http://schemas.microsoft.com/office/drawing/2014/main" id="{2FFB6181-D64C-B9DF-70EF-FED94F2EFEEA}"/>
+                    </a:ext>
+                  </a:extLst>
+                </p14:cNvPr>
+                <p14:cNvContentPartPr/>
+                <p14:nvPr/>
+              </p14:nvContentPartPr>
+              <p14:xfrm>
+                <a:off x="3753648" y="3594456"/>
+                <a:ext cx="11880" cy="360"/>
+              </p14:xfrm>
+            </p:contentPart>
+          </mc:Choice>
+          <mc:Fallback xmlns="">
+            <p:pic>
+              <p:nvPicPr>
+                <p:cNvPr id="59" name="Ink 58">
+                  <a:extLst>
+                    <a:ext uri="{FF2B5EF4-FFF2-40B4-BE49-F238E27FC236}">
+                      <a16:creationId xmlns:a16="http://schemas.microsoft.com/office/drawing/2014/main" id="{2FFB6181-D64C-B9DF-70EF-FED94F2EFEEA}"/>
+                    </a:ext>
+                  </a:extLst>
+                </p:cNvPr>
+                <p:cNvPicPr/>
+                <p:nvPr/>
+              </p:nvPicPr>
+              <p:blipFill>
+                <a:blip r:embed="rId49"/>
+                <a:stretch>
+                  <a:fillRect/>
+                </a:stretch>
+              </p:blipFill>
+              <p:spPr>
+                <a:xfrm>
+                  <a:off x="3745008" y="3585456"/>
+                  <a:ext cx="29520" cy="18000"/>
+                </a:xfrm>
+                <a:prstGeom prst="rect">
+                  <a:avLst/>
+                </a:prstGeom>
+              </p:spPr>
+            </p:pic>
+          </mc:Fallback>
+        </mc:AlternateContent>
+        <mc:AlternateContent xmlns:mc="http://schemas.openxmlformats.org/markup-compatibility/2006" xmlns:p14="http://schemas.microsoft.com/office/powerpoint/2010/main">
+          <mc:Choice Requires="p14">
+            <p:contentPart p14:bwMode="auto" r:id="rId50">
+              <p14:nvContentPartPr>
+                <p14:cNvPr id="60" name="Ink 59">
+                  <a:extLst>
+                    <a:ext uri="{FF2B5EF4-FFF2-40B4-BE49-F238E27FC236}">
+                      <a16:creationId xmlns:a16="http://schemas.microsoft.com/office/drawing/2014/main" id="{241275C1-E308-6715-A3CF-E78D2C4A6947}"/>
+                    </a:ext>
+                  </a:extLst>
+                </p14:cNvPr>
+                <p14:cNvContentPartPr/>
+                <p14:nvPr/>
+              </p14:nvContentPartPr>
+              <p14:xfrm>
+                <a:off x="3689208" y="3742056"/>
+                <a:ext cx="5040" cy="6840"/>
+              </p14:xfrm>
+            </p:contentPart>
+          </mc:Choice>
+          <mc:Fallback xmlns="">
+            <p:pic>
+              <p:nvPicPr>
+                <p:cNvPr id="60" name="Ink 59">
+                  <a:extLst>
+                    <a:ext uri="{FF2B5EF4-FFF2-40B4-BE49-F238E27FC236}">
+                      <a16:creationId xmlns:a16="http://schemas.microsoft.com/office/drawing/2014/main" id="{241275C1-E308-6715-A3CF-E78D2C4A6947}"/>
+                    </a:ext>
+                  </a:extLst>
+                </p:cNvPr>
+                <p:cNvPicPr/>
+                <p:nvPr/>
+              </p:nvPicPr>
+              <p:blipFill>
+                <a:blip r:embed="rId51"/>
+                <a:stretch>
+                  <a:fillRect/>
+                </a:stretch>
+              </p:blipFill>
+              <p:spPr>
+                <a:xfrm>
+                  <a:off x="3680208" y="3733056"/>
+                  <a:ext cx="22680" cy="24480"/>
+                </a:xfrm>
+                <a:prstGeom prst="rect">
+                  <a:avLst/>
+                </a:prstGeom>
+              </p:spPr>
+            </p:pic>
+          </mc:Fallback>
+        </mc:AlternateContent>
+        <mc:AlternateContent xmlns:mc="http://schemas.openxmlformats.org/markup-compatibility/2006" xmlns:p14="http://schemas.microsoft.com/office/powerpoint/2010/main">
+          <mc:Choice Requires="p14">
+            <p:contentPart p14:bwMode="auto" r:id="rId52">
+              <p14:nvContentPartPr>
+                <p14:cNvPr id="61" name="Ink 60">
+                  <a:extLst>
+                    <a:ext uri="{FF2B5EF4-FFF2-40B4-BE49-F238E27FC236}">
+                      <a16:creationId xmlns:a16="http://schemas.microsoft.com/office/drawing/2014/main" id="{68E64CDD-4B88-055D-BC36-44AE3FC6419C}"/>
+                    </a:ext>
+                  </a:extLst>
+                </p14:cNvPr>
+                <p14:cNvContentPartPr/>
+                <p14:nvPr/>
+              </p14:nvContentPartPr>
+              <p14:xfrm>
+                <a:off x="3936168" y="3389256"/>
+                <a:ext cx="360" cy="360"/>
+              </p14:xfrm>
+            </p:contentPart>
+          </mc:Choice>
+          <mc:Fallback xmlns="">
+            <p:pic>
+              <p:nvPicPr>
+                <p:cNvPr id="61" name="Ink 60">
+                  <a:extLst>
+                    <a:ext uri="{FF2B5EF4-FFF2-40B4-BE49-F238E27FC236}">
+                      <a16:creationId xmlns:a16="http://schemas.microsoft.com/office/drawing/2014/main" id="{68E64CDD-4B88-055D-BC36-44AE3FC6419C}"/>
+                    </a:ext>
+                  </a:extLst>
+                </p:cNvPr>
+                <p:cNvPicPr/>
+                <p:nvPr/>
+              </p:nvPicPr>
+              <p:blipFill>
+                <a:blip r:embed="rId45"/>
+                <a:stretch>
+                  <a:fillRect/>
+                </a:stretch>
+              </p:blipFill>
+              <p:spPr>
+                <a:xfrm>
+                  <a:off x="3927528" y="3380616"/>
+                  <a:ext cx="18000" cy="18000"/>
+                </a:xfrm>
+                <a:prstGeom prst="rect">
+                  <a:avLst/>
+                </a:prstGeom>
+              </p:spPr>
+            </p:pic>
+          </mc:Fallback>
+        </mc:AlternateContent>
+        <mc:AlternateContent xmlns:mc="http://schemas.openxmlformats.org/markup-compatibility/2006" xmlns:p14="http://schemas.microsoft.com/office/powerpoint/2010/main">
+          <mc:Choice Requires="p14">
+            <p:contentPart p14:bwMode="auto" r:id="rId53">
+              <p14:nvContentPartPr>
+                <p14:cNvPr id="62" name="Ink 61">
+                  <a:extLst>
+                    <a:ext uri="{FF2B5EF4-FFF2-40B4-BE49-F238E27FC236}">
+                      <a16:creationId xmlns:a16="http://schemas.microsoft.com/office/drawing/2014/main" id="{482DFB2A-390F-D390-2B8F-24D84C2EE75C}"/>
+                    </a:ext>
+                  </a:extLst>
+                </p14:cNvPr>
+                <p14:cNvContentPartPr/>
+                <p14:nvPr/>
+              </p14:nvContentPartPr>
+              <p14:xfrm>
+                <a:off x="3467448" y="3667176"/>
+                <a:ext cx="9720" cy="360"/>
+              </p14:xfrm>
+            </p:contentPart>
+          </mc:Choice>
+          <mc:Fallback xmlns="">
+            <p:pic>
+              <p:nvPicPr>
+                <p:cNvPr id="62" name="Ink 61">
+                  <a:extLst>
+                    <a:ext uri="{FF2B5EF4-FFF2-40B4-BE49-F238E27FC236}">
+                      <a16:creationId xmlns:a16="http://schemas.microsoft.com/office/drawing/2014/main" id="{482DFB2A-390F-D390-2B8F-24D84C2EE75C}"/>
+                    </a:ext>
+                  </a:extLst>
+                </p:cNvPr>
+                <p:cNvPicPr/>
+                <p:nvPr/>
+              </p:nvPicPr>
+              <p:blipFill>
+                <a:blip r:embed="rId34"/>
+                <a:stretch>
+                  <a:fillRect/>
+                </a:stretch>
+              </p:blipFill>
+              <p:spPr>
+                <a:xfrm>
+                  <a:off x="3458448" y="3658176"/>
+                  <a:ext cx="27360" cy="18000"/>
+                </a:xfrm>
+                <a:prstGeom prst="rect">
+                  <a:avLst/>
+                </a:prstGeom>
+              </p:spPr>
+            </p:pic>
+          </mc:Fallback>
+        </mc:AlternateContent>
+      </p:grpSp>
+      <mc:AlternateContent xmlns:mc="http://schemas.openxmlformats.org/markup-compatibility/2006" xmlns:p14="http://schemas.microsoft.com/office/powerpoint/2010/main">
+        <mc:Choice Requires="p14">
+          <p:contentPart p14:bwMode="auto" r:id="rId54">
+            <p14:nvContentPartPr>
+              <p14:cNvPr id="63" name="Ink 62">
+                <a:extLst>
+                  <a:ext uri="{FF2B5EF4-FFF2-40B4-BE49-F238E27FC236}">
+                    <a16:creationId xmlns:a16="http://schemas.microsoft.com/office/drawing/2014/main" id="{A35E8040-7E34-9129-5BAC-E9A22B3EA06E}"/>
+                  </a:ext>
+                </a:extLst>
+              </p14:cNvPr>
+              <p14:cNvContentPartPr/>
+              <p14:nvPr/>
+            </p14:nvContentPartPr>
+            <p14:xfrm>
+              <a:off x="1274490" y="1588032"/>
+              <a:ext cx="18720" cy="360"/>
+            </p14:xfrm>
+          </p:contentPart>
+        </mc:Choice>
+        <mc:Fallback xmlns="">
+          <p:pic>
+            <p:nvPicPr>
+              <p:cNvPr id="63" name="Ink 62">
+                <a:extLst>
+                  <a:ext uri="{FF2B5EF4-FFF2-40B4-BE49-F238E27FC236}">
+                    <a16:creationId xmlns:a16="http://schemas.microsoft.com/office/drawing/2014/main" id="{A35E8040-7E34-9129-5BAC-E9A22B3EA06E}"/>
+                  </a:ext>
+                </a:extLst>
+              </p:cNvPr>
+              <p:cNvPicPr/>
+              <p:nvPr/>
+            </p:nvPicPr>
+            <p:blipFill>
+              <a:blip r:embed="rId55"/>
+              <a:stretch>
+                <a:fillRect/>
+              </a:stretch>
+            </p:blipFill>
+            <p:spPr>
+              <a:xfrm>
+                <a:off x="1265490" y="1579392"/>
+                <a:ext cx="36360" cy="18000"/>
+              </a:xfrm>
+              <a:prstGeom prst="rect">
+                <a:avLst/>
+              </a:prstGeom>
+            </p:spPr>
+          </p:pic>
+        </mc:Fallback>
+      </mc:AlternateContent>
+      <mc:AlternateContent xmlns:mc="http://schemas.openxmlformats.org/markup-compatibility/2006" xmlns:p14="http://schemas.microsoft.com/office/powerpoint/2010/main">
+        <mc:Choice Requires="p14">
+          <p:contentPart p14:bwMode="auto" r:id="rId56">
+            <p14:nvContentPartPr>
+              <p14:cNvPr id="64" name="Ink 63">
+                <a:extLst>
+                  <a:ext uri="{FF2B5EF4-FFF2-40B4-BE49-F238E27FC236}">
+                    <a16:creationId xmlns:a16="http://schemas.microsoft.com/office/drawing/2014/main" id="{485CD1AD-326E-F456-D65B-CB0FA7074F23}"/>
+                  </a:ext>
+                </a:extLst>
+              </p14:cNvPr>
+              <p14:cNvContentPartPr/>
+              <p14:nvPr/>
+            </p14:nvContentPartPr>
+            <p14:xfrm>
+              <a:off x="1657890" y="1498752"/>
+              <a:ext cx="360" cy="360"/>
+            </p14:xfrm>
+          </p:contentPart>
+        </mc:Choice>
+        <mc:Fallback xmlns="">
+          <p:pic>
+            <p:nvPicPr>
+              <p:cNvPr id="64" name="Ink 63">
+                <a:extLst>
+                  <a:ext uri="{FF2B5EF4-FFF2-40B4-BE49-F238E27FC236}">
+                    <a16:creationId xmlns:a16="http://schemas.microsoft.com/office/drawing/2014/main" id="{485CD1AD-326E-F456-D65B-CB0FA7074F23}"/>
+                  </a:ext>
+                </a:extLst>
+              </p:cNvPr>
+              <p:cNvPicPr/>
+              <p:nvPr/>
+            </p:nvPicPr>
+            <p:blipFill>
+              <a:blip r:embed="rId57"/>
+              <a:stretch>
+                <a:fillRect/>
+              </a:stretch>
+            </p:blipFill>
+            <p:spPr>
+              <a:xfrm>
+                <a:off x="1648890" y="1490112"/>
+                <a:ext cx="18000" cy="18000"/>
+              </a:xfrm>
+              <a:prstGeom prst="rect">
+                <a:avLst/>
+              </a:prstGeom>
+            </p:spPr>
+          </p:pic>
+        </mc:Fallback>
+      </mc:AlternateContent>
+      <mc:AlternateContent xmlns:mc="http://schemas.openxmlformats.org/markup-compatibility/2006" xmlns:p14="http://schemas.microsoft.com/office/powerpoint/2010/main">
+        <mc:Choice Requires="p14">
+          <p:contentPart p14:bwMode="auto" r:id="rId58">
+            <p14:nvContentPartPr>
+              <p14:cNvPr id="65" name="Ink 64">
+                <a:extLst>
+                  <a:ext uri="{FF2B5EF4-FFF2-40B4-BE49-F238E27FC236}">
+                    <a16:creationId xmlns:a16="http://schemas.microsoft.com/office/drawing/2014/main" id="{A4019843-BD62-75D8-40B3-755A554A07AE}"/>
+                  </a:ext>
+                </a:extLst>
+              </p14:cNvPr>
+              <p14:cNvContentPartPr/>
+              <p14:nvPr/>
+            </p14:nvContentPartPr>
+            <p14:xfrm>
+              <a:off x="1667250" y="1878912"/>
+              <a:ext cx="6120" cy="360"/>
+            </p14:xfrm>
+          </p:contentPart>
+        </mc:Choice>
+        <mc:Fallback xmlns="">
+          <p:pic>
+            <p:nvPicPr>
+              <p:cNvPr id="65" name="Ink 64">
+                <a:extLst>
+                  <a:ext uri="{FF2B5EF4-FFF2-40B4-BE49-F238E27FC236}">
+                    <a16:creationId xmlns:a16="http://schemas.microsoft.com/office/drawing/2014/main" id="{A4019843-BD62-75D8-40B3-755A554A07AE}"/>
+                  </a:ext>
+                </a:extLst>
+              </p:cNvPr>
+              <p:cNvPicPr/>
+              <p:nvPr/>
+            </p:nvPicPr>
+            <p:blipFill>
+              <a:blip r:embed="rId59"/>
+              <a:stretch>
+                <a:fillRect/>
+              </a:stretch>
+            </p:blipFill>
+            <p:spPr>
+              <a:xfrm>
+                <a:off x="1658250" y="1870272"/>
+                <a:ext cx="23760" cy="18000"/>
+              </a:xfrm>
+              <a:prstGeom prst="rect">
+                <a:avLst/>
+              </a:prstGeom>
+            </p:spPr>
+          </p:pic>
+        </mc:Fallback>
+      </mc:AlternateContent>
+      <mc:AlternateContent xmlns:mc="http://schemas.openxmlformats.org/markup-compatibility/2006" xmlns:p14="http://schemas.microsoft.com/office/powerpoint/2010/main">
+        <mc:Choice Requires="p14">
+          <p:contentPart p14:bwMode="auto" r:id="rId60">
+            <p14:nvContentPartPr>
+              <p14:cNvPr id="66" name="Ink 65">
+                <a:extLst>
+                  <a:ext uri="{FF2B5EF4-FFF2-40B4-BE49-F238E27FC236}">
+                    <a16:creationId xmlns:a16="http://schemas.microsoft.com/office/drawing/2014/main" id="{E51FB828-67E8-28A7-FB3F-BEC7DB7F4C9B}"/>
+                  </a:ext>
+                </a:extLst>
+              </p14:cNvPr>
+              <p14:cNvContentPartPr/>
+              <p14:nvPr/>
+            </p14:nvContentPartPr>
+            <p14:xfrm>
+              <a:off x="1362330" y="1945152"/>
+              <a:ext cx="7200" cy="1440"/>
+            </p14:xfrm>
+          </p:contentPart>
+        </mc:Choice>
+        <mc:Fallback xmlns="">
+          <p:pic>
+            <p:nvPicPr>
+              <p:cNvPr id="66" name="Ink 65">
+                <a:extLst>
+                  <a:ext uri="{FF2B5EF4-FFF2-40B4-BE49-F238E27FC236}">
+                    <a16:creationId xmlns:a16="http://schemas.microsoft.com/office/drawing/2014/main" id="{E51FB828-67E8-28A7-FB3F-BEC7DB7F4C9B}"/>
+                  </a:ext>
+                </a:extLst>
+              </p:cNvPr>
+              <p:cNvPicPr/>
+              <p:nvPr/>
+            </p:nvPicPr>
+            <p:blipFill>
+              <a:blip r:embed="rId61"/>
+              <a:stretch>
+                <a:fillRect/>
+              </a:stretch>
+            </p:blipFill>
+            <p:spPr>
+              <a:xfrm>
+                <a:off x="1353330" y="1936152"/>
+                <a:ext cx="24840" cy="19080"/>
+              </a:xfrm>
+              <a:prstGeom prst="rect">
+                <a:avLst/>
+              </a:prstGeom>
+            </p:spPr>
+          </p:pic>
+        </mc:Fallback>
+      </mc:AlternateContent>
+      <mc:AlternateContent xmlns:mc="http://schemas.openxmlformats.org/markup-compatibility/2006" xmlns:p14="http://schemas.microsoft.com/office/powerpoint/2010/main">
+        <mc:Choice Requires="p14">
+          <p:contentPart p14:bwMode="auto" r:id="rId62">
+            <p14:nvContentPartPr>
+              <p14:cNvPr id="67" name="Ink 66">
+                <a:extLst>
+                  <a:ext uri="{FF2B5EF4-FFF2-40B4-BE49-F238E27FC236}">
+                    <a16:creationId xmlns:a16="http://schemas.microsoft.com/office/drawing/2014/main" id="{AA1BE36D-2686-3F8B-6440-A4D6021FABAD}"/>
+                  </a:ext>
+                </a:extLst>
+              </p14:cNvPr>
+              <p14:cNvContentPartPr/>
+              <p14:nvPr/>
+            </p14:nvContentPartPr>
+            <p14:xfrm>
+              <a:off x="1889010" y="2167632"/>
+              <a:ext cx="5040" cy="21240"/>
+            </p14:xfrm>
+          </p:contentPart>
+        </mc:Choice>
+        <mc:Fallback xmlns="">
+          <p:pic>
+            <p:nvPicPr>
+              <p:cNvPr id="67" name="Ink 66">
+                <a:extLst>
+                  <a:ext uri="{FF2B5EF4-FFF2-40B4-BE49-F238E27FC236}">
+                    <a16:creationId xmlns:a16="http://schemas.microsoft.com/office/drawing/2014/main" id="{AA1BE36D-2686-3F8B-6440-A4D6021FABAD}"/>
+                  </a:ext>
+                </a:extLst>
+              </p:cNvPr>
+              <p:cNvPicPr/>
+              <p:nvPr/>
+            </p:nvPicPr>
+            <p:blipFill>
+              <a:blip r:embed="rId63"/>
+              <a:stretch>
+                <a:fillRect/>
+              </a:stretch>
+            </p:blipFill>
+            <p:spPr>
+              <a:xfrm>
+                <a:off x="1880010" y="2158992"/>
+                <a:ext cx="22680" cy="38880"/>
+              </a:xfrm>
+              <a:prstGeom prst="rect">
+                <a:avLst/>
+              </a:prstGeom>
+            </p:spPr>
+          </p:pic>
+        </mc:Fallback>
+      </mc:AlternateContent>
+      <p:grpSp>
+        <p:nvGrpSpPr>
+          <p:cNvPr id="68" name="Group 67">
+            <a:extLst>
+              <a:ext uri="{FF2B5EF4-FFF2-40B4-BE49-F238E27FC236}">
+                <a16:creationId xmlns:a16="http://schemas.microsoft.com/office/drawing/2014/main" id="{C9457D91-C268-398D-179A-B68F8D967ADB}"/>
+              </a:ext>
+            </a:extLst>
+          </p:cNvPr>
+          <p:cNvGrpSpPr/>
+          <p:nvPr/>
+        </p:nvGrpSpPr>
+        <p:grpSpPr>
+          <a:xfrm>
+            <a:off x="2015730" y="1561752"/>
+            <a:ext cx="203760" cy="143640"/>
+            <a:chOff x="3638088" y="3306816"/>
+            <a:chExt cx="203760" cy="143640"/>
+          </a:xfrm>
+        </p:grpSpPr>
+        <mc:AlternateContent xmlns:mc="http://schemas.openxmlformats.org/markup-compatibility/2006" xmlns:p14="http://schemas.microsoft.com/office/powerpoint/2010/main">
+          <mc:Choice Requires="p14">
+            <p:contentPart p14:bwMode="auto" r:id="rId64">
+              <p14:nvContentPartPr>
+                <p14:cNvPr id="69" name="Ink 68">
+                  <a:extLst>
+                    <a:ext uri="{FF2B5EF4-FFF2-40B4-BE49-F238E27FC236}">
+                      <a16:creationId xmlns:a16="http://schemas.microsoft.com/office/drawing/2014/main" id="{473A9C48-6149-CCD5-F538-7AA3A419FFED}"/>
+                    </a:ext>
+                  </a:extLst>
+                </p14:cNvPr>
+                <p14:cNvContentPartPr/>
+                <p14:nvPr/>
+              </p14:nvContentPartPr>
+              <p14:xfrm>
+                <a:off x="3638088" y="3449016"/>
+                <a:ext cx="2520" cy="1440"/>
+              </p14:xfrm>
+            </p:contentPart>
+          </mc:Choice>
+          <mc:Fallback xmlns="">
+            <p:pic>
+              <p:nvPicPr>
+                <p:cNvPr id="69" name="Ink 68">
+                  <a:extLst>
+                    <a:ext uri="{FF2B5EF4-FFF2-40B4-BE49-F238E27FC236}">
+                      <a16:creationId xmlns:a16="http://schemas.microsoft.com/office/drawing/2014/main" id="{473A9C48-6149-CCD5-F538-7AA3A419FFED}"/>
+                    </a:ext>
+                  </a:extLst>
+                </p:cNvPr>
+                <p:cNvPicPr/>
+                <p:nvPr/>
+              </p:nvPicPr>
+              <p:blipFill>
+                <a:blip r:embed="rId65"/>
+                <a:stretch>
+                  <a:fillRect/>
+                </a:stretch>
+              </p:blipFill>
+              <p:spPr>
+                <a:xfrm>
+                  <a:off x="3629448" y="3440016"/>
+                  <a:ext cx="20160" cy="19080"/>
+                </a:xfrm>
+                <a:prstGeom prst="rect">
+                  <a:avLst/>
+                </a:prstGeom>
+              </p:spPr>
+            </p:pic>
+          </mc:Fallback>
+        </mc:AlternateContent>
+        <mc:AlternateContent xmlns:mc="http://schemas.openxmlformats.org/markup-compatibility/2006" xmlns:p14="http://schemas.microsoft.com/office/powerpoint/2010/main">
+          <mc:Choice Requires="p14">
+            <p:contentPart p14:bwMode="auto" r:id="rId66">
+              <p14:nvContentPartPr>
+                <p14:cNvPr id="70" name="Ink 69">
+                  <a:extLst>
+                    <a:ext uri="{FF2B5EF4-FFF2-40B4-BE49-F238E27FC236}">
+                      <a16:creationId xmlns:a16="http://schemas.microsoft.com/office/drawing/2014/main" id="{2F612256-638F-6B59-545E-FCBCDA2F4576}"/>
+                    </a:ext>
+                  </a:extLst>
+                </p14:cNvPr>
+                <p14:cNvContentPartPr/>
+                <p14:nvPr/>
+              </p14:nvContentPartPr>
+              <p14:xfrm>
+                <a:off x="3841488" y="3306816"/>
+                <a:ext cx="360" cy="7920"/>
+              </p14:xfrm>
+            </p:contentPart>
+          </mc:Choice>
+          <mc:Fallback xmlns="">
+            <p:pic>
+              <p:nvPicPr>
+                <p:cNvPr id="70" name="Ink 69">
+                  <a:extLst>
+                    <a:ext uri="{FF2B5EF4-FFF2-40B4-BE49-F238E27FC236}">
+                      <a16:creationId xmlns:a16="http://schemas.microsoft.com/office/drawing/2014/main" id="{2F612256-638F-6B59-545E-FCBCDA2F4576}"/>
+                    </a:ext>
+                  </a:extLst>
+                </p:cNvPr>
+                <p:cNvPicPr/>
+                <p:nvPr/>
+              </p:nvPicPr>
+              <p:blipFill>
+                <a:blip r:embed="rId67"/>
+                <a:stretch>
+                  <a:fillRect/>
+                </a:stretch>
+              </p:blipFill>
+              <p:spPr>
+                <a:xfrm>
+                  <a:off x="3832848" y="3297816"/>
+                  <a:ext cx="18000" cy="25560"/>
+                </a:xfrm>
+                <a:prstGeom prst="rect">
+                  <a:avLst/>
+                </a:prstGeom>
+              </p:spPr>
+            </p:pic>
+          </mc:Fallback>
+        </mc:AlternateContent>
+      </p:grpSp>
+      <mc:AlternateContent xmlns:mc="http://schemas.openxmlformats.org/markup-compatibility/2006" xmlns:p14="http://schemas.microsoft.com/office/powerpoint/2010/main">
+        <mc:Choice Requires="p14">
+          <p:contentPart p14:bwMode="auto" r:id="rId68">
+            <p14:nvContentPartPr>
+              <p14:cNvPr id="71" name="Ink 70">
+                <a:extLst>
+                  <a:ext uri="{FF2B5EF4-FFF2-40B4-BE49-F238E27FC236}">
+                    <a16:creationId xmlns:a16="http://schemas.microsoft.com/office/drawing/2014/main" id="{0BB902BC-A5E4-0DCA-1F33-A103D1E30D55}"/>
+                  </a:ext>
+                </a:extLst>
+              </p14:cNvPr>
+              <p14:cNvContentPartPr/>
+              <p14:nvPr/>
+            </p14:nvContentPartPr>
+            <p14:xfrm>
+              <a:off x="2300130" y="1253232"/>
+              <a:ext cx="7200" cy="10440"/>
+            </p14:xfrm>
+          </p:contentPart>
+        </mc:Choice>
+        <mc:Fallback xmlns="">
+          <p:pic>
+            <p:nvPicPr>
+              <p:cNvPr id="71" name="Ink 70">
+                <a:extLst>
+                  <a:ext uri="{FF2B5EF4-FFF2-40B4-BE49-F238E27FC236}">
+                    <a16:creationId xmlns:a16="http://schemas.microsoft.com/office/drawing/2014/main" id="{0BB902BC-A5E4-0DCA-1F33-A103D1E30D55}"/>
+                  </a:ext>
+                </a:extLst>
+              </p:cNvPr>
+              <p:cNvPicPr/>
+              <p:nvPr/>
+            </p:nvPicPr>
+            <p:blipFill>
+              <a:blip r:embed="rId69"/>
+              <a:stretch>
+                <a:fillRect/>
+              </a:stretch>
+            </p:blipFill>
+            <p:spPr>
+              <a:xfrm>
+                <a:off x="2291130" y="1244232"/>
+                <a:ext cx="24840" cy="28080"/>
+              </a:xfrm>
+              <a:prstGeom prst="rect">
+                <a:avLst/>
+              </a:prstGeom>
+            </p:spPr>
+          </p:pic>
+        </mc:Fallback>
+      </mc:AlternateContent>
+      <mc:AlternateContent xmlns:mc="http://schemas.openxmlformats.org/markup-compatibility/2006" xmlns:p14="http://schemas.microsoft.com/office/powerpoint/2010/main">
+        <mc:Choice Requires="p14">
+          <p:contentPart p14:bwMode="auto" r:id="rId70">
+            <p14:nvContentPartPr>
+              <p14:cNvPr id="72" name="Ink 71">
+                <a:extLst>
+                  <a:ext uri="{FF2B5EF4-FFF2-40B4-BE49-F238E27FC236}">
+                    <a16:creationId xmlns:a16="http://schemas.microsoft.com/office/drawing/2014/main" id="{1295C1AE-9054-38C4-EE50-E25A1A0E6081}"/>
+                  </a:ext>
+                </a:extLst>
+              </p14:cNvPr>
+              <p14:cNvContentPartPr/>
+              <p14:nvPr/>
+            </p14:nvContentPartPr>
+            <p14:xfrm>
+              <a:off x="1981170" y="587592"/>
+              <a:ext cx="104760" cy="348480"/>
+            </p14:xfrm>
+          </p:contentPart>
+        </mc:Choice>
+        <mc:Fallback xmlns="">
+          <p:pic>
+            <p:nvPicPr>
+              <p:cNvPr id="72" name="Ink 71">
+                <a:extLst>
+                  <a:ext uri="{FF2B5EF4-FFF2-40B4-BE49-F238E27FC236}">
+                    <a16:creationId xmlns:a16="http://schemas.microsoft.com/office/drawing/2014/main" id="{1295C1AE-9054-38C4-EE50-E25A1A0E6081}"/>
+                  </a:ext>
+                </a:extLst>
+              </p:cNvPr>
+              <p:cNvPicPr/>
+              <p:nvPr/>
+            </p:nvPicPr>
+            <p:blipFill>
+              <a:blip r:embed="rId71"/>
+              <a:stretch>
+                <a:fillRect/>
+              </a:stretch>
+            </p:blipFill>
+            <p:spPr>
+              <a:xfrm>
+                <a:off x="1972530" y="578592"/>
+                <a:ext cx="122400" cy="366120"/>
+              </a:xfrm>
+              <a:prstGeom prst="rect">
+                <a:avLst/>
+              </a:prstGeom>
+            </p:spPr>
+          </p:pic>
+        </mc:Fallback>
+      </mc:AlternateContent>
+      <mc:AlternateContent xmlns:mc="http://schemas.openxmlformats.org/markup-compatibility/2006" xmlns:p14="http://schemas.microsoft.com/office/powerpoint/2010/main">
+        <mc:Choice Requires="p14">
+          <p:contentPart p14:bwMode="auto" r:id="rId72">
+            <p14:nvContentPartPr>
+              <p14:cNvPr id="73" name="Ink 72">
+                <a:extLst>
+                  <a:ext uri="{FF2B5EF4-FFF2-40B4-BE49-F238E27FC236}">
+                    <a16:creationId xmlns:a16="http://schemas.microsoft.com/office/drawing/2014/main" id="{9CC5D360-F5BA-D371-E80A-E2E3C852FEF9}"/>
+                  </a:ext>
+                </a:extLst>
+              </p14:cNvPr>
+              <p14:cNvContentPartPr/>
+              <p14:nvPr/>
+            </p14:nvContentPartPr>
+            <p14:xfrm>
+              <a:off x="1108170" y="633672"/>
+              <a:ext cx="95400" cy="262800"/>
+            </p14:xfrm>
+          </p:contentPart>
+        </mc:Choice>
+        <mc:Fallback xmlns="">
+          <p:pic>
+            <p:nvPicPr>
+              <p:cNvPr id="73" name="Ink 72">
+                <a:extLst>
+                  <a:ext uri="{FF2B5EF4-FFF2-40B4-BE49-F238E27FC236}">
+                    <a16:creationId xmlns:a16="http://schemas.microsoft.com/office/drawing/2014/main" id="{9CC5D360-F5BA-D371-E80A-E2E3C852FEF9}"/>
+                  </a:ext>
+                </a:extLst>
+              </p:cNvPr>
+              <p:cNvPicPr/>
+              <p:nvPr/>
+            </p:nvPicPr>
+            <p:blipFill>
+              <a:blip r:embed="rId73"/>
+              <a:stretch>
+                <a:fillRect/>
+              </a:stretch>
+            </p:blipFill>
+            <p:spPr>
+              <a:xfrm>
+                <a:off x="1099170" y="625032"/>
+                <a:ext cx="113040" cy="280440"/>
+              </a:xfrm>
+              <a:prstGeom prst="rect">
+                <a:avLst/>
+              </a:prstGeom>
+            </p:spPr>
+          </p:pic>
+        </mc:Fallback>
+      </mc:AlternateContent>
+      <mc:AlternateContent xmlns:mc="http://schemas.openxmlformats.org/markup-compatibility/2006" xmlns:p14="http://schemas.microsoft.com/office/powerpoint/2010/main">
+        <mc:Choice Requires="p14">
+          <p:contentPart p14:bwMode="auto" r:id="rId74">
+            <p14:nvContentPartPr>
+              <p14:cNvPr id="74" name="Ink 73">
+                <a:extLst>
+                  <a:ext uri="{FF2B5EF4-FFF2-40B4-BE49-F238E27FC236}">
+                    <a16:creationId xmlns:a16="http://schemas.microsoft.com/office/drawing/2014/main" id="{12A6C593-2125-22E8-9FFE-E04EBDF51186}"/>
+                  </a:ext>
+                </a:extLst>
+              </p14:cNvPr>
+              <p14:cNvContentPartPr/>
+              <p14:nvPr/>
+            </p14:nvContentPartPr>
+            <p14:xfrm>
+              <a:off x="1617570" y="359352"/>
+              <a:ext cx="42840" cy="303480"/>
+            </p14:xfrm>
+          </p:contentPart>
+        </mc:Choice>
+        <mc:Fallback xmlns="">
+          <p:pic>
+            <p:nvPicPr>
+              <p:cNvPr id="74" name="Ink 73">
+                <a:extLst>
+                  <a:ext uri="{FF2B5EF4-FFF2-40B4-BE49-F238E27FC236}">
+                    <a16:creationId xmlns:a16="http://schemas.microsoft.com/office/drawing/2014/main" id="{12A6C593-2125-22E8-9FFE-E04EBDF51186}"/>
+                  </a:ext>
+                </a:extLst>
+              </p:cNvPr>
+              <p:cNvPicPr/>
+              <p:nvPr/>
+            </p:nvPicPr>
+            <p:blipFill>
+              <a:blip r:embed="rId75"/>
+              <a:stretch>
+                <a:fillRect/>
+              </a:stretch>
+            </p:blipFill>
+            <p:spPr>
+              <a:xfrm>
+                <a:off x="1608570" y="350712"/>
+                <a:ext cx="60480" cy="321120"/>
+              </a:xfrm>
+              <a:prstGeom prst="rect">
+                <a:avLst/>
+              </a:prstGeom>
+            </p:spPr>
+          </p:pic>
+        </mc:Fallback>
+      </mc:AlternateContent>
+      <p:sp>
+        <p:nvSpPr>
+          <p:cNvPr id="104" name="TextBox 103">
+            <a:extLst>
+              <a:ext uri="{FF2B5EF4-FFF2-40B4-BE49-F238E27FC236}">
+                <a16:creationId xmlns:a16="http://schemas.microsoft.com/office/drawing/2014/main" id="{3B2234AE-A2A9-DB5F-21C5-1320BD300FE9}"/>
+              </a:ext>
+            </a:extLst>
+          </p:cNvPr>
+          <p:cNvSpPr txBox="1"/>
+          <p:nvPr/>
+        </p:nvSpPr>
+        <p:spPr>
+          <a:xfrm>
+            <a:off x="3247564" y="467352"/>
+            <a:ext cx="3713444" cy="2308324"/>
+          </a:xfrm>
+          <a:prstGeom prst="rect">
+            <a:avLst/>
+          </a:prstGeom>
+          <a:noFill/>
+        </p:spPr>
+        <p:txBody>
+          <a:bodyPr wrap="square" rtlCol="0">
+            <a:spAutoFit/>
+          </a:bodyPr>
+          <a:lstStyle/>
+          <a:p>
+            <a:r>
+              <a:rPr lang="da-DK" dirty="0"/>
+              <a:t>Independent variable </a:t>
+            </a:r>
+            <a:r>
+              <a:rPr lang="da-DK" dirty="0">
+                <a:sym typeface="Wingdings" panose="05000000000000000000" pitchFamily="2" charset="2"/>
+              </a:rPr>
+              <a:t> time</a:t>
+            </a:r>
+          </a:p>
+          <a:p>
+            <a:r>
+              <a:rPr lang="da-DK" dirty="0">
+                <a:sym typeface="Wingdings" panose="05000000000000000000" pitchFamily="2" charset="2"/>
+              </a:rPr>
+              <a:t>Dependent variable  </a:t>
+            </a:r>
+            <a:r>
+              <a:rPr lang="da-DK" dirty="0" err="1">
+                <a:sym typeface="Wingdings" panose="05000000000000000000" pitchFamily="2" charset="2"/>
+              </a:rPr>
+              <a:t>Many</a:t>
+            </a:r>
+            <a:r>
+              <a:rPr lang="da-DK" dirty="0">
+                <a:sym typeface="Wingdings" panose="05000000000000000000" pitchFamily="2" charset="2"/>
+              </a:rPr>
+              <a:t>! (but </a:t>
+            </a:r>
+            <a:r>
+              <a:rPr lang="da-DK" dirty="0" err="1">
+                <a:sym typeface="Wingdings" panose="05000000000000000000" pitchFamily="2" charset="2"/>
+              </a:rPr>
+              <a:t>we</a:t>
+            </a:r>
+            <a:r>
+              <a:rPr lang="da-DK" dirty="0">
+                <a:sym typeface="Wingdings" panose="05000000000000000000" pitchFamily="2" charset="2"/>
+              </a:rPr>
+              <a:t> </a:t>
+            </a:r>
+            <a:r>
+              <a:rPr lang="da-DK" dirty="0" err="1">
+                <a:sym typeface="Wingdings" panose="05000000000000000000" pitchFamily="2" charset="2"/>
+              </a:rPr>
+              <a:t>are</a:t>
+            </a:r>
+            <a:r>
+              <a:rPr lang="da-DK" dirty="0">
+                <a:sym typeface="Wingdings" panose="05000000000000000000" pitchFamily="2" charset="2"/>
+              </a:rPr>
+              <a:t> </a:t>
+            </a:r>
+            <a:r>
+              <a:rPr lang="da-DK" dirty="0" err="1">
+                <a:sym typeface="Wingdings" panose="05000000000000000000" pitchFamily="2" charset="2"/>
+              </a:rPr>
+              <a:t>interested</a:t>
+            </a:r>
+            <a:r>
+              <a:rPr lang="da-DK" dirty="0">
+                <a:sym typeface="Wingdings" panose="05000000000000000000" pitchFamily="2" charset="2"/>
+              </a:rPr>
+              <a:t> in ”heat removed” from the system (</a:t>
+            </a:r>
+            <a:r>
+              <a:rPr lang="da-DK" dirty="0" err="1">
+                <a:sym typeface="Wingdings" panose="05000000000000000000" pitchFamily="2" charset="2"/>
+              </a:rPr>
+              <a:t>which</a:t>
+            </a:r>
+            <a:r>
+              <a:rPr lang="da-DK" dirty="0">
+                <a:sym typeface="Wingdings" panose="05000000000000000000" pitchFamily="2" charset="2"/>
+              </a:rPr>
+              <a:t> </a:t>
+            </a:r>
+            <a:r>
+              <a:rPr lang="da-DK" dirty="0" err="1">
+                <a:sym typeface="Wingdings" panose="05000000000000000000" pitchFamily="2" charset="2"/>
+              </a:rPr>
+              <a:t>depends</a:t>
+            </a:r>
+            <a:r>
+              <a:rPr lang="da-DK" dirty="0">
+                <a:sym typeface="Wingdings" panose="05000000000000000000" pitchFamily="2" charset="2"/>
+              </a:rPr>
+              <a:t> on </a:t>
+            </a:r>
+            <a:r>
+              <a:rPr lang="da-DK" dirty="0" err="1">
+                <a:sym typeface="Wingdings" panose="05000000000000000000" pitchFamily="2" charset="2"/>
+              </a:rPr>
+              <a:t>other</a:t>
+            </a:r>
+            <a:r>
+              <a:rPr lang="da-DK" dirty="0">
+                <a:sym typeface="Wingdings" panose="05000000000000000000" pitchFamily="2" charset="2"/>
+              </a:rPr>
+              <a:t> time dependent variables)</a:t>
+            </a:r>
+          </a:p>
+          <a:p>
+            <a:r>
+              <a:rPr lang="da-DK" dirty="0">
+                <a:sym typeface="Wingdings" panose="05000000000000000000" pitchFamily="2" charset="2"/>
+              </a:rPr>
+              <a:t>Or </a:t>
+            </a:r>
+            <a:r>
+              <a:rPr lang="da-DK" dirty="0" err="1">
+                <a:sym typeface="Wingdings" panose="05000000000000000000" pitchFamily="2" charset="2"/>
+              </a:rPr>
+              <a:t>are</a:t>
+            </a:r>
+            <a:r>
+              <a:rPr lang="da-DK" dirty="0">
+                <a:sym typeface="Wingdings" panose="05000000000000000000" pitchFamily="2" charset="2"/>
+              </a:rPr>
+              <a:t> </a:t>
+            </a:r>
+            <a:r>
+              <a:rPr lang="da-DK" dirty="0" err="1">
+                <a:sym typeface="Wingdings" panose="05000000000000000000" pitchFamily="2" charset="2"/>
+              </a:rPr>
+              <a:t>we</a:t>
+            </a:r>
+            <a:r>
+              <a:rPr lang="da-DK" dirty="0">
+                <a:sym typeface="Wingdings" panose="05000000000000000000" pitchFamily="2" charset="2"/>
+              </a:rPr>
+              <a:t> </a:t>
+            </a:r>
+            <a:r>
+              <a:rPr lang="da-DK" dirty="0" err="1">
+                <a:sym typeface="Wingdings" panose="05000000000000000000" pitchFamily="2" charset="2"/>
+              </a:rPr>
+              <a:t>interested</a:t>
+            </a:r>
+            <a:r>
+              <a:rPr lang="da-DK" dirty="0">
+                <a:sym typeface="Wingdings" panose="05000000000000000000" pitchFamily="2" charset="2"/>
+              </a:rPr>
+              <a:t> in </a:t>
+            </a:r>
+            <a:r>
+              <a:rPr lang="da-DK" dirty="0" err="1">
+                <a:sym typeface="Wingdings" panose="05000000000000000000" pitchFamily="2" charset="2"/>
+              </a:rPr>
+              <a:t>temperature</a:t>
+            </a:r>
+            <a:r>
+              <a:rPr lang="da-DK" dirty="0">
+                <a:sym typeface="Wingdings" panose="05000000000000000000" pitchFamily="2" charset="2"/>
+              </a:rPr>
+              <a:t> of the system?</a:t>
+            </a:r>
+          </a:p>
+          <a:p>
+            <a:r>
+              <a:rPr lang="da-DK" dirty="0" err="1">
+                <a:sym typeface="Wingdings" panose="05000000000000000000" pitchFamily="2" charset="2"/>
+              </a:rPr>
+              <a:t>Boundary</a:t>
+            </a:r>
+            <a:r>
+              <a:rPr lang="da-DK" dirty="0">
+                <a:sym typeface="Wingdings" panose="05000000000000000000" pitchFamily="2" charset="2"/>
+              </a:rPr>
+              <a:t> of system to model?</a:t>
+            </a:r>
+            <a:endParaRPr lang="da-DK" dirty="0"/>
+          </a:p>
+        </p:txBody>
+      </p:sp>
+      <p:sp>
+        <p:nvSpPr>
+          <p:cNvPr id="105" name="Rectangle 104">
+            <a:extLst>
+              <a:ext uri="{FF2B5EF4-FFF2-40B4-BE49-F238E27FC236}">
+                <a16:creationId xmlns:a16="http://schemas.microsoft.com/office/drawing/2014/main" id="{A7B5C972-5281-A5EC-064D-3C67BE670CD0}"/>
+              </a:ext>
+            </a:extLst>
+          </p:cNvPr>
+          <p:cNvSpPr/>
+          <p:nvPr/>
+        </p:nvSpPr>
+        <p:spPr>
+          <a:xfrm>
+            <a:off x="1020330" y="1086192"/>
+            <a:ext cx="1367554" cy="1227544"/>
+          </a:xfrm>
+          <a:prstGeom prst="rect">
+            <a:avLst/>
+          </a:prstGeom>
+          <a:noFill/>
+          <a:ln>
+            <a:solidFill>
+              <a:srgbClr val="FF0000"/>
+            </a:solidFill>
+            <a:prstDash val="dash"/>
+          </a:ln>
+        </p:spPr>
+        <p:style>
+          <a:lnRef idx="2">
+            <a:schemeClr val="accent1">
+              <a:shade val="15000"/>
+            </a:schemeClr>
+          </a:lnRef>
+          <a:fillRef idx="1">
+            <a:schemeClr val="accent1"/>
+          </a:fillRef>
+          <a:effectRef idx="0">
+            <a:schemeClr val="accent1"/>
+          </a:effectRef>
+          <a:fontRef idx="minor">
+            <a:schemeClr val="lt1"/>
+          </a:fontRef>
+        </p:style>
+        <p:txBody>
+          <a:bodyPr rtlCol="0" anchor="ctr"/>
+          <a:lstStyle/>
+          <a:p>
+            <a:pPr algn="ctr"/>
+            <a:endParaRPr lang="da-DK"/>
+          </a:p>
+        </p:txBody>
+      </p:sp>
+      <mc:AlternateContent xmlns:mc="http://schemas.openxmlformats.org/markup-compatibility/2006" xmlns:p14="http://schemas.microsoft.com/office/powerpoint/2010/main">
+        <mc:Choice Requires="p14">
+          <p:contentPart p14:bwMode="auto" r:id="rId76">
+            <p14:nvContentPartPr>
+              <p14:cNvPr id="107" name="Ink 106">
+                <a:extLst>
+                  <a:ext uri="{FF2B5EF4-FFF2-40B4-BE49-F238E27FC236}">
+                    <a16:creationId xmlns:a16="http://schemas.microsoft.com/office/drawing/2014/main" id="{4AF853B9-85CA-E0F3-E3BD-56DDA6DC7F82}"/>
+                  </a:ext>
+                </a:extLst>
+              </p14:cNvPr>
+              <p14:cNvContentPartPr/>
+              <p14:nvPr/>
+            </p14:nvContentPartPr>
+            <p14:xfrm>
+              <a:off x="2414736" y="2018304"/>
+              <a:ext cx="720720" cy="194400"/>
+            </p14:xfrm>
+          </p:contentPart>
+        </mc:Choice>
+        <mc:Fallback xmlns="">
+          <p:pic>
+            <p:nvPicPr>
+              <p:cNvPr id="107" name="Ink 106">
+                <a:extLst>
+                  <a:ext uri="{FF2B5EF4-FFF2-40B4-BE49-F238E27FC236}">
+                    <a16:creationId xmlns:a16="http://schemas.microsoft.com/office/drawing/2014/main" id="{4AF853B9-85CA-E0F3-E3BD-56DDA6DC7F82}"/>
+                  </a:ext>
+                </a:extLst>
+              </p:cNvPr>
+              <p:cNvPicPr/>
+              <p:nvPr/>
+            </p:nvPicPr>
+            <p:blipFill>
+              <a:blip r:embed="rId77"/>
+              <a:stretch>
+                <a:fillRect/>
+              </a:stretch>
+            </p:blipFill>
+            <p:spPr>
+              <a:xfrm>
+                <a:off x="2406096" y="2009304"/>
+                <a:ext cx="738360" cy="212040"/>
+              </a:xfrm>
+              <a:prstGeom prst="rect">
+                <a:avLst/>
+              </a:prstGeom>
+            </p:spPr>
+          </p:pic>
+        </mc:Fallback>
+      </mc:AlternateContent>
+      <mc:AlternateContent xmlns:mc="http://schemas.openxmlformats.org/markup-compatibility/2006" xmlns:p14="http://schemas.microsoft.com/office/powerpoint/2010/main">
+        <mc:Choice Requires="p14">
+          <p:contentPart p14:bwMode="auto" r:id="rId78">
+            <p14:nvContentPartPr>
+              <p14:cNvPr id="114" name="Ink 113">
+                <a:extLst>
+                  <a:ext uri="{FF2B5EF4-FFF2-40B4-BE49-F238E27FC236}">
+                    <a16:creationId xmlns:a16="http://schemas.microsoft.com/office/drawing/2014/main" id="{CEABFDDE-09F0-D43F-C215-491778C1C60D}"/>
+                  </a:ext>
+                </a:extLst>
+              </p14:cNvPr>
+              <p14:cNvContentPartPr/>
+              <p14:nvPr/>
+            </p14:nvContentPartPr>
+            <p14:xfrm>
+              <a:off x="8273088" y="1628856"/>
+              <a:ext cx="1557360" cy="685800"/>
+            </p14:xfrm>
+          </p:contentPart>
+        </mc:Choice>
+        <mc:Fallback xmlns="">
+          <p:pic>
+            <p:nvPicPr>
+              <p:cNvPr id="114" name="Ink 113">
+                <a:extLst>
+                  <a:ext uri="{FF2B5EF4-FFF2-40B4-BE49-F238E27FC236}">
+                    <a16:creationId xmlns:a16="http://schemas.microsoft.com/office/drawing/2014/main" id="{CEABFDDE-09F0-D43F-C215-491778C1C60D}"/>
+                  </a:ext>
+                </a:extLst>
+              </p:cNvPr>
+              <p:cNvPicPr/>
+              <p:nvPr/>
+            </p:nvPicPr>
+            <p:blipFill>
+              <a:blip r:embed="rId79"/>
+              <a:stretch>
+                <a:fillRect/>
+              </a:stretch>
+            </p:blipFill>
+            <p:spPr>
+              <a:xfrm>
+                <a:off x="8264448" y="1619856"/>
+                <a:ext cx="1575000" cy="703440"/>
+              </a:xfrm>
+              <a:prstGeom prst="rect">
+                <a:avLst/>
+              </a:prstGeom>
+            </p:spPr>
+          </p:pic>
+        </mc:Fallback>
+      </mc:AlternateContent>
+    </p:spTree>
+    <p:extLst>
+      <p:ext uri="{BB962C8B-B14F-4D97-AF65-F5344CB8AC3E}">
+        <p14:creationId xmlns:p14="http://schemas.microsoft.com/office/powerpoint/2010/main" val="2654403263"/>
       </p:ext>
     </p:extLst>
   </p:cSld>
